--- a/documents/conference-paper/05-presentation.pptx
+++ b/documents/conference-paper/05-presentation.pptx
@@ -4,22 +4,25 @@
   <p:sldMasterIdLst>
     <p:sldMasterId id="2147483648" r:id="rId1"/>
   </p:sldMasterIdLst>
+  <p:notesMasterIdLst>
+    <p:notesMasterId r:id="rId15"/>
+  </p:notesMasterIdLst>
   <p:sldIdLst>
-    <p:sldId id="256" r:id="rId7"/>
-    <p:sldId id="257" r:id="rId8"/>
-    <p:sldId id="258" r:id="rId9"/>
-    <p:sldId id="259" r:id="rId10"/>
-    <p:sldId id="260" r:id="rId11"/>
-    <p:sldId id="261" r:id="rId12"/>
-    <p:sldId id="262" r:id="rId13"/>
-    <p:sldId id="263" r:id="rId14"/>
-    <p:sldId id="264" r:id="rId15"/>
-    <p:sldId id="265" r:id="rId16"/>
-    <p:sldId id="266" r:id="rId17"/>
-    <p:sldId id="267" r:id="rId18"/>
-    <p:sldId id="268" r:id="rId19"/>
+    <p:sldId id="256" r:id="rId2"/>
+    <p:sldId id="257" r:id="rId3"/>
+    <p:sldId id="258" r:id="rId4"/>
+    <p:sldId id="259" r:id="rId5"/>
+    <p:sldId id="260" r:id="rId6"/>
+    <p:sldId id="261" r:id="rId7"/>
+    <p:sldId id="262" r:id="rId8"/>
+    <p:sldId id="263" r:id="rId9"/>
+    <p:sldId id="264" r:id="rId10"/>
+    <p:sldId id="265" r:id="rId11"/>
+    <p:sldId id="266" r:id="rId12"/>
+    <p:sldId id="267" r:id="rId13"/>
+    <p:sldId id="268" r:id="rId14"/>
   </p:sldIdLst>
-  <p:sldSz cx="12191695" cy="6858000" type="screen4x3"/>
+  <p:sldSz cx="12192000" cy="6858000"/>
   <p:notesSz cx="6858000" cy="9144000"/>
   <p:defaultTextStyle>
     <a:defPPr>
@@ -116,7 +119,4826 @@
       </a:defRPr>
     </a:lvl9pPr>
   </p:defaultTextStyle>
+  <p:extLst>
+    <p:ext uri="{EFAFB233-063F-42B5-8137-9DF3F51BA10A}">
+      <p15:sldGuideLst xmlns:p15="http://schemas.microsoft.com/office/powerpoint/2012/main">
+        <p15:guide id="1" orient="horz" pos="2160">
+          <p15:clr>
+            <a:srgbClr val="A4A3A4"/>
+          </p15:clr>
+        </p15:guide>
+        <p15:guide id="2" pos="2880">
+          <p15:clr>
+            <a:srgbClr val="A4A3A4"/>
+          </p15:clr>
+        </p15:guide>
+      </p15:sldGuideLst>
+    </p:ext>
+  </p:extLst>
 </p:presentation>
+</file>
+
+<file path=ppt/notesMasters/notesMaster1.xml><?xml version="1.0" encoding="utf-8"?>
+<p:notesMaster xmlns:a="http://schemas.openxmlformats.org/drawingml/2006/main" xmlns:r="http://schemas.openxmlformats.org/officeDocument/2006/relationships" xmlns:p="http://schemas.openxmlformats.org/presentationml/2006/main">
+  <p:cSld>
+    <p:bg>
+      <p:bgRef idx="1001">
+        <a:schemeClr val="bg1"/>
+      </p:bgRef>
+    </p:bg>
+    <p:spTree>
+      <p:nvGrpSpPr>
+        <p:cNvPr id="1" name=""/>
+        <p:cNvGrpSpPr/>
+        <p:nvPr/>
+      </p:nvGrpSpPr>
+      <p:grpSpPr>
+        <a:xfrm>
+          <a:off x="0" y="0"/>
+          <a:ext cx="0" cy="0"/>
+          <a:chOff x="0" y="0"/>
+          <a:chExt cx="0" cy="0"/>
+        </a:xfrm>
+      </p:grpSpPr>
+      <p:sp>
+        <p:nvSpPr>
+          <p:cNvPr id="2" name="Header Placeholder 1"/>
+          <p:cNvSpPr>
+            <a:spLocks noGrp="1"/>
+          </p:cNvSpPr>
+          <p:nvPr>
+            <p:ph type="hdr" sz="quarter"/>
+          </p:nvPr>
+        </p:nvSpPr>
+        <p:spPr>
+          <a:xfrm>
+            <a:off x="0" y="0"/>
+            <a:ext cx="2971800" cy="458788"/>
+          </a:xfrm>
+          <a:prstGeom prst="rect">
+            <a:avLst/>
+          </a:prstGeom>
+        </p:spPr>
+        <p:txBody>
+          <a:bodyPr vert="horz" lIns="91440" tIns="45720" rIns="91440" bIns="45720" rtlCol="0"/>
+          <a:lstStyle>
+            <a:lvl1pPr algn="l">
+              <a:defRPr sz="1200"/>
+            </a:lvl1pPr>
+          </a:lstStyle>
+          <a:p>
+            <a:endParaRPr lang="en-US"/>
+          </a:p>
+        </p:txBody>
+      </p:sp>
+      <p:sp>
+        <p:nvSpPr>
+          <p:cNvPr id="3" name="Date Placeholder 2"/>
+          <p:cNvSpPr>
+            <a:spLocks noGrp="1"/>
+          </p:cNvSpPr>
+          <p:nvPr>
+            <p:ph type="dt" idx="1"/>
+          </p:nvPr>
+        </p:nvSpPr>
+        <p:spPr>
+          <a:xfrm>
+            <a:off x="3884613" y="0"/>
+            <a:ext cx="2971800" cy="458788"/>
+          </a:xfrm>
+          <a:prstGeom prst="rect">
+            <a:avLst/>
+          </a:prstGeom>
+        </p:spPr>
+        <p:txBody>
+          <a:bodyPr vert="horz" lIns="91440" tIns="45720" rIns="91440" bIns="45720" rtlCol="0"/>
+          <a:lstStyle>
+            <a:lvl1pPr algn="r">
+              <a:defRPr sz="1200"/>
+            </a:lvl1pPr>
+          </a:lstStyle>
+          <a:p>
+            <a:fld id="{9B175897-770F-44E1-AB8A-2B32C30B7758}" type="datetimeFigureOut">
+              <a:rPr lang="en-US" smtClean="0"/>
+              <a:t>5/9/2026</a:t>
+            </a:fld>
+            <a:endParaRPr lang="en-US"/>
+          </a:p>
+        </p:txBody>
+      </p:sp>
+      <p:sp>
+        <p:nvSpPr>
+          <p:cNvPr id="4" name="Slide Image Placeholder 3"/>
+          <p:cNvSpPr>
+            <a:spLocks noGrp="1" noRot="1" noChangeAspect="1"/>
+          </p:cNvSpPr>
+          <p:nvPr>
+            <p:ph type="sldImg" idx="2"/>
+          </p:nvPr>
+        </p:nvSpPr>
+        <p:spPr>
+          <a:xfrm>
+            <a:off x="685800" y="1143000"/>
+            <a:ext cx="5486400" cy="3086100"/>
+          </a:xfrm>
+          <a:prstGeom prst="rect">
+            <a:avLst/>
+          </a:prstGeom>
+          <a:noFill/>
+          <a:ln w="12700">
+            <a:solidFill>
+              <a:prstClr val="black"/>
+            </a:solidFill>
+          </a:ln>
+        </p:spPr>
+        <p:txBody>
+          <a:bodyPr vert="horz" lIns="91440" tIns="45720" rIns="91440" bIns="45720" rtlCol="0" anchor="ctr"/>
+          <a:lstStyle/>
+          <a:p>
+            <a:endParaRPr lang="en-US"/>
+          </a:p>
+        </p:txBody>
+      </p:sp>
+      <p:sp>
+        <p:nvSpPr>
+          <p:cNvPr id="5" name="Notes Placeholder 4"/>
+          <p:cNvSpPr>
+            <a:spLocks noGrp="1"/>
+          </p:cNvSpPr>
+          <p:nvPr>
+            <p:ph type="body" sz="quarter" idx="3"/>
+          </p:nvPr>
+        </p:nvSpPr>
+        <p:spPr>
+          <a:xfrm>
+            <a:off x="685800" y="4400550"/>
+            <a:ext cx="5486400" cy="3600450"/>
+          </a:xfrm>
+          <a:prstGeom prst="rect">
+            <a:avLst/>
+          </a:prstGeom>
+        </p:spPr>
+        <p:txBody>
+          <a:bodyPr vert="horz" lIns="91440" tIns="45720" rIns="91440" bIns="45720" rtlCol="0"/>
+          <a:lstStyle/>
+          <a:p>
+            <a:pPr lvl="0"/>
+            <a:r>
+              <a:rPr lang="en-US"/>
+              <a:t>Click to edit Master text styles</a:t>
+            </a:r>
+          </a:p>
+          <a:p>
+            <a:pPr lvl="1"/>
+            <a:r>
+              <a:rPr lang="en-US"/>
+              <a:t>Second level</a:t>
+            </a:r>
+          </a:p>
+          <a:p>
+            <a:pPr lvl="2"/>
+            <a:r>
+              <a:rPr lang="en-US"/>
+              <a:t>Third level</a:t>
+            </a:r>
+          </a:p>
+          <a:p>
+            <a:pPr lvl="3"/>
+            <a:r>
+              <a:rPr lang="en-US"/>
+              <a:t>Fourth level</a:t>
+            </a:r>
+          </a:p>
+          <a:p>
+            <a:pPr lvl="4"/>
+            <a:r>
+              <a:rPr lang="en-US"/>
+              <a:t>Fifth level</a:t>
+            </a:r>
+          </a:p>
+        </p:txBody>
+      </p:sp>
+      <p:sp>
+        <p:nvSpPr>
+          <p:cNvPr id="6" name="Footer Placeholder 5"/>
+          <p:cNvSpPr>
+            <a:spLocks noGrp="1"/>
+          </p:cNvSpPr>
+          <p:nvPr>
+            <p:ph type="ftr" sz="quarter" idx="4"/>
+          </p:nvPr>
+        </p:nvSpPr>
+        <p:spPr>
+          <a:xfrm>
+            <a:off x="0" y="8685213"/>
+            <a:ext cx="2971800" cy="458787"/>
+          </a:xfrm>
+          <a:prstGeom prst="rect">
+            <a:avLst/>
+          </a:prstGeom>
+        </p:spPr>
+        <p:txBody>
+          <a:bodyPr vert="horz" lIns="91440" tIns="45720" rIns="91440" bIns="45720" rtlCol="0" anchor="b"/>
+          <a:lstStyle>
+            <a:lvl1pPr algn="l">
+              <a:defRPr sz="1200"/>
+            </a:lvl1pPr>
+          </a:lstStyle>
+          <a:p>
+            <a:endParaRPr lang="en-US"/>
+          </a:p>
+        </p:txBody>
+      </p:sp>
+      <p:sp>
+        <p:nvSpPr>
+          <p:cNvPr id="7" name="Slide Number Placeholder 6"/>
+          <p:cNvSpPr>
+            <a:spLocks noGrp="1"/>
+          </p:cNvSpPr>
+          <p:nvPr>
+            <p:ph type="sldNum" sz="quarter" idx="5"/>
+          </p:nvPr>
+        </p:nvSpPr>
+        <p:spPr>
+          <a:xfrm>
+            <a:off x="3884613" y="8685213"/>
+            <a:ext cx="2971800" cy="458787"/>
+          </a:xfrm>
+          <a:prstGeom prst="rect">
+            <a:avLst/>
+          </a:prstGeom>
+        </p:spPr>
+        <p:txBody>
+          <a:bodyPr vert="horz" lIns="91440" tIns="45720" rIns="91440" bIns="45720" rtlCol="0" anchor="b"/>
+          <a:lstStyle>
+            <a:lvl1pPr algn="r">
+              <a:defRPr sz="1200"/>
+            </a:lvl1pPr>
+          </a:lstStyle>
+          <a:p>
+            <a:fld id="{5F54E561-7F9C-441E-AFBA-1F000FF79D64}" type="slidenum">
+              <a:rPr lang="en-US" smtClean="0"/>
+              <a:t>‹#›</a:t>
+            </a:fld>
+            <a:endParaRPr lang="en-US"/>
+          </a:p>
+        </p:txBody>
+      </p:sp>
+    </p:spTree>
+    <p:extLst>
+      <p:ext uri="{BB962C8B-B14F-4D97-AF65-F5344CB8AC3E}">
+        <p14:creationId xmlns:p14="http://schemas.microsoft.com/office/powerpoint/2010/main" val="3889821737"/>
+      </p:ext>
+    </p:extLst>
+  </p:cSld>
+  <p:clrMap bg1="lt1" tx1="dk1" bg2="lt2" tx2="dk2" accent1="accent1" accent2="accent2" accent3="accent3" accent4="accent4" accent5="accent5" accent6="accent6" hlink="hlink" folHlink="folHlink"/>
+  <p:notesStyle>
+    <a:lvl1pPr marL="0" algn="l" defTabSz="914400" rtl="0" eaLnBrk="1" latinLnBrk="0" hangingPunct="1">
+      <a:defRPr sz="1200" kern="1200">
+        <a:solidFill>
+          <a:schemeClr val="tx1"/>
+        </a:solidFill>
+        <a:latin typeface="+mn-lt"/>
+        <a:ea typeface="+mn-ea"/>
+        <a:cs typeface="+mn-cs"/>
+      </a:defRPr>
+    </a:lvl1pPr>
+    <a:lvl2pPr marL="457200" algn="l" defTabSz="914400" rtl="0" eaLnBrk="1" latinLnBrk="0" hangingPunct="1">
+      <a:defRPr sz="1200" kern="1200">
+        <a:solidFill>
+          <a:schemeClr val="tx1"/>
+        </a:solidFill>
+        <a:latin typeface="+mn-lt"/>
+        <a:ea typeface="+mn-ea"/>
+        <a:cs typeface="+mn-cs"/>
+      </a:defRPr>
+    </a:lvl2pPr>
+    <a:lvl3pPr marL="914400" algn="l" defTabSz="914400" rtl="0" eaLnBrk="1" latinLnBrk="0" hangingPunct="1">
+      <a:defRPr sz="1200" kern="1200">
+        <a:solidFill>
+          <a:schemeClr val="tx1"/>
+        </a:solidFill>
+        <a:latin typeface="+mn-lt"/>
+        <a:ea typeface="+mn-ea"/>
+        <a:cs typeface="+mn-cs"/>
+      </a:defRPr>
+    </a:lvl3pPr>
+    <a:lvl4pPr marL="1371600" algn="l" defTabSz="914400" rtl="0" eaLnBrk="1" latinLnBrk="0" hangingPunct="1">
+      <a:defRPr sz="1200" kern="1200">
+        <a:solidFill>
+          <a:schemeClr val="tx1"/>
+        </a:solidFill>
+        <a:latin typeface="+mn-lt"/>
+        <a:ea typeface="+mn-ea"/>
+        <a:cs typeface="+mn-cs"/>
+      </a:defRPr>
+    </a:lvl4pPr>
+    <a:lvl5pPr marL="1828800" algn="l" defTabSz="914400" rtl="0" eaLnBrk="1" latinLnBrk="0" hangingPunct="1">
+      <a:defRPr sz="1200" kern="1200">
+        <a:solidFill>
+          <a:schemeClr val="tx1"/>
+        </a:solidFill>
+        <a:latin typeface="+mn-lt"/>
+        <a:ea typeface="+mn-ea"/>
+        <a:cs typeface="+mn-cs"/>
+      </a:defRPr>
+    </a:lvl5pPr>
+    <a:lvl6pPr marL="2286000" algn="l" defTabSz="914400" rtl="0" eaLnBrk="1" latinLnBrk="0" hangingPunct="1">
+      <a:defRPr sz="1200" kern="1200">
+        <a:solidFill>
+          <a:schemeClr val="tx1"/>
+        </a:solidFill>
+        <a:latin typeface="+mn-lt"/>
+        <a:ea typeface="+mn-ea"/>
+        <a:cs typeface="+mn-cs"/>
+      </a:defRPr>
+    </a:lvl6pPr>
+    <a:lvl7pPr marL="2743200" algn="l" defTabSz="914400" rtl="0" eaLnBrk="1" latinLnBrk="0" hangingPunct="1">
+      <a:defRPr sz="1200" kern="1200">
+        <a:solidFill>
+          <a:schemeClr val="tx1"/>
+        </a:solidFill>
+        <a:latin typeface="+mn-lt"/>
+        <a:ea typeface="+mn-ea"/>
+        <a:cs typeface="+mn-cs"/>
+      </a:defRPr>
+    </a:lvl7pPr>
+    <a:lvl8pPr marL="3200400" algn="l" defTabSz="914400" rtl="0" eaLnBrk="1" latinLnBrk="0" hangingPunct="1">
+      <a:defRPr sz="1200" kern="1200">
+        <a:solidFill>
+          <a:schemeClr val="tx1"/>
+        </a:solidFill>
+        <a:latin typeface="+mn-lt"/>
+        <a:ea typeface="+mn-ea"/>
+        <a:cs typeface="+mn-cs"/>
+      </a:defRPr>
+    </a:lvl8pPr>
+    <a:lvl9pPr marL="3657600" algn="l" defTabSz="914400" rtl="0" eaLnBrk="1" latinLnBrk="0" hangingPunct="1">
+      <a:defRPr sz="1200" kern="1200">
+        <a:solidFill>
+          <a:schemeClr val="tx1"/>
+        </a:solidFill>
+        <a:latin typeface="+mn-lt"/>
+        <a:ea typeface="+mn-ea"/>
+        <a:cs typeface="+mn-cs"/>
+      </a:defRPr>
+    </a:lvl9pPr>
+  </p:notesStyle>
+</p:notesMaster>
+</file>
+
+<file path=ppt/notesSlides/notesSlide1.xml><?xml version="1.0" encoding="utf-8"?>
+<p:notes xmlns:a="http://schemas.openxmlformats.org/drawingml/2006/main" xmlns:r="http://schemas.openxmlformats.org/officeDocument/2006/relationships" xmlns:p="http://schemas.openxmlformats.org/presentationml/2006/main">
+  <p:cSld>
+    <p:spTree>
+      <p:nvGrpSpPr>
+        <p:cNvPr id="1" name=""/>
+        <p:cNvGrpSpPr/>
+        <p:nvPr/>
+      </p:nvGrpSpPr>
+      <p:grpSpPr>
+        <a:xfrm>
+          <a:off x="0" y="0"/>
+          <a:ext cx="0" cy="0"/>
+          <a:chOff x="0" y="0"/>
+          <a:chExt cx="0" cy="0"/>
+        </a:xfrm>
+      </p:grpSpPr>
+      <p:sp>
+        <p:nvSpPr>
+          <p:cNvPr id="2" name="Slide Image Placeholder 1"/>
+          <p:cNvSpPr>
+            <a:spLocks noGrp="1" noRot="1" noChangeAspect="1"/>
+          </p:cNvSpPr>
+          <p:nvPr>
+            <p:ph type="sldImg"/>
+          </p:nvPr>
+        </p:nvSpPr>
+        <p:spPr/>
+      </p:sp>
+      <p:sp>
+        <p:nvSpPr>
+          <p:cNvPr id="3" name="Notes Placeholder 2"/>
+          <p:cNvSpPr>
+            <a:spLocks noGrp="1"/>
+          </p:cNvSpPr>
+          <p:nvPr>
+            <p:ph type="body" idx="1"/>
+          </p:nvPr>
+        </p:nvSpPr>
+        <p:spPr/>
+        <p:txBody>
+          <a:bodyPr/>
+          <a:lstStyle/>
+          <a:p>
+            <a:r>
+              <a:rPr lang="vi-VN" sz="1200" b="0" i="0" kern="1200" dirty="0">
+                <a:solidFill>
+                  <a:schemeClr val="tx1"/>
+                </a:solidFill>
+                <a:effectLst/>
+                <a:latin typeface="+mn-lt"/>
+                <a:ea typeface="+mn-ea"/>
+                <a:cs typeface="+mn-cs"/>
+              </a:rPr>
+              <a:t>Greet: name → </a:t>
+            </a:r>
+            <a:r>
+              <a:rPr lang="vi-VN" sz="1200" b="1" i="0" kern="1200" dirty="0">
+                <a:solidFill>
+                  <a:schemeClr val="tx1"/>
+                </a:solidFill>
+                <a:effectLst/>
+                <a:latin typeface="+mn-lt"/>
+                <a:ea typeface="+mn-ea"/>
+                <a:cs typeface="+mn-cs"/>
+              </a:rPr>
+              <a:t>Nguyễn Tuấn Dương</a:t>
+            </a:r>
+            <a:r>
+              <a:rPr lang="vi-VN" sz="1200" b="0" i="0" kern="1200" dirty="0">
+                <a:solidFill>
+                  <a:schemeClr val="tx1"/>
+                </a:solidFill>
+                <a:effectLst/>
+                <a:latin typeface="+mn-lt"/>
+                <a:ea typeface="+mn-ea"/>
+                <a:cs typeface="+mn-cs"/>
+              </a:rPr>
+              <a:t>, class </a:t>
+            </a:r>
+            <a:r>
+              <a:rPr lang="vi-VN" sz="1200" b="1" i="0" kern="1200" dirty="0">
+                <a:solidFill>
+                  <a:schemeClr val="tx1"/>
+                </a:solidFill>
+                <a:effectLst/>
+                <a:latin typeface="+mn-lt"/>
+                <a:ea typeface="+mn-ea"/>
+                <a:cs typeface="+mn-cs"/>
+              </a:rPr>
+              <a:t>1C22</a:t>
+            </a:r>
+            <a:r>
+              <a:rPr lang="vi-VN" sz="1200" b="0" i="0" kern="1200" dirty="0">
+                <a:solidFill>
+                  <a:schemeClr val="tx1"/>
+                </a:solidFill>
+                <a:effectLst/>
+                <a:latin typeface="+mn-lt"/>
+                <a:ea typeface="+mn-ea"/>
+                <a:cs typeface="+mn-cs"/>
+              </a:rPr>
+              <a:t>, Faculty of IT.</a:t>
+            </a:r>
+          </a:p>
+          <a:p>
+            <a:r>
+              <a:rPr lang="vi-VN" sz="1200" b="0" i="0" kern="1200" dirty="0">
+                <a:solidFill>
+                  <a:schemeClr val="tx1"/>
+                </a:solidFill>
+                <a:effectLst/>
+                <a:latin typeface="+mn-lt"/>
+                <a:ea typeface="+mn-ea"/>
+                <a:cs typeface="+mn-cs"/>
+              </a:rPr>
+              <a:t>Advisor: </a:t>
+            </a:r>
+            <a:r>
+              <a:rPr lang="vi-VN" sz="1200" b="1" i="0" u="none" strike="noStrike" kern="1200" dirty="0">
+                <a:solidFill>
+                  <a:schemeClr val="tx1"/>
+                </a:solidFill>
+                <a:effectLst/>
+                <a:latin typeface="+mn-lt"/>
+                <a:ea typeface="+mn-ea"/>
+                <a:cs typeface="+mn-cs"/>
+                <a:hlinkClick r:id="rId3"/>
+              </a:rPr>
+              <a:t>M.Sc</a:t>
+            </a:r>
+            <a:r>
+              <a:rPr lang="vi-VN" sz="1200" b="1" i="0" kern="1200" dirty="0">
+                <a:solidFill>
+                  <a:schemeClr val="tx1"/>
+                </a:solidFill>
+                <a:effectLst/>
+                <a:latin typeface="+mn-lt"/>
+                <a:ea typeface="+mn-ea"/>
+                <a:cs typeface="+mn-cs"/>
+              </a:rPr>
+              <a:t>. Bùi Quốc Khánh</a:t>
+            </a:r>
+            <a:r>
+              <a:rPr lang="vi-VN" sz="1200" b="0" i="0" kern="1200" dirty="0">
+                <a:solidFill>
+                  <a:schemeClr val="tx1"/>
+                </a:solidFill>
+                <a:effectLst/>
+                <a:latin typeface="+mn-lt"/>
+                <a:ea typeface="+mn-ea"/>
+                <a:cs typeface="+mn-cs"/>
+              </a:rPr>
+              <a:t>.</a:t>
+            </a:r>
+          </a:p>
+          <a:p>
+            <a:r>
+              <a:rPr lang="vi-VN" sz="1200" b="0" i="0" kern="1200" dirty="0">
+                <a:solidFill>
+                  <a:schemeClr val="tx1"/>
+                </a:solidFill>
+                <a:effectLst/>
+                <a:latin typeface="+mn-lt"/>
+                <a:ea typeface="+mn-ea"/>
+                <a:cs typeface="+mn-cs"/>
+              </a:rPr>
+              <a:t>One-line pitch: </a:t>
+            </a:r>
+            <a:r>
+              <a:rPr lang="vi-VN" sz="1200" b="0" i="1" kern="1200" dirty="0">
+                <a:solidFill>
+                  <a:schemeClr val="tx1"/>
+                </a:solidFill>
+                <a:effectLst/>
+                <a:latin typeface="+mn-lt"/>
+                <a:ea typeface="+mn-ea"/>
+                <a:cs typeface="+mn-cs"/>
+              </a:rPr>
+              <a:t>"a five-layer adaptive platform that personalises programming practice on every code submission."</a:t>
+            </a:r>
+            <a:endParaRPr lang="vi-VN" sz="1200" b="0" i="0" kern="1200" dirty="0">
+              <a:solidFill>
+                <a:schemeClr val="tx1"/>
+              </a:solidFill>
+              <a:effectLst/>
+              <a:latin typeface="+mn-lt"/>
+              <a:ea typeface="+mn-ea"/>
+              <a:cs typeface="+mn-cs"/>
+            </a:endParaRPr>
+          </a:p>
+          <a:p>
+            <a:r>
+              <a:rPr lang="vi-VN" sz="1200" b="0" i="0" kern="1200" dirty="0">
+                <a:solidFill>
+                  <a:schemeClr val="tx1"/>
+                </a:solidFill>
+                <a:effectLst/>
+                <a:latin typeface="+mn-lt"/>
+                <a:ea typeface="+mn-ea"/>
+                <a:cs typeface="+mn-cs"/>
+              </a:rPr>
+              <a:t>Frame upfront: </a:t>
+            </a:r>
+            <a:r>
+              <a:rPr lang="vi-VN" sz="1200" b="1" i="0" kern="1200" dirty="0">
+                <a:solidFill>
+                  <a:schemeClr val="tx1"/>
+                </a:solidFill>
+                <a:effectLst/>
+                <a:latin typeface="+mn-lt"/>
+                <a:ea typeface="+mn-ea"/>
+                <a:cs typeface="+mn-cs"/>
+              </a:rPr>
+              <a:t>implementation paper + pre-registered pilot protocol</a:t>
+            </a:r>
+            <a:r>
+              <a:rPr lang="vi-VN" sz="1200" b="0" i="0" kern="1200" dirty="0">
+                <a:solidFill>
+                  <a:schemeClr val="tx1"/>
+                </a:solidFill>
+                <a:effectLst/>
+                <a:latin typeface="+mn-lt"/>
+                <a:ea typeface="+mn-ea"/>
+                <a:cs typeface="+mn-cs"/>
+              </a:rPr>
+              <a:t>.</a:t>
+            </a:r>
+            <a:endParaRPr lang="en-US" sz="1200" b="0" i="0" kern="1200" dirty="0">
+              <a:solidFill>
+                <a:schemeClr val="tx1"/>
+              </a:solidFill>
+              <a:effectLst/>
+              <a:latin typeface="+mn-lt"/>
+              <a:ea typeface="+mn-ea"/>
+              <a:cs typeface="+mn-cs"/>
+            </a:endParaRPr>
+          </a:p>
+          <a:p>
+            <a:endParaRPr lang="vi-VN" sz="1200" b="0" i="0" kern="1200" dirty="0">
+              <a:solidFill>
+                <a:schemeClr val="tx1"/>
+              </a:solidFill>
+              <a:effectLst/>
+              <a:latin typeface="+mn-lt"/>
+              <a:ea typeface="+mn-ea"/>
+              <a:cs typeface="+mn-cs"/>
+            </a:endParaRPr>
+          </a:p>
+          <a:p>
+            <a:r>
+              <a:rPr lang="vi-VN" sz="1200" b="0" i="0" kern="1200" dirty="0">
+                <a:solidFill>
+                  <a:schemeClr val="tx1"/>
+                </a:solidFill>
+                <a:effectLst/>
+                <a:latin typeface="+mn-lt"/>
+                <a:ea typeface="+mn-ea"/>
+                <a:cs typeface="+mn-cs"/>
+              </a:rPr>
+              <a:t>Pause 2s after advisor's name. Don't rush.</a:t>
+            </a:r>
+          </a:p>
+          <a:p>
+            <a:endParaRPr lang="en-US" dirty="0"/>
+          </a:p>
+        </p:txBody>
+      </p:sp>
+      <p:sp>
+        <p:nvSpPr>
+          <p:cNvPr id="4" name="Slide Number Placeholder 3"/>
+          <p:cNvSpPr>
+            <a:spLocks noGrp="1"/>
+          </p:cNvSpPr>
+          <p:nvPr>
+            <p:ph type="sldNum" sz="quarter" idx="5"/>
+          </p:nvPr>
+        </p:nvSpPr>
+        <p:spPr/>
+        <p:txBody>
+          <a:bodyPr/>
+          <a:lstStyle/>
+          <a:p>
+            <a:fld id="{5F54E561-7F9C-441E-AFBA-1F000FF79D64}" type="slidenum">
+              <a:rPr lang="en-US" smtClean="0"/>
+              <a:t>1</a:t>
+            </a:fld>
+            <a:endParaRPr lang="en-US"/>
+          </a:p>
+        </p:txBody>
+      </p:sp>
+    </p:spTree>
+    <p:extLst>
+      <p:ext uri="{BB962C8B-B14F-4D97-AF65-F5344CB8AC3E}">
+        <p14:creationId xmlns:p14="http://schemas.microsoft.com/office/powerpoint/2010/main" val="2876080920"/>
+      </p:ext>
+    </p:extLst>
+  </p:cSld>
+  <p:clrMapOvr>
+    <a:masterClrMapping/>
+  </p:clrMapOvr>
+</p:notes>
+</file>
+
+<file path=ppt/notesSlides/notesSlide10.xml><?xml version="1.0" encoding="utf-8"?>
+<p:notes xmlns:a="http://schemas.openxmlformats.org/drawingml/2006/main" xmlns:r="http://schemas.openxmlformats.org/officeDocument/2006/relationships" xmlns:p="http://schemas.openxmlformats.org/presentationml/2006/main">
+  <p:cSld>
+    <p:spTree>
+      <p:nvGrpSpPr>
+        <p:cNvPr id="1" name=""/>
+        <p:cNvGrpSpPr/>
+        <p:nvPr/>
+      </p:nvGrpSpPr>
+      <p:grpSpPr>
+        <a:xfrm>
+          <a:off x="0" y="0"/>
+          <a:ext cx="0" cy="0"/>
+          <a:chOff x="0" y="0"/>
+          <a:chExt cx="0" cy="0"/>
+        </a:xfrm>
+      </p:grpSpPr>
+      <p:sp>
+        <p:nvSpPr>
+          <p:cNvPr id="2" name="Slide Image Placeholder 1"/>
+          <p:cNvSpPr>
+            <a:spLocks noGrp="1" noRot="1" noChangeAspect="1"/>
+          </p:cNvSpPr>
+          <p:nvPr>
+            <p:ph type="sldImg"/>
+          </p:nvPr>
+        </p:nvSpPr>
+        <p:spPr/>
+      </p:sp>
+      <p:sp>
+        <p:nvSpPr>
+          <p:cNvPr id="3" name="Notes Placeholder 2"/>
+          <p:cNvSpPr>
+            <a:spLocks noGrp="1"/>
+          </p:cNvSpPr>
+          <p:nvPr>
+            <p:ph type="body" idx="1"/>
+          </p:nvPr>
+        </p:nvSpPr>
+        <p:spPr/>
+        <p:txBody>
+          <a:bodyPr/>
+          <a:lstStyle/>
+          <a:p>
+            <a:r>
+              <a:rPr lang="en-US" sz="1200" b="0" i="0" kern="1200" dirty="0">
+                <a:solidFill>
+                  <a:schemeClr val="tx1"/>
+                </a:solidFill>
+                <a:effectLst/>
+                <a:latin typeface="+mn-lt"/>
+                <a:ea typeface="+mn-ea"/>
+                <a:cs typeface="+mn-cs"/>
+              </a:rPr>
+              <a:t>What's actually built:</a:t>
+            </a:r>
+          </a:p>
+          <a:p>
+            <a:r>
+              <a:rPr lang="en-US" sz="1200" b="0" i="0" kern="1200" dirty="0">
+                <a:solidFill>
+                  <a:schemeClr val="tx1"/>
+                </a:solidFill>
+                <a:effectLst/>
+                <a:latin typeface="+mn-lt"/>
+                <a:ea typeface="+mn-ea"/>
+                <a:cs typeface="+mn-cs"/>
+              </a:rPr>
+              <a:t>4 components: </a:t>
+            </a:r>
+            <a:r>
+              <a:rPr lang="en-US" sz="1200" b="1" i="0" kern="1200" dirty="0">
+                <a:solidFill>
+                  <a:schemeClr val="tx1"/>
+                </a:solidFill>
+                <a:effectLst/>
+                <a:latin typeface="+mn-lt"/>
+                <a:ea typeface="+mn-ea"/>
+                <a:cs typeface="+mn-cs"/>
+              </a:rPr>
+              <a:t>React</a:t>
+            </a:r>
+            <a:r>
+              <a:rPr lang="en-US" sz="1200" b="0" i="0" kern="1200" dirty="0">
+                <a:solidFill>
+                  <a:schemeClr val="tx1"/>
+                </a:solidFill>
+                <a:effectLst/>
+                <a:latin typeface="+mn-lt"/>
+                <a:ea typeface="+mn-ea"/>
+                <a:cs typeface="+mn-cs"/>
+              </a:rPr>
+              <a:t> + </a:t>
+            </a:r>
+            <a:r>
+              <a:rPr lang="en-US" sz="1200" b="1" i="0" kern="1200" dirty="0" err="1">
+                <a:solidFill>
+                  <a:schemeClr val="tx1"/>
+                </a:solidFill>
+                <a:effectLst/>
+                <a:latin typeface="+mn-lt"/>
+                <a:ea typeface="+mn-ea"/>
+                <a:cs typeface="+mn-cs"/>
+              </a:rPr>
+              <a:t>NestJS</a:t>
+            </a:r>
+            <a:r>
+              <a:rPr lang="en-US" sz="1200" b="0" i="0" kern="1200" dirty="0">
+                <a:solidFill>
+                  <a:schemeClr val="tx1"/>
+                </a:solidFill>
+                <a:effectLst/>
+                <a:latin typeface="+mn-lt"/>
+                <a:ea typeface="+mn-ea"/>
+                <a:cs typeface="+mn-cs"/>
+              </a:rPr>
+              <a:t> + </a:t>
+            </a:r>
+            <a:r>
+              <a:rPr lang="en-US" sz="1200" b="1" i="0" kern="1200" dirty="0" err="1">
+                <a:solidFill>
+                  <a:schemeClr val="tx1"/>
+                </a:solidFill>
+                <a:effectLst/>
+                <a:latin typeface="+mn-lt"/>
+                <a:ea typeface="+mn-ea"/>
+                <a:cs typeface="+mn-cs"/>
+              </a:rPr>
+              <a:t>FastAPI</a:t>
+            </a:r>
+            <a:r>
+              <a:rPr lang="en-US" sz="1200" b="0" i="0" kern="1200" dirty="0">
+                <a:solidFill>
+                  <a:schemeClr val="tx1"/>
+                </a:solidFill>
+                <a:effectLst/>
+                <a:latin typeface="+mn-lt"/>
+                <a:ea typeface="+mn-ea"/>
+                <a:cs typeface="+mn-cs"/>
+              </a:rPr>
+              <a:t> + </a:t>
+            </a:r>
+            <a:r>
+              <a:rPr lang="en-US" sz="1200" b="1" i="0" kern="1200" dirty="0">
+                <a:solidFill>
+                  <a:schemeClr val="tx1"/>
+                </a:solidFill>
+                <a:effectLst/>
+                <a:latin typeface="+mn-lt"/>
+                <a:ea typeface="+mn-ea"/>
+                <a:cs typeface="+mn-cs"/>
+              </a:rPr>
+              <a:t>PostgreSQL/Redis</a:t>
+            </a:r>
+            <a:r>
+              <a:rPr lang="en-US" sz="1200" b="0" i="0" kern="1200" dirty="0">
+                <a:solidFill>
+                  <a:schemeClr val="tx1"/>
+                </a:solidFill>
+                <a:effectLst/>
+                <a:latin typeface="+mn-lt"/>
+                <a:ea typeface="+mn-ea"/>
+                <a:cs typeface="+mn-cs"/>
+              </a:rPr>
+              <a:t>.</a:t>
+            </a:r>
+          </a:p>
+          <a:p>
+            <a:r>
+              <a:rPr lang="en-US" sz="1200" b="0" i="0" kern="1200" dirty="0">
+                <a:solidFill>
+                  <a:schemeClr val="tx1"/>
+                </a:solidFill>
+                <a:effectLst/>
+                <a:latin typeface="+mn-lt"/>
+                <a:ea typeface="+mn-ea"/>
+                <a:cs typeface="+mn-cs"/>
+              </a:rPr>
+              <a:t>~</a:t>
+            </a:r>
+            <a:r>
+              <a:rPr lang="en-US" sz="1200" b="1" i="0" kern="1200" dirty="0">
+                <a:solidFill>
+                  <a:schemeClr val="tx1"/>
+                </a:solidFill>
+                <a:effectLst/>
+                <a:latin typeface="+mn-lt"/>
+                <a:ea typeface="+mn-ea"/>
+                <a:cs typeface="+mn-cs"/>
+              </a:rPr>
+              <a:t>15k LOC</a:t>
+            </a:r>
+            <a:r>
+              <a:rPr lang="en-US" sz="1200" b="0" i="0" kern="1200" dirty="0">
+                <a:solidFill>
+                  <a:schemeClr val="tx1"/>
+                </a:solidFill>
+                <a:effectLst/>
+                <a:latin typeface="+mn-lt"/>
+                <a:ea typeface="+mn-ea"/>
+                <a:cs typeface="+mn-cs"/>
+              </a:rPr>
+              <a:t>, </a:t>
+            </a:r>
+            <a:r>
+              <a:rPr lang="en-US" sz="1200" b="1" i="0" kern="1200" dirty="0">
+                <a:solidFill>
+                  <a:schemeClr val="tx1"/>
+                </a:solidFill>
+                <a:effectLst/>
+                <a:latin typeface="+mn-lt"/>
+                <a:ea typeface="+mn-ea"/>
+                <a:cs typeface="+mn-cs"/>
+              </a:rPr>
+              <a:t>28 concepts</a:t>
+            </a:r>
+            <a:r>
+              <a:rPr lang="en-US" sz="1200" b="0" i="0" kern="1200" dirty="0">
+                <a:solidFill>
+                  <a:schemeClr val="tx1"/>
+                </a:solidFill>
+                <a:effectLst/>
+                <a:latin typeface="+mn-lt"/>
+                <a:ea typeface="+mn-ea"/>
+                <a:cs typeface="+mn-cs"/>
+              </a:rPr>
+              <a:t>, </a:t>
+            </a:r>
+            <a:r>
+              <a:rPr lang="en-US" sz="1200" b="1" i="0" kern="1200" dirty="0">
+                <a:solidFill>
+                  <a:schemeClr val="tx1"/>
+                </a:solidFill>
+                <a:effectLst/>
+                <a:latin typeface="+mn-lt"/>
+                <a:ea typeface="+mn-ea"/>
+                <a:cs typeface="+mn-cs"/>
+              </a:rPr>
+              <a:t>170 problems</a:t>
+            </a:r>
+            <a:r>
+              <a:rPr lang="en-US" sz="1200" b="0" i="0" kern="1200" dirty="0">
+                <a:solidFill>
+                  <a:schemeClr val="tx1"/>
+                </a:solidFill>
+                <a:effectLst/>
+                <a:latin typeface="+mn-lt"/>
+                <a:ea typeface="+mn-ea"/>
+                <a:cs typeface="+mn-cs"/>
+              </a:rPr>
+              <a:t>, </a:t>
+            </a:r>
+            <a:r>
+              <a:rPr lang="en-US" sz="1200" b="1" i="0" kern="1200" dirty="0">
+                <a:solidFill>
+                  <a:schemeClr val="tx1"/>
+                </a:solidFill>
+                <a:effectLst/>
+                <a:latin typeface="+mn-lt"/>
+                <a:ea typeface="+mn-ea"/>
+                <a:cs typeface="+mn-cs"/>
+              </a:rPr>
+              <a:t>&lt; 500 </a:t>
+            </a:r>
+            <a:r>
+              <a:rPr lang="en-US" sz="1200" b="1" i="0" kern="1200" dirty="0" err="1">
+                <a:solidFill>
+                  <a:schemeClr val="tx1"/>
+                </a:solidFill>
+                <a:effectLst/>
+                <a:latin typeface="+mn-lt"/>
+                <a:ea typeface="+mn-ea"/>
+                <a:cs typeface="+mn-cs"/>
+              </a:rPr>
+              <a:t>ms</a:t>
+            </a:r>
+            <a:r>
+              <a:rPr lang="en-US" sz="1200" b="0" i="0" kern="1200" dirty="0">
+                <a:solidFill>
+                  <a:schemeClr val="tx1"/>
+                </a:solidFill>
+                <a:effectLst/>
+                <a:latin typeface="+mn-lt"/>
+                <a:ea typeface="+mn-ea"/>
+                <a:cs typeface="+mn-cs"/>
+              </a:rPr>
+              <a:t> p95 recommendation latency.</a:t>
+            </a:r>
+          </a:p>
+          <a:p>
+            <a:r>
+              <a:rPr lang="en-US" sz="1200" b="0" i="0" kern="1200" dirty="0">
+                <a:solidFill>
+                  <a:schemeClr val="tx1"/>
+                </a:solidFill>
+                <a:effectLst/>
+                <a:latin typeface="+mn-lt"/>
+                <a:ea typeface="+mn-ea"/>
+                <a:cs typeface="+mn-cs"/>
+              </a:rPr>
+              <a:t>E2E tests cover full submit-to-recommend round-trip.</a:t>
+            </a:r>
+          </a:p>
+          <a:p>
+            <a:r>
+              <a:rPr lang="en-US" sz="1200" b="1" i="0" kern="1200" dirty="0">
+                <a:solidFill>
+                  <a:schemeClr val="tx1"/>
+                </a:solidFill>
+                <a:effectLst/>
+                <a:latin typeface="+mn-lt"/>
+                <a:ea typeface="+mn-ea"/>
+                <a:cs typeface="+mn-cs"/>
+              </a:rPr>
+              <a:t>One Docker Compose command</a:t>
+            </a:r>
+            <a:r>
+              <a:rPr lang="en-US" sz="1200" b="0" i="0" kern="1200" dirty="0">
+                <a:solidFill>
+                  <a:schemeClr val="tx1"/>
+                </a:solidFill>
+                <a:effectLst/>
+                <a:latin typeface="+mn-lt"/>
+                <a:ea typeface="+mn-ea"/>
+                <a:cs typeface="+mn-cs"/>
+              </a:rPr>
+              <a:t> to deploy. Open-source.</a:t>
+            </a:r>
+          </a:p>
+          <a:p>
+            <a:endParaRPr lang="en-US" sz="1200" b="0" i="0" kern="1200" dirty="0">
+              <a:solidFill>
+                <a:schemeClr val="tx1"/>
+              </a:solidFill>
+              <a:effectLst/>
+              <a:latin typeface="+mn-lt"/>
+              <a:ea typeface="+mn-ea"/>
+              <a:cs typeface="+mn-cs"/>
+            </a:endParaRPr>
+          </a:p>
+          <a:p>
+            <a:endParaRPr lang="en-US" sz="1200" b="0" i="0" kern="1200" dirty="0">
+              <a:solidFill>
+                <a:schemeClr val="tx1"/>
+              </a:solidFill>
+              <a:effectLst/>
+              <a:latin typeface="+mn-lt"/>
+              <a:ea typeface="+mn-ea"/>
+              <a:cs typeface="+mn-cs"/>
+            </a:endParaRPr>
+          </a:p>
+          <a:p>
+            <a:r>
+              <a:rPr lang="en-US" sz="1200" b="0" i="0" kern="1200" dirty="0">
+                <a:solidFill>
+                  <a:schemeClr val="tx1"/>
+                </a:solidFill>
+                <a:effectLst/>
+                <a:latin typeface="+mn-lt"/>
+                <a:ea typeface="+mn-ea"/>
+                <a:cs typeface="+mn-cs"/>
+              </a:rPr>
+              <a:t>Read the numbers crisply. Slow on the digits.</a:t>
+            </a:r>
+          </a:p>
+          <a:p>
+            <a:endParaRPr lang="en-US" dirty="0"/>
+          </a:p>
+        </p:txBody>
+      </p:sp>
+      <p:sp>
+        <p:nvSpPr>
+          <p:cNvPr id="4" name="Slide Number Placeholder 3"/>
+          <p:cNvSpPr>
+            <a:spLocks noGrp="1"/>
+          </p:cNvSpPr>
+          <p:nvPr>
+            <p:ph type="sldNum" sz="quarter" idx="5"/>
+          </p:nvPr>
+        </p:nvSpPr>
+        <p:spPr/>
+        <p:txBody>
+          <a:bodyPr/>
+          <a:lstStyle/>
+          <a:p>
+            <a:fld id="{5F54E561-7F9C-441E-AFBA-1F000FF79D64}" type="slidenum">
+              <a:rPr lang="en-US" smtClean="0"/>
+              <a:t>10</a:t>
+            </a:fld>
+            <a:endParaRPr lang="en-US"/>
+          </a:p>
+        </p:txBody>
+      </p:sp>
+    </p:spTree>
+    <p:extLst>
+      <p:ext uri="{BB962C8B-B14F-4D97-AF65-F5344CB8AC3E}">
+        <p14:creationId xmlns:p14="http://schemas.microsoft.com/office/powerpoint/2010/main" val="170757428"/>
+      </p:ext>
+    </p:extLst>
+  </p:cSld>
+  <p:clrMapOvr>
+    <a:masterClrMapping/>
+  </p:clrMapOvr>
+</p:notes>
+</file>
+
+<file path=ppt/notesSlides/notesSlide11.xml><?xml version="1.0" encoding="utf-8"?>
+<p:notes xmlns:a="http://schemas.openxmlformats.org/drawingml/2006/main" xmlns:r="http://schemas.openxmlformats.org/officeDocument/2006/relationships" xmlns:p="http://schemas.openxmlformats.org/presentationml/2006/main">
+  <p:cSld>
+    <p:spTree>
+      <p:nvGrpSpPr>
+        <p:cNvPr id="1" name=""/>
+        <p:cNvGrpSpPr/>
+        <p:nvPr/>
+      </p:nvGrpSpPr>
+      <p:grpSpPr>
+        <a:xfrm>
+          <a:off x="0" y="0"/>
+          <a:ext cx="0" cy="0"/>
+          <a:chOff x="0" y="0"/>
+          <a:chExt cx="0" cy="0"/>
+        </a:xfrm>
+      </p:grpSpPr>
+      <p:sp>
+        <p:nvSpPr>
+          <p:cNvPr id="2" name="Slide Image Placeholder 1"/>
+          <p:cNvSpPr>
+            <a:spLocks noGrp="1" noRot="1" noChangeAspect="1"/>
+          </p:cNvSpPr>
+          <p:nvPr>
+            <p:ph type="sldImg"/>
+          </p:nvPr>
+        </p:nvSpPr>
+        <p:spPr/>
+      </p:sp>
+      <p:sp>
+        <p:nvSpPr>
+          <p:cNvPr id="3" name="Notes Placeholder 2"/>
+          <p:cNvSpPr>
+            <a:spLocks noGrp="1"/>
+          </p:cNvSpPr>
+          <p:nvPr>
+            <p:ph type="body" idx="1"/>
+          </p:nvPr>
+        </p:nvSpPr>
+        <p:spPr/>
+        <p:txBody>
+          <a:bodyPr/>
+          <a:lstStyle/>
+          <a:p>
+            <a:r>
+              <a:rPr lang="en-US" sz="1200" b="1" i="0" kern="1200" dirty="0">
+                <a:solidFill>
+                  <a:schemeClr val="tx1"/>
+                </a:solidFill>
+                <a:effectLst/>
+                <a:latin typeface="+mn-lt"/>
+                <a:ea typeface="+mn-ea"/>
+                <a:cs typeface="+mn-cs"/>
+              </a:rPr>
+              <a:t>Between-subjects</a:t>
+            </a:r>
+            <a:r>
+              <a:rPr lang="en-US" sz="1200" b="0" i="0" kern="1200" dirty="0">
+                <a:solidFill>
+                  <a:schemeClr val="tx1"/>
+                </a:solidFill>
+                <a:effectLst/>
+                <a:latin typeface="+mn-lt"/>
+                <a:ea typeface="+mn-ea"/>
+                <a:cs typeface="+mn-cs"/>
+              </a:rPr>
+              <a:t>, control = same UI on non-adaptive recs.</a:t>
+            </a:r>
+          </a:p>
+          <a:p>
+            <a:r>
+              <a:rPr lang="en-US" sz="1200" b="1" i="0" kern="1200" dirty="0">
+                <a:solidFill>
+                  <a:schemeClr val="tx1"/>
+                </a:solidFill>
+                <a:effectLst/>
+                <a:latin typeface="+mn-lt"/>
+                <a:ea typeface="+mn-ea"/>
+                <a:cs typeface="+mn-cs"/>
+              </a:rPr>
+              <a:t>n = 40–60</a:t>
+            </a:r>
+            <a:r>
+              <a:rPr lang="en-US" sz="1200" b="0" i="0" kern="1200" dirty="0">
+                <a:solidFill>
+                  <a:schemeClr val="tx1"/>
+                </a:solidFill>
+                <a:effectLst/>
+                <a:latin typeface="+mn-lt"/>
+                <a:ea typeface="+mn-ea"/>
+                <a:cs typeface="+mn-cs"/>
+              </a:rPr>
+              <a:t> Hanoi University undergrads.</a:t>
+            </a:r>
+          </a:p>
+          <a:p>
+            <a:r>
+              <a:rPr lang="en-US" sz="1200" b="1" i="0" kern="1200" dirty="0">
+                <a:solidFill>
+                  <a:schemeClr val="tx1"/>
+                </a:solidFill>
+                <a:effectLst/>
+                <a:latin typeface="+mn-lt"/>
+                <a:ea typeface="+mn-ea"/>
+                <a:cs typeface="+mn-cs"/>
+              </a:rPr>
+              <a:t>4-week intervention</a:t>
+            </a:r>
+            <a:r>
+              <a:rPr lang="en-US" sz="1200" b="0" i="0" kern="1200" dirty="0">
+                <a:solidFill>
+                  <a:schemeClr val="tx1"/>
+                </a:solidFill>
+                <a:effectLst/>
+                <a:latin typeface="+mn-lt"/>
+                <a:ea typeface="+mn-ea"/>
+                <a:cs typeface="+mn-cs"/>
+              </a:rPr>
+              <a:t> + </a:t>
+            </a:r>
+            <a:r>
+              <a:rPr lang="en-US" sz="1200" b="1" i="0" kern="1200" dirty="0">
+                <a:solidFill>
+                  <a:schemeClr val="tx1"/>
+                </a:solidFill>
+                <a:effectLst/>
+                <a:latin typeface="+mn-lt"/>
+                <a:ea typeface="+mn-ea"/>
+                <a:cs typeface="+mn-cs"/>
+              </a:rPr>
+              <a:t>Week-8 retention</a:t>
+            </a:r>
+            <a:r>
+              <a:rPr lang="en-US" sz="1200" b="0" i="0" kern="1200" dirty="0">
+                <a:solidFill>
+                  <a:schemeClr val="tx1"/>
+                </a:solidFill>
+                <a:effectLst/>
+                <a:latin typeface="+mn-lt"/>
+                <a:ea typeface="+mn-ea"/>
+                <a:cs typeface="+mn-cs"/>
+              </a:rPr>
+              <a:t> follow-up.</a:t>
+            </a:r>
+          </a:p>
+          <a:p>
+            <a:r>
+              <a:rPr lang="en-US" sz="1200" b="0" i="0" kern="1200" dirty="0">
+                <a:solidFill>
+                  <a:schemeClr val="tx1"/>
+                </a:solidFill>
+                <a:effectLst/>
+                <a:latin typeface="+mn-lt"/>
+                <a:ea typeface="+mn-ea"/>
+                <a:cs typeface="+mn-cs"/>
+              </a:rPr>
+              <a:t>IRB </a:t>
+            </a:r>
+            <a:r>
+              <a:rPr lang="en-US" sz="1200" b="1" i="0" kern="1200" dirty="0">
+                <a:solidFill>
+                  <a:schemeClr val="tx1"/>
+                </a:solidFill>
+                <a:effectLst/>
+                <a:latin typeface="+mn-lt"/>
+                <a:ea typeface="+mn-ea"/>
+                <a:cs typeface="+mn-cs"/>
+              </a:rPr>
+              <a:t>completed</a:t>
+            </a:r>
+            <a:r>
+              <a:rPr lang="en-US" sz="1200" b="0" i="0" kern="1200" dirty="0">
+                <a:solidFill>
+                  <a:schemeClr val="tx1"/>
+                </a:solidFill>
+                <a:effectLst/>
+                <a:latin typeface="+mn-lt"/>
+                <a:ea typeface="+mn-ea"/>
+                <a:cs typeface="+mn-cs"/>
+              </a:rPr>
+              <a:t>. Protocol </a:t>
+            </a:r>
+            <a:r>
+              <a:rPr lang="en-US" sz="1200" b="1" i="0" kern="1200" dirty="0">
+                <a:solidFill>
+                  <a:schemeClr val="tx1"/>
+                </a:solidFill>
+                <a:effectLst/>
+                <a:latin typeface="+mn-lt"/>
+                <a:ea typeface="+mn-ea"/>
+                <a:cs typeface="+mn-cs"/>
+              </a:rPr>
+              <a:t>pre-registered</a:t>
+            </a:r>
+            <a:r>
+              <a:rPr lang="en-US" sz="1200" b="0" i="0" kern="1200" dirty="0">
+                <a:solidFill>
+                  <a:schemeClr val="tx1"/>
+                </a:solidFill>
+                <a:effectLst/>
+                <a:latin typeface="+mn-lt"/>
+                <a:ea typeface="+mn-ea"/>
+                <a:cs typeface="+mn-cs"/>
+              </a:rPr>
+              <a:t>.</a:t>
+            </a:r>
+          </a:p>
+          <a:p>
+            <a:r>
+              <a:rPr lang="en-US" sz="1200" b="1" i="0" kern="1200" dirty="0">
+                <a:solidFill>
+                  <a:schemeClr val="tx1"/>
+                </a:solidFill>
+                <a:effectLst/>
+                <a:latin typeface="+mn-lt"/>
+                <a:ea typeface="+mn-ea"/>
+                <a:cs typeface="+mn-cs"/>
+              </a:rPr>
+              <a:t>Primary RQ1</a:t>
+            </a:r>
+            <a:r>
+              <a:rPr lang="en-US" sz="1200" b="0" i="0" kern="1200" dirty="0">
+                <a:solidFill>
+                  <a:schemeClr val="tx1"/>
+                </a:solidFill>
+                <a:effectLst/>
+                <a:latin typeface="+mn-lt"/>
+                <a:ea typeface="+mn-ea"/>
+                <a:cs typeface="+mn-cs"/>
+              </a:rPr>
+              <a:t> = predictive validity → </a:t>
+            </a:r>
+            <a:r>
+              <a:rPr lang="en-US" sz="1200" b="1" i="0" kern="1200" dirty="0">
+                <a:solidFill>
+                  <a:schemeClr val="tx1"/>
+                </a:solidFill>
+                <a:effectLst/>
+                <a:latin typeface="+mn-lt"/>
+                <a:ea typeface="+mn-ea"/>
+                <a:cs typeface="+mn-cs"/>
+              </a:rPr>
+              <a:t>AUC ≥ 0.70</a:t>
+            </a:r>
+            <a:r>
+              <a:rPr lang="en-US" sz="1200" b="0" i="0" kern="1200" dirty="0">
+                <a:solidFill>
+                  <a:schemeClr val="tx1"/>
+                </a:solidFill>
+                <a:effectLst/>
+                <a:latin typeface="+mn-lt"/>
+                <a:ea typeface="+mn-ea"/>
+                <a:cs typeface="+mn-cs"/>
+              </a:rPr>
+              <a:t> for BKT/Elo on post-intervention items.</a:t>
+            </a:r>
+          </a:p>
+          <a:p>
+            <a:r>
+              <a:rPr lang="en-US" sz="1200" b="0" i="0" kern="1200" dirty="0">
+                <a:solidFill>
+                  <a:schemeClr val="tx1"/>
+                </a:solidFill>
+                <a:effectLst/>
+                <a:latin typeface="+mn-lt"/>
+                <a:ea typeface="+mn-ea"/>
+                <a:cs typeface="+mn-cs"/>
+              </a:rPr>
+              <a:t>Acceptance rate, convergence speed, learning gain = supporting indicators.</a:t>
+            </a:r>
+          </a:p>
+          <a:p>
+            <a:r>
+              <a:rPr lang="en-US" sz="1200" b="0" i="0" kern="1200" dirty="0">
+                <a:solidFill>
+                  <a:schemeClr val="tx1"/>
+                </a:solidFill>
+                <a:effectLst/>
+                <a:latin typeface="+mn-lt"/>
+                <a:ea typeface="+mn-ea"/>
+                <a:cs typeface="+mn-cs"/>
+              </a:rPr>
+              <a:t>results → </a:t>
+            </a:r>
+            <a:r>
+              <a:rPr lang="en-US" sz="1200" b="1" i="0" kern="1200" dirty="0">
+                <a:solidFill>
+                  <a:schemeClr val="tx1"/>
+                </a:solidFill>
+                <a:effectLst/>
+                <a:latin typeface="+mn-lt"/>
+                <a:ea typeface="+mn-ea"/>
+                <a:cs typeface="+mn-cs"/>
+              </a:rPr>
+              <a:t>follow-up paper</a:t>
+            </a:r>
+            <a:r>
+              <a:rPr lang="en-US" sz="1200" b="0" i="0" kern="1200" dirty="0">
+                <a:solidFill>
+                  <a:schemeClr val="tx1"/>
+                </a:solidFill>
+                <a:effectLst/>
+                <a:latin typeface="+mn-lt"/>
+                <a:ea typeface="+mn-ea"/>
+                <a:cs typeface="+mn-cs"/>
+              </a:rPr>
+              <a:t>.</a:t>
+            </a:r>
+          </a:p>
+          <a:p>
+            <a:endParaRPr lang="en-US" sz="1200" b="0" i="0" kern="1200" dirty="0">
+              <a:solidFill>
+                <a:schemeClr val="tx1"/>
+              </a:solidFill>
+              <a:effectLst/>
+              <a:latin typeface="+mn-lt"/>
+              <a:ea typeface="+mn-ea"/>
+              <a:cs typeface="+mn-cs"/>
+            </a:endParaRPr>
+          </a:p>
+          <a:p>
+            <a:endParaRPr lang="en-US" sz="1200" b="0" i="0" kern="1200" dirty="0">
+              <a:solidFill>
+                <a:schemeClr val="tx1"/>
+              </a:solidFill>
+              <a:effectLst/>
+              <a:latin typeface="+mn-lt"/>
+              <a:ea typeface="+mn-ea"/>
+              <a:cs typeface="+mn-cs"/>
+            </a:endParaRPr>
+          </a:p>
+          <a:p>
+            <a:r>
+              <a:rPr lang="en-US" sz="1200" b="0" i="0" kern="1200" dirty="0">
+                <a:solidFill>
+                  <a:schemeClr val="tx1"/>
+                </a:solidFill>
+                <a:effectLst/>
+                <a:latin typeface="+mn-lt"/>
+                <a:ea typeface="+mn-ea"/>
+                <a:cs typeface="+mn-cs"/>
+              </a:rPr>
+              <a:t>Most important risk-defusal moment. Slow, calm, no apology.</a:t>
+            </a:r>
+          </a:p>
+          <a:p>
+            <a:endParaRPr lang="en-US" dirty="0"/>
+          </a:p>
+        </p:txBody>
+      </p:sp>
+      <p:sp>
+        <p:nvSpPr>
+          <p:cNvPr id="4" name="Slide Number Placeholder 3"/>
+          <p:cNvSpPr>
+            <a:spLocks noGrp="1"/>
+          </p:cNvSpPr>
+          <p:nvPr>
+            <p:ph type="sldNum" sz="quarter" idx="5"/>
+          </p:nvPr>
+        </p:nvSpPr>
+        <p:spPr/>
+        <p:txBody>
+          <a:bodyPr/>
+          <a:lstStyle/>
+          <a:p>
+            <a:fld id="{5F54E561-7F9C-441E-AFBA-1F000FF79D64}" type="slidenum">
+              <a:rPr lang="en-US" smtClean="0"/>
+              <a:t>11</a:t>
+            </a:fld>
+            <a:endParaRPr lang="en-US"/>
+          </a:p>
+        </p:txBody>
+      </p:sp>
+    </p:spTree>
+    <p:extLst>
+      <p:ext uri="{BB962C8B-B14F-4D97-AF65-F5344CB8AC3E}">
+        <p14:creationId xmlns:p14="http://schemas.microsoft.com/office/powerpoint/2010/main" val="1077393377"/>
+      </p:ext>
+    </p:extLst>
+  </p:cSld>
+  <p:clrMapOvr>
+    <a:masterClrMapping/>
+  </p:clrMapOvr>
+</p:notes>
+</file>
+
+<file path=ppt/notesSlides/notesSlide12.xml><?xml version="1.0" encoding="utf-8"?>
+<p:notes xmlns:a="http://schemas.openxmlformats.org/drawingml/2006/main" xmlns:r="http://schemas.openxmlformats.org/officeDocument/2006/relationships" xmlns:p="http://schemas.openxmlformats.org/presentationml/2006/main">
+  <p:cSld>
+    <p:spTree>
+      <p:nvGrpSpPr>
+        <p:cNvPr id="1" name=""/>
+        <p:cNvGrpSpPr/>
+        <p:nvPr/>
+      </p:nvGrpSpPr>
+      <p:grpSpPr>
+        <a:xfrm>
+          <a:off x="0" y="0"/>
+          <a:ext cx="0" cy="0"/>
+          <a:chOff x="0" y="0"/>
+          <a:chExt cx="0" cy="0"/>
+        </a:xfrm>
+      </p:grpSpPr>
+      <p:sp>
+        <p:nvSpPr>
+          <p:cNvPr id="2" name="Slide Image Placeholder 1"/>
+          <p:cNvSpPr>
+            <a:spLocks noGrp="1" noRot="1" noChangeAspect="1"/>
+          </p:cNvSpPr>
+          <p:nvPr>
+            <p:ph type="sldImg"/>
+          </p:nvPr>
+        </p:nvSpPr>
+        <p:spPr/>
+      </p:sp>
+      <p:sp>
+        <p:nvSpPr>
+          <p:cNvPr id="3" name="Notes Placeholder 2"/>
+          <p:cNvSpPr>
+            <a:spLocks noGrp="1"/>
+          </p:cNvSpPr>
+          <p:nvPr>
+            <p:ph type="body" idx="1"/>
+          </p:nvPr>
+        </p:nvSpPr>
+        <p:spPr/>
+        <p:txBody>
+          <a:bodyPr/>
+          <a:lstStyle/>
+          <a:p>
+            <a:r>
+              <a:rPr lang="en-US" sz="1200" b="1" i="0" kern="1200" dirty="0">
+                <a:solidFill>
+                  <a:schemeClr val="tx1"/>
+                </a:solidFill>
+                <a:effectLst/>
+                <a:latin typeface="+mn-lt"/>
+                <a:ea typeface="+mn-ea"/>
+                <a:cs typeface="+mn-cs"/>
+              </a:rPr>
+              <a:t>Two contributions:</a:t>
+            </a:r>
+            <a:endParaRPr lang="en-US" sz="1200" b="0" i="0" kern="1200" dirty="0">
+              <a:solidFill>
+                <a:schemeClr val="tx1"/>
+              </a:solidFill>
+              <a:effectLst/>
+              <a:latin typeface="+mn-lt"/>
+              <a:ea typeface="+mn-ea"/>
+              <a:cs typeface="+mn-cs"/>
+            </a:endParaRPr>
+          </a:p>
+          <a:p>
+            <a:r>
+              <a:rPr lang="en-US" sz="1200" b="1" i="0" kern="1200" dirty="0">
+                <a:solidFill>
+                  <a:schemeClr val="tx1"/>
+                </a:solidFill>
+                <a:effectLst/>
+                <a:latin typeface="+mn-lt"/>
+                <a:ea typeface="+mn-ea"/>
+                <a:cs typeface="+mn-cs"/>
+              </a:rPr>
+              <a:t>C1</a:t>
+            </a:r>
+            <a:r>
+              <a:rPr lang="en-US" sz="1200" b="0" i="0" kern="1200" dirty="0">
+                <a:solidFill>
+                  <a:schemeClr val="tx1"/>
+                </a:solidFill>
+                <a:effectLst/>
+                <a:latin typeface="+mn-lt"/>
+                <a:ea typeface="+mn-ea"/>
+                <a:cs typeface="+mn-cs"/>
+              </a:rPr>
+              <a:t> — </a:t>
+            </a:r>
+            <a:r>
+              <a:rPr lang="en-US" sz="1200" b="1" i="0" kern="1200" dirty="0">
+                <a:solidFill>
+                  <a:schemeClr val="tx1"/>
+                </a:solidFill>
+                <a:effectLst/>
+                <a:latin typeface="+mn-lt"/>
+                <a:ea typeface="+mn-ea"/>
+                <a:cs typeface="+mn-cs"/>
+              </a:rPr>
+              <a:t>Integrated five-layer adaptive platform</a:t>
+            </a:r>
+            <a:r>
+              <a:rPr lang="en-US" sz="1200" b="0" i="0" kern="1200" dirty="0">
+                <a:solidFill>
+                  <a:schemeClr val="tx1"/>
+                </a:solidFill>
+                <a:effectLst/>
+                <a:latin typeface="+mn-lt"/>
+                <a:ea typeface="+mn-ea"/>
+                <a:cs typeface="+mn-cs"/>
+              </a:rPr>
+              <a:t> (BKT + Elo + MAB + FSRS unified by KG of 28 concepts). The </a:t>
+            </a:r>
+            <a:r>
+              <a:rPr lang="en-US" sz="1200" b="1" i="0" kern="1200" dirty="0">
+                <a:solidFill>
+                  <a:schemeClr val="tx1"/>
+                </a:solidFill>
+                <a:effectLst/>
+                <a:latin typeface="+mn-lt"/>
+                <a:ea typeface="+mn-ea"/>
+                <a:cs typeface="+mn-cs"/>
+              </a:rPr>
+              <a:t>prerequisite-bandit</a:t>
+            </a:r>
+            <a:r>
+              <a:rPr lang="en-US" sz="1200" b="0" i="0" kern="1200" dirty="0">
+                <a:solidFill>
+                  <a:schemeClr val="tx1"/>
+                </a:solidFill>
+                <a:effectLst/>
+                <a:latin typeface="+mn-lt"/>
+                <a:ea typeface="+mn-ea"/>
+                <a:cs typeface="+mn-cs"/>
+              </a:rPr>
+              <a:t> and </a:t>
+            </a:r>
+            <a:r>
+              <a:rPr lang="en-US" sz="1200" b="1" i="0" kern="1200" dirty="0">
+                <a:solidFill>
+                  <a:schemeClr val="tx1"/>
+                </a:solidFill>
+                <a:effectLst/>
+                <a:latin typeface="+mn-lt"/>
+                <a:ea typeface="+mn-ea"/>
+                <a:cs typeface="+mn-cs"/>
+              </a:rPr>
+              <a:t>submission-to-FSRS-rating mapping</a:t>
+            </a:r>
+            <a:r>
+              <a:rPr lang="en-US" sz="1200" b="0" i="0" kern="1200" dirty="0">
+                <a:solidFill>
+                  <a:schemeClr val="tx1"/>
+                </a:solidFill>
+                <a:effectLst/>
+                <a:latin typeface="+mn-lt"/>
+                <a:ea typeface="+mn-ea"/>
+                <a:cs typeface="+mn-cs"/>
+              </a:rPr>
+              <a:t> are </a:t>
+            </a:r>
+            <a:r>
+              <a:rPr lang="en-US" sz="1200" b="0" i="1" kern="1200" dirty="0">
+                <a:solidFill>
+                  <a:schemeClr val="tx1"/>
+                </a:solidFill>
+                <a:effectLst/>
+                <a:latin typeface="+mn-lt"/>
+                <a:ea typeface="+mn-ea"/>
+                <a:cs typeface="+mn-cs"/>
+              </a:rPr>
+              <a:t>internal technical innovations</a:t>
+            </a:r>
+            <a:r>
+              <a:rPr lang="en-US" sz="1200" b="0" i="0" kern="1200" dirty="0">
+                <a:solidFill>
+                  <a:schemeClr val="tx1"/>
+                </a:solidFill>
+                <a:effectLst/>
+                <a:latin typeface="+mn-lt"/>
+                <a:ea typeface="+mn-ea"/>
+                <a:cs typeface="+mn-cs"/>
+              </a:rPr>
+              <a:t>, not separate claims.</a:t>
+            </a:r>
+          </a:p>
+          <a:p>
+            <a:r>
+              <a:rPr lang="en-US" sz="1200" b="1" i="0" kern="1200" dirty="0">
+                <a:solidFill>
+                  <a:schemeClr val="tx1"/>
+                </a:solidFill>
+                <a:effectLst/>
+                <a:latin typeface="+mn-lt"/>
+                <a:ea typeface="+mn-ea"/>
+                <a:cs typeface="+mn-cs"/>
+              </a:rPr>
+              <a:t>C2</a:t>
+            </a:r>
+            <a:r>
+              <a:rPr lang="en-US" sz="1200" b="0" i="0" kern="1200" dirty="0">
+                <a:solidFill>
+                  <a:schemeClr val="tx1"/>
+                </a:solidFill>
+                <a:effectLst/>
+                <a:latin typeface="+mn-lt"/>
+                <a:ea typeface="+mn-ea"/>
+                <a:cs typeface="+mn-cs"/>
+              </a:rPr>
+              <a:t> — </a:t>
+            </a:r>
+            <a:r>
+              <a:rPr lang="en-US" sz="1200" b="1" i="0" kern="1200" dirty="0">
+                <a:solidFill>
+                  <a:schemeClr val="tx1"/>
+                </a:solidFill>
+                <a:effectLst/>
+                <a:latin typeface="+mn-lt"/>
+                <a:ea typeface="+mn-ea"/>
+                <a:cs typeface="+mn-cs"/>
+              </a:rPr>
+              <a:t>Pre-registered pilot evaluation protocol</a:t>
+            </a:r>
+            <a:r>
+              <a:rPr lang="en-US" sz="1200" b="0" i="0" kern="1200" dirty="0">
+                <a:solidFill>
+                  <a:schemeClr val="tx1"/>
+                </a:solidFill>
+                <a:effectLst/>
+                <a:latin typeface="+mn-lt"/>
+                <a:ea typeface="+mn-ea"/>
+                <a:cs typeface="+mn-cs"/>
+              </a:rPr>
+              <a:t>.</a:t>
+            </a:r>
+          </a:p>
+          <a:p>
+            <a:r>
+              <a:rPr lang="en-US" sz="1200" b="0" i="0" kern="1200" dirty="0">
+                <a:solidFill>
+                  <a:schemeClr val="tx1"/>
+                </a:solidFill>
+                <a:effectLst/>
+                <a:latin typeface="+mn-lt"/>
+                <a:ea typeface="+mn-ea"/>
+                <a:cs typeface="+mn-cs"/>
+              </a:rPr>
+              <a:t>Closing reminder:</a:t>
+            </a:r>
+          </a:p>
+          <a:p>
+            <a:r>
+              <a:rPr lang="en-US" sz="1200" b="1" i="0" kern="1200" dirty="0">
+                <a:solidFill>
+                  <a:schemeClr val="tx1"/>
+                </a:solidFill>
+                <a:effectLst/>
+                <a:latin typeface="+mn-lt"/>
+                <a:ea typeface="+mn-ea"/>
+                <a:cs typeface="+mn-cs"/>
+              </a:rPr>
+              <a:t>C1</a:t>
+            </a:r>
+            <a:r>
+              <a:rPr lang="en-US" sz="1200" b="0" i="0" kern="1200" dirty="0">
+                <a:solidFill>
+                  <a:schemeClr val="tx1"/>
+                </a:solidFill>
+                <a:effectLst/>
+                <a:latin typeface="+mn-lt"/>
+                <a:ea typeface="+mn-ea"/>
+                <a:cs typeface="+mn-cs"/>
+              </a:rPr>
+              <a:t> = </a:t>
+            </a:r>
+            <a:r>
+              <a:rPr lang="en-US" sz="1200" b="1" i="0" kern="1200" dirty="0">
+                <a:solidFill>
+                  <a:schemeClr val="tx1"/>
+                </a:solidFill>
+                <a:effectLst/>
+                <a:latin typeface="+mn-lt"/>
+                <a:ea typeface="+mn-ea"/>
+                <a:cs typeface="+mn-cs"/>
+              </a:rPr>
+              <a:t>implemented and demonstrated</a:t>
+            </a:r>
+            <a:r>
+              <a:rPr lang="en-US" sz="1200" b="0" i="0" kern="1200" dirty="0">
+                <a:solidFill>
+                  <a:schemeClr val="tx1"/>
+                </a:solidFill>
+                <a:effectLst/>
+                <a:latin typeface="+mn-lt"/>
+                <a:ea typeface="+mn-ea"/>
+                <a:cs typeface="+mn-cs"/>
+              </a:rPr>
+              <a:t>.</a:t>
+            </a:r>
+          </a:p>
+          <a:p>
+            <a:r>
+              <a:rPr lang="en-US" sz="1200" b="1" i="0" kern="1200" dirty="0">
+                <a:solidFill>
+                  <a:schemeClr val="tx1"/>
+                </a:solidFill>
+                <a:effectLst/>
+                <a:latin typeface="+mn-lt"/>
+                <a:ea typeface="+mn-ea"/>
+                <a:cs typeface="+mn-cs"/>
+              </a:rPr>
+              <a:t>C2</a:t>
+            </a:r>
+            <a:r>
+              <a:rPr lang="en-US" sz="1200" b="0" i="0" kern="1200" dirty="0">
+                <a:solidFill>
+                  <a:schemeClr val="tx1"/>
+                </a:solidFill>
+                <a:effectLst/>
+                <a:latin typeface="+mn-lt"/>
+                <a:ea typeface="+mn-ea"/>
+                <a:cs typeface="+mn-cs"/>
+              </a:rPr>
+              <a:t> = </a:t>
+            </a:r>
+            <a:r>
+              <a:rPr lang="en-US" sz="1200" b="1" i="0" kern="1200" dirty="0">
+                <a:solidFill>
+                  <a:schemeClr val="tx1"/>
+                </a:solidFill>
+                <a:effectLst/>
+                <a:latin typeface="+mn-lt"/>
+                <a:ea typeface="+mn-ea"/>
+                <a:cs typeface="+mn-cs"/>
+              </a:rPr>
+              <a:t>specified, IRB-reviewed, pre-registered, but not yet executed</a:t>
+            </a:r>
+            <a:r>
+              <a:rPr lang="en-US" sz="1200" b="0" i="0" kern="1200" dirty="0">
+                <a:solidFill>
+                  <a:schemeClr val="tx1"/>
+                </a:solidFill>
+                <a:effectLst/>
+                <a:latin typeface="+mn-lt"/>
+                <a:ea typeface="+mn-ea"/>
+                <a:cs typeface="+mn-cs"/>
+              </a:rPr>
+              <a:t>.</a:t>
+            </a:r>
+          </a:p>
+          <a:p>
+            <a:endParaRPr lang="en-US" sz="1200" b="0" i="0" kern="1200" dirty="0">
+              <a:solidFill>
+                <a:schemeClr val="tx1"/>
+              </a:solidFill>
+              <a:effectLst/>
+              <a:latin typeface="+mn-lt"/>
+              <a:ea typeface="+mn-ea"/>
+              <a:cs typeface="+mn-cs"/>
+            </a:endParaRPr>
+          </a:p>
+          <a:p>
+            <a:endParaRPr lang="en-US" sz="1200" b="0" i="0" kern="1200" dirty="0">
+              <a:solidFill>
+                <a:schemeClr val="tx1"/>
+              </a:solidFill>
+              <a:effectLst/>
+              <a:latin typeface="+mn-lt"/>
+              <a:ea typeface="+mn-ea"/>
+              <a:cs typeface="+mn-cs"/>
+            </a:endParaRPr>
+          </a:p>
+          <a:p>
+            <a:r>
+              <a:rPr lang="en-US" sz="1200" b="0" i="0" kern="1200" dirty="0">
+                <a:solidFill>
+                  <a:schemeClr val="tx1"/>
+                </a:solidFill>
+                <a:effectLst/>
+                <a:latin typeface="+mn-lt"/>
+                <a:ea typeface="+mn-ea"/>
+                <a:cs typeface="+mn-cs"/>
+              </a:rPr>
+              <a:t>Hold up two fingers when saying "Two contributions" — audience anchor.</a:t>
+            </a:r>
+          </a:p>
+          <a:p>
+            <a:endParaRPr lang="en-US" dirty="0"/>
+          </a:p>
+        </p:txBody>
+      </p:sp>
+      <p:sp>
+        <p:nvSpPr>
+          <p:cNvPr id="4" name="Slide Number Placeholder 3"/>
+          <p:cNvSpPr>
+            <a:spLocks noGrp="1"/>
+          </p:cNvSpPr>
+          <p:nvPr>
+            <p:ph type="sldNum" sz="quarter" idx="5"/>
+          </p:nvPr>
+        </p:nvSpPr>
+        <p:spPr/>
+        <p:txBody>
+          <a:bodyPr/>
+          <a:lstStyle/>
+          <a:p>
+            <a:fld id="{5F54E561-7F9C-441E-AFBA-1F000FF79D64}" type="slidenum">
+              <a:rPr lang="en-US" smtClean="0"/>
+              <a:t>12</a:t>
+            </a:fld>
+            <a:endParaRPr lang="en-US"/>
+          </a:p>
+        </p:txBody>
+      </p:sp>
+    </p:spTree>
+    <p:extLst>
+      <p:ext uri="{BB962C8B-B14F-4D97-AF65-F5344CB8AC3E}">
+        <p14:creationId xmlns:p14="http://schemas.microsoft.com/office/powerpoint/2010/main" val="2053440832"/>
+      </p:ext>
+    </p:extLst>
+  </p:cSld>
+  <p:clrMapOvr>
+    <a:masterClrMapping/>
+  </p:clrMapOvr>
+</p:notes>
+</file>
+
+<file path=ppt/notesSlides/notesSlide13.xml><?xml version="1.0" encoding="utf-8"?>
+<p:notes xmlns:a="http://schemas.openxmlformats.org/drawingml/2006/main" xmlns:r="http://schemas.openxmlformats.org/officeDocument/2006/relationships" xmlns:p="http://schemas.openxmlformats.org/presentationml/2006/main">
+  <p:cSld>
+    <p:spTree>
+      <p:nvGrpSpPr>
+        <p:cNvPr id="1" name=""/>
+        <p:cNvGrpSpPr/>
+        <p:nvPr/>
+      </p:nvGrpSpPr>
+      <p:grpSpPr>
+        <a:xfrm>
+          <a:off x="0" y="0"/>
+          <a:ext cx="0" cy="0"/>
+          <a:chOff x="0" y="0"/>
+          <a:chExt cx="0" cy="0"/>
+        </a:xfrm>
+      </p:grpSpPr>
+      <p:sp>
+        <p:nvSpPr>
+          <p:cNvPr id="2" name="Slide Image Placeholder 1"/>
+          <p:cNvSpPr>
+            <a:spLocks noGrp="1" noRot="1" noChangeAspect="1"/>
+          </p:cNvSpPr>
+          <p:nvPr>
+            <p:ph type="sldImg"/>
+          </p:nvPr>
+        </p:nvSpPr>
+        <p:spPr/>
+      </p:sp>
+      <p:sp>
+        <p:nvSpPr>
+          <p:cNvPr id="3" name="Notes Placeholder 2"/>
+          <p:cNvSpPr>
+            <a:spLocks noGrp="1"/>
+          </p:cNvSpPr>
+          <p:nvPr>
+            <p:ph type="body" idx="1"/>
+          </p:nvPr>
+        </p:nvSpPr>
+        <p:spPr/>
+        <p:txBody>
+          <a:bodyPr/>
+          <a:lstStyle/>
+          <a:p>
+            <a:r>
+              <a:rPr lang="en-US" sz="1200" b="0" i="1" kern="1200" dirty="0">
+                <a:solidFill>
+                  <a:schemeClr val="tx1"/>
+                </a:solidFill>
+                <a:effectLst/>
+                <a:latin typeface="+mn-lt"/>
+                <a:ea typeface="+mn-ea"/>
+                <a:cs typeface="+mn-cs"/>
+              </a:rPr>
+              <a:t>"By integrating four adaptive techniques that have, until now, been studied in isolation, this work offers a working architectural step toward </a:t>
+            </a:r>
+            <a:r>
+              <a:rPr lang="en-US" sz="1200" b="0" i="1" kern="1200" dirty="0" err="1">
+                <a:solidFill>
+                  <a:schemeClr val="tx1"/>
+                </a:solidFill>
+                <a:effectLst/>
+                <a:latin typeface="+mn-lt"/>
+                <a:ea typeface="+mn-ea"/>
+                <a:cs typeface="+mn-cs"/>
+              </a:rPr>
+              <a:t>individualised</a:t>
+            </a:r>
+            <a:r>
+              <a:rPr lang="en-US" sz="1200" b="0" i="1" kern="1200" dirty="0">
+                <a:solidFill>
+                  <a:schemeClr val="tx1"/>
+                </a:solidFill>
+                <a:effectLst/>
+                <a:latin typeface="+mn-lt"/>
+                <a:ea typeface="+mn-ea"/>
+                <a:cs typeface="+mn-cs"/>
+              </a:rPr>
+              <a:t> programming education at scale."</a:t>
+            </a:r>
+            <a:endParaRPr lang="en-US" sz="1200" b="0" i="0" kern="1200" dirty="0">
+              <a:solidFill>
+                <a:schemeClr val="tx1"/>
+              </a:solidFill>
+              <a:effectLst/>
+              <a:latin typeface="+mn-lt"/>
+              <a:ea typeface="+mn-ea"/>
+              <a:cs typeface="+mn-cs"/>
+            </a:endParaRPr>
+          </a:p>
+          <a:p>
+            <a:r>
+              <a:rPr lang="en-US" sz="1200" b="0" i="0" kern="1200" dirty="0">
+                <a:solidFill>
+                  <a:schemeClr val="tx1"/>
+                </a:solidFill>
+                <a:effectLst/>
+                <a:latin typeface="+mn-lt"/>
+                <a:ea typeface="+mn-ea"/>
+                <a:cs typeface="+mn-cs"/>
+              </a:rPr>
+              <a:t>Thank you.</a:t>
+            </a:r>
+          </a:p>
+          <a:p>
+            <a:endParaRPr lang="en-US" sz="1200" b="0" i="0" kern="1200" dirty="0">
+              <a:solidFill>
+                <a:schemeClr val="tx1"/>
+              </a:solidFill>
+              <a:effectLst/>
+              <a:latin typeface="+mn-lt"/>
+              <a:ea typeface="+mn-ea"/>
+              <a:cs typeface="+mn-cs"/>
+            </a:endParaRPr>
+          </a:p>
+          <a:p>
+            <a:endParaRPr lang="en-US" sz="1200" b="0" i="0" kern="1200" dirty="0">
+              <a:solidFill>
+                <a:schemeClr val="tx1"/>
+              </a:solidFill>
+              <a:effectLst/>
+              <a:latin typeface="+mn-lt"/>
+              <a:ea typeface="+mn-ea"/>
+              <a:cs typeface="+mn-cs"/>
+            </a:endParaRPr>
+          </a:p>
+          <a:p>
+            <a:r>
+              <a:rPr lang="en-US" sz="1200" b="0" i="0" kern="1200" dirty="0">
+                <a:solidFill>
+                  <a:schemeClr val="tx1"/>
+                </a:solidFill>
+                <a:effectLst/>
+                <a:latin typeface="+mn-lt"/>
+                <a:ea typeface="+mn-ea"/>
+                <a:cs typeface="+mn-cs"/>
+              </a:rPr>
+              <a:t>Look at the chair, take questions.</a:t>
+            </a:r>
+          </a:p>
+          <a:p>
+            <a:endParaRPr lang="en-US" dirty="0"/>
+          </a:p>
+        </p:txBody>
+      </p:sp>
+      <p:sp>
+        <p:nvSpPr>
+          <p:cNvPr id="4" name="Slide Number Placeholder 3"/>
+          <p:cNvSpPr>
+            <a:spLocks noGrp="1"/>
+          </p:cNvSpPr>
+          <p:nvPr>
+            <p:ph type="sldNum" sz="quarter" idx="5"/>
+          </p:nvPr>
+        </p:nvSpPr>
+        <p:spPr/>
+        <p:txBody>
+          <a:bodyPr/>
+          <a:lstStyle/>
+          <a:p>
+            <a:fld id="{5F54E561-7F9C-441E-AFBA-1F000FF79D64}" type="slidenum">
+              <a:rPr lang="en-US" smtClean="0"/>
+              <a:t>13</a:t>
+            </a:fld>
+            <a:endParaRPr lang="en-US"/>
+          </a:p>
+        </p:txBody>
+      </p:sp>
+    </p:spTree>
+    <p:extLst>
+      <p:ext uri="{BB962C8B-B14F-4D97-AF65-F5344CB8AC3E}">
+        <p14:creationId xmlns:p14="http://schemas.microsoft.com/office/powerpoint/2010/main" val="2379125688"/>
+      </p:ext>
+    </p:extLst>
+  </p:cSld>
+  <p:clrMapOvr>
+    <a:masterClrMapping/>
+  </p:clrMapOvr>
+</p:notes>
+</file>
+
+<file path=ppt/notesSlides/notesSlide2.xml><?xml version="1.0" encoding="utf-8"?>
+<p:notes xmlns:a="http://schemas.openxmlformats.org/drawingml/2006/main" xmlns:r="http://schemas.openxmlformats.org/officeDocument/2006/relationships" xmlns:p="http://schemas.openxmlformats.org/presentationml/2006/main">
+  <p:cSld>
+    <p:spTree>
+      <p:nvGrpSpPr>
+        <p:cNvPr id="1" name=""/>
+        <p:cNvGrpSpPr/>
+        <p:nvPr/>
+      </p:nvGrpSpPr>
+      <p:grpSpPr>
+        <a:xfrm>
+          <a:off x="0" y="0"/>
+          <a:ext cx="0" cy="0"/>
+          <a:chOff x="0" y="0"/>
+          <a:chExt cx="0" cy="0"/>
+        </a:xfrm>
+      </p:grpSpPr>
+      <p:sp>
+        <p:nvSpPr>
+          <p:cNvPr id="2" name="Slide Image Placeholder 1"/>
+          <p:cNvSpPr>
+            <a:spLocks noGrp="1" noRot="1" noChangeAspect="1"/>
+          </p:cNvSpPr>
+          <p:nvPr>
+            <p:ph type="sldImg"/>
+          </p:nvPr>
+        </p:nvSpPr>
+        <p:spPr/>
+      </p:sp>
+      <p:sp>
+        <p:nvSpPr>
+          <p:cNvPr id="3" name="Notes Placeholder 2"/>
+          <p:cNvSpPr>
+            <a:spLocks noGrp="1"/>
+          </p:cNvSpPr>
+          <p:nvPr>
+            <p:ph type="body" idx="1"/>
+          </p:nvPr>
+        </p:nvSpPr>
+        <p:spPr/>
+        <p:txBody>
+          <a:bodyPr/>
+          <a:lstStyle/>
+          <a:p>
+            <a:r>
+              <a:rPr lang="en-US" sz="1200" b="1" i="0" kern="1200" dirty="0">
+                <a:solidFill>
+                  <a:schemeClr val="tx1"/>
+                </a:solidFill>
+                <a:effectLst/>
+                <a:latin typeface="+mn-lt"/>
+                <a:ea typeface="+mn-ea"/>
+                <a:cs typeface="+mn-cs"/>
+              </a:rPr>
+              <a:t>30–40%</a:t>
+            </a:r>
+            <a:r>
+              <a:rPr lang="en-US" sz="1200" b="0" i="0" kern="1200" dirty="0">
+                <a:solidFill>
+                  <a:schemeClr val="tx1"/>
+                </a:solidFill>
+                <a:effectLst/>
+                <a:latin typeface="+mn-lt"/>
+                <a:ea typeface="+mn-ea"/>
+                <a:cs typeface="+mn-cs"/>
+              </a:rPr>
+              <a:t> failure in CS1. </a:t>
+            </a:r>
+            <a:r>
+              <a:rPr lang="en-US" sz="1200" b="0" i="1" kern="1200" dirty="0">
+                <a:solidFill>
+                  <a:schemeClr val="tx1"/>
+                </a:solidFill>
+                <a:effectLst/>
+                <a:latin typeface="+mn-lt"/>
+                <a:ea typeface="+mn-ea"/>
+                <a:cs typeface="+mn-cs"/>
+              </a:rPr>
+              <a:t>Stable for decades</a:t>
+            </a:r>
+            <a:r>
+              <a:rPr lang="en-US" sz="1200" b="0" i="0" kern="1200" dirty="0">
+                <a:solidFill>
+                  <a:schemeClr val="tx1"/>
+                </a:solidFill>
+                <a:effectLst/>
+                <a:latin typeface="+mn-lt"/>
+                <a:ea typeface="+mn-ea"/>
+                <a:cs typeface="+mn-cs"/>
+              </a:rPr>
+              <a:t> (Luxton-Reilly 2018).</a:t>
+            </a:r>
+          </a:p>
+          <a:p>
+            <a:r>
+              <a:rPr lang="en-US" sz="1200" b="1" i="0" kern="1200" dirty="0">
+                <a:solidFill>
+                  <a:schemeClr val="tx1"/>
+                </a:solidFill>
+                <a:effectLst/>
+                <a:latin typeface="+mn-lt"/>
+                <a:ea typeface="+mn-ea"/>
+                <a:cs typeface="+mn-cs"/>
+              </a:rPr>
+              <a:t>Not</a:t>
+            </a:r>
+            <a:r>
+              <a:rPr lang="en-US" sz="1200" b="0" i="0" kern="1200" dirty="0">
+                <a:solidFill>
+                  <a:schemeClr val="tx1"/>
+                </a:solidFill>
+                <a:effectLst/>
+                <a:latin typeface="+mn-lt"/>
+                <a:ea typeface="+mn-ea"/>
+                <a:cs typeface="+mn-cs"/>
+              </a:rPr>
+              <a:t> lack of practice — millions of problems online (</a:t>
+            </a:r>
+            <a:r>
+              <a:rPr lang="en-US" sz="1200" b="0" i="0" kern="1200" dirty="0" err="1">
+                <a:solidFill>
+                  <a:schemeClr val="tx1"/>
+                </a:solidFill>
+                <a:effectLst/>
+                <a:latin typeface="+mn-lt"/>
+                <a:ea typeface="+mn-ea"/>
+                <a:cs typeface="+mn-cs"/>
+              </a:rPr>
+              <a:t>LeetCode</a:t>
+            </a:r>
+            <a:r>
+              <a:rPr lang="en-US" sz="1200" b="0" i="0" kern="1200" dirty="0">
+                <a:solidFill>
+                  <a:schemeClr val="tx1"/>
+                </a:solidFill>
+                <a:effectLst/>
+                <a:latin typeface="+mn-lt"/>
+                <a:ea typeface="+mn-ea"/>
+                <a:cs typeface="+mn-cs"/>
+              </a:rPr>
+              <a:t>, </a:t>
+            </a:r>
+            <a:r>
+              <a:rPr lang="en-US" sz="1200" b="0" i="0" kern="1200" dirty="0" err="1">
+                <a:solidFill>
+                  <a:schemeClr val="tx1"/>
+                </a:solidFill>
+                <a:effectLst/>
+                <a:latin typeface="+mn-lt"/>
+                <a:ea typeface="+mn-ea"/>
+                <a:cs typeface="+mn-cs"/>
+              </a:rPr>
+              <a:t>HackerRank</a:t>
+            </a:r>
+            <a:r>
+              <a:rPr lang="en-US" sz="1200" b="0" i="0" kern="1200" dirty="0">
+                <a:solidFill>
+                  <a:schemeClr val="tx1"/>
+                </a:solidFill>
+                <a:effectLst/>
+                <a:latin typeface="+mn-lt"/>
+                <a:ea typeface="+mn-ea"/>
+                <a:cs typeface="+mn-cs"/>
+              </a:rPr>
+              <a:t>, </a:t>
+            </a:r>
+            <a:r>
+              <a:rPr lang="en-US" sz="1200" b="0" i="0" kern="1200" dirty="0" err="1">
+                <a:solidFill>
+                  <a:schemeClr val="tx1"/>
+                </a:solidFill>
+                <a:effectLst/>
+                <a:latin typeface="+mn-lt"/>
+                <a:ea typeface="+mn-ea"/>
+                <a:cs typeface="+mn-cs"/>
+              </a:rPr>
+              <a:t>Codeforces</a:t>
+            </a:r>
+            <a:r>
+              <a:rPr lang="en-US" sz="1200" b="0" i="0" kern="1200" dirty="0">
+                <a:solidFill>
+                  <a:schemeClr val="tx1"/>
+                </a:solidFill>
+                <a:effectLst/>
+                <a:latin typeface="+mn-lt"/>
+                <a:ea typeface="+mn-ea"/>
+                <a:cs typeface="+mn-cs"/>
+              </a:rPr>
+              <a:t>).</a:t>
+            </a:r>
+          </a:p>
+          <a:p>
+            <a:r>
+              <a:rPr lang="en-US" sz="1200" b="0" i="0" kern="1200" dirty="0">
+                <a:solidFill>
+                  <a:schemeClr val="tx1"/>
+                </a:solidFill>
+                <a:effectLst/>
+                <a:latin typeface="+mn-lt"/>
+                <a:ea typeface="+mn-ea"/>
+                <a:cs typeface="+mn-cs"/>
+              </a:rPr>
+              <a:t>Root cause is </a:t>
+            </a:r>
+            <a:r>
+              <a:rPr lang="en-US" sz="1200" b="1" i="0" kern="1200" dirty="0">
+                <a:solidFill>
+                  <a:schemeClr val="tx1"/>
+                </a:solidFill>
+                <a:effectLst/>
+                <a:latin typeface="+mn-lt"/>
+                <a:ea typeface="+mn-ea"/>
+                <a:cs typeface="+mn-cs"/>
+              </a:rPr>
+              <a:t>structural</a:t>
+            </a:r>
+            <a:r>
+              <a:rPr lang="en-US" sz="1200" b="0" i="0" kern="1200" dirty="0">
+                <a:solidFill>
+                  <a:schemeClr val="tx1"/>
+                </a:solidFill>
+                <a:effectLst/>
+                <a:latin typeface="+mn-lt"/>
+                <a:ea typeface="+mn-ea"/>
+                <a:cs typeface="+mn-cs"/>
+              </a:rPr>
+              <a:t>: skill is acquired </a:t>
+            </a:r>
+            <a:r>
+              <a:rPr lang="en-US" sz="1200" b="0" i="1" kern="1200" dirty="0">
+                <a:solidFill>
+                  <a:schemeClr val="tx1"/>
+                </a:solidFill>
+                <a:effectLst/>
+                <a:latin typeface="+mn-lt"/>
+                <a:ea typeface="+mn-ea"/>
+                <a:cs typeface="+mn-cs"/>
+              </a:rPr>
+              <a:t>individually</a:t>
+            </a:r>
+            <a:r>
+              <a:rPr lang="en-US" sz="1200" b="0" i="0" kern="1200" dirty="0">
+                <a:solidFill>
+                  <a:schemeClr val="tx1"/>
+                </a:solidFill>
+                <a:effectLst/>
+                <a:latin typeface="+mn-lt"/>
+                <a:ea typeface="+mn-ea"/>
+                <a:cs typeface="+mn-cs"/>
+              </a:rPr>
+              <a:t>, taught </a:t>
+            </a:r>
+            <a:r>
+              <a:rPr lang="en-US" sz="1200" b="0" i="1" kern="1200" dirty="0">
+                <a:solidFill>
+                  <a:schemeClr val="tx1"/>
+                </a:solidFill>
+                <a:effectLst/>
+                <a:latin typeface="+mn-lt"/>
+                <a:ea typeface="+mn-ea"/>
+                <a:cs typeface="+mn-cs"/>
+              </a:rPr>
+              <a:t>uniformly</a:t>
+            </a:r>
+            <a:r>
+              <a:rPr lang="en-US" sz="1200" b="0" i="0" kern="1200" dirty="0">
+                <a:solidFill>
+                  <a:schemeClr val="tx1"/>
+                </a:solidFill>
+                <a:effectLst/>
+                <a:latin typeface="+mn-lt"/>
+                <a:ea typeface="+mn-ea"/>
+                <a:cs typeface="+mn-cs"/>
+              </a:rPr>
+              <a:t>.</a:t>
+            </a:r>
+          </a:p>
+          <a:p>
+            <a:r>
+              <a:rPr lang="en-US" sz="1200" b="0" i="0" kern="1200" dirty="0">
+                <a:solidFill>
+                  <a:schemeClr val="tx1"/>
+                </a:solidFill>
+                <a:effectLst/>
+                <a:latin typeface="+mn-lt"/>
+                <a:ea typeface="+mn-ea"/>
+                <a:cs typeface="+mn-cs"/>
+              </a:rPr>
+              <a:t>→ bottleneck is the </a:t>
+            </a:r>
+            <a:r>
+              <a:rPr lang="en-US" sz="1200" b="1" i="0" kern="1200" dirty="0">
+                <a:solidFill>
+                  <a:schemeClr val="tx1"/>
+                </a:solidFill>
+                <a:effectLst/>
+                <a:latin typeface="+mn-lt"/>
+                <a:ea typeface="+mn-ea"/>
+                <a:cs typeface="+mn-cs"/>
+              </a:rPr>
+              <a:t>mismatch</a:t>
+            </a:r>
+            <a:r>
+              <a:rPr lang="en-US" sz="1200" b="0" i="0" kern="1200" dirty="0">
+                <a:solidFill>
+                  <a:schemeClr val="tx1"/>
+                </a:solidFill>
+                <a:effectLst/>
+                <a:latin typeface="+mn-lt"/>
+                <a:ea typeface="+mn-ea"/>
+                <a:cs typeface="+mn-cs"/>
+              </a:rPr>
+              <a:t>, not the volume.</a:t>
+            </a:r>
+          </a:p>
+          <a:p>
+            <a:endParaRPr lang="en-US" sz="1200" b="0" i="0" kern="1200" dirty="0">
+              <a:solidFill>
+                <a:schemeClr val="tx1"/>
+              </a:solidFill>
+              <a:effectLst/>
+              <a:latin typeface="+mn-lt"/>
+              <a:ea typeface="+mn-ea"/>
+              <a:cs typeface="+mn-cs"/>
+            </a:endParaRPr>
+          </a:p>
+          <a:p>
+            <a:endParaRPr lang="en-US" sz="1200" b="0" i="0" kern="1200" dirty="0">
+              <a:solidFill>
+                <a:schemeClr val="tx1"/>
+              </a:solidFill>
+              <a:effectLst/>
+              <a:latin typeface="+mn-lt"/>
+              <a:ea typeface="+mn-ea"/>
+              <a:cs typeface="+mn-cs"/>
+            </a:endParaRPr>
+          </a:p>
+          <a:p>
+            <a:r>
+              <a:rPr lang="en-US" sz="1200" b="0" i="0" kern="1200" dirty="0">
+                <a:solidFill>
+                  <a:schemeClr val="tx1"/>
+                </a:solidFill>
+                <a:effectLst/>
+                <a:latin typeface="+mn-lt"/>
+                <a:ea typeface="+mn-ea"/>
+                <a:cs typeface="+mn-cs"/>
+              </a:rPr>
+              <a:t>Stress "30–40%". Pause 2s.</a:t>
+            </a:r>
+          </a:p>
+          <a:p>
+            <a:endParaRPr lang="en-US" dirty="0"/>
+          </a:p>
+          <a:p>
+            <a:endParaRPr lang="en-US" dirty="0"/>
+          </a:p>
+        </p:txBody>
+      </p:sp>
+      <p:sp>
+        <p:nvSpPr>
+          <p:cNvPr id="4" name="Slide Number Placeholder 3"/>
+          <p:cNvSpPr>
+            <a:spLocks noGrp="1"/>
+          </p:cNvSpPr>
+          <p:nvPr>
+            <p:ph type="sldNum" sz="quarter" idx="5"/>
+          </p:nvPr>
+        </p:nvSpPr>
+        <p:spPr/>
+        <p:txBody>
+          <a:bodyPr/>
+          <a:lstStyle/>
+          <a:p>
+            <a:fld id="{5F54E561-7F9C-441E-AFBA-1F000FF79D64}" type="slidenum">
+              <a:rPr lang="en-US" smtClean="0"/>
+              <a:t>2</a:t>
+            </a:fld>
+            <a:endParaRPr lang="en-US"/>
+          </a:p>
+        </p:txBody>
+      </p:sp>
+    </p:spTree>
+    <p:extLst>
+      <p:ext uri="{BB962C8B-B14F-4D97-AF65-F5344CB8AC3E}">
+        <p14:creationId xmlns:p14="http://schemas.microsoft.com/office/powerpoint/2010/main" val="3511649431"/>
+      </p:ext>
+    </p:extLst>
+  </p:cSld>
+  <p:clrMapOvr>
+    <a:masterClrMapping/>
+  </p:clrMapOvr>
+</p:notes>
+</file>
+
+<file path=ppt/notesSlides/notesSlide3.xml><?xml version="1.0" encoding="utf-8"?>
+<p:notes xmlns:a="http://schemas.openxmlformats.org/drawingml/2006/main" xmlns:r="http://schemas.openxmlformats.org/officeDocument/2006/relationships" xmlns:p="http://schemas.openxmlformats.org/presentationml/2006/main">
+  <p:cSld>
+    <p:spTree>
+      <p:nvGrpSpPr>
+        <p:cNvPr id="1" name=""/>
+        <p:cNvGrpSpPr/>
+        <p:nvPr/>
+      </p:nvGrpSpPr>
+      <p:grpSpPr>
+        <a:xfrm>
+          <a:off x="0" y="0"/>
+          <a:ext cx="0" cy="0"/>
+          <a:chOff x="0" y="0"/>
+          <a:chExt cx="0" cy="0"/>
+        </a:xfrm>
+      </p:grpSpPr>
+      <p:sp>
+        <p:nvSpPr>
+          <p:cNvPr id="2" name="Slide Image Placeholder 1"/>
+          <p:cNvSpPr>
+            <a:spLocks noGrp="1" noRot="1" noChangeAspect="1"/>
+          </p:cNvSpPr>
+          <p:nvPr>
+            <p:ph type="sldImg"/>
+          </p:nvPr>
+        </p:nvSpPr>
+        <p:spPr/>
+      </p:sp>
+      <p:sp>
+        <p:nvSpPr>
+          <p:cNvPr id="3" name="Notes Placeholder 2"/>
+          <p:cNvSpPr>
+            <a:spLocks noGrp="1"/>
+          </p:cNvSpPr>
+          <p:nvPr>
+            <p:ph type="body" idx="1"/>
+          </p:nvPr>
+        </p:nvSpPr>
+        <p:spPr/>
+        <p:txBody>
+          <a:bodyPr/>
+          <a:lstStyle/>
+          <a:p>
+            <a:r>
+              <a:rPr lang="en-US" sz="1200" b="0" i="0" kern="1200" dirty="0">
+                <a:solidFill>
+                  <a:schemeClr val="tx1"/>
+                </a:solidFill>
+                <a:effectLst/>
+                <a:latin typeface="+mn-lt"/>
+                <a:ea typeface="+mn-ea"/>
+                <a:cs typeface="+mn-cs"/>
+              </a:rPr>
+              <a:t>Four mature techniques:</a:t>
+            </a:r>
+          </a:p>
+          <a:p>
+            <a:r>
+              <a:rPr lang="en-US" sz="1200" b="1" i="0" kern="1200" dirty="0">
+                <a:solidFill>
+                  <a:schemeClr val="tx1"/>
+                </a:solidFill>
+                <a:effectLst/>
+                <a:latin typeface="+mn-lt"/>
+                <a:ea typeface="+mn-ea"/>
+                <a:cs typeface="+mn-cs"/>
+              </a:rPr>
+              <a:t>BKT</a:t>
+            </a:r>
+            <a:r>
+              <a:rPr lang="en-US" sz="1200" b="0" i="0" kern="1200" dirty="0">
+                <a:solidFill>
+                  <a:schemeClr val="tx1"/>
+                </a:solidFill>
+                <a:effectLst/>
+                <a:latin typeface="+mn-lt"/>
+                <a:ea typeface="+mn-ea"/>
+                <a:cs typeface="+mn-cs"/>
+              </a:rPr>
+              <a:t> (Corbett &amp; Anderson 1995) — per-concept mastery.</a:t>
+            </a:r>
+          </a:p>
+          <a:p>
+            <a:r>
+              <a:rPr lang="en-US" sz="1200" b="1" i="0" kern="1200" dirty="0">
+                <a:solidFill>
+                  <a:schemeClr val="tx1"/>
+                </a:solidFill>
+                <a:effectLst/>
+                <a:latin typeface="+mn-lt"/>
+                <a:ea typeface="+mn-ea"/>
+                <a:cs typeface="+mn-cs"/>
+              </a:rPr>
+              <a:t>Elo</a:t>
+            </a:r>
+            <a:r>
+              <a:rPr lang="en-US" sz="1200" b="0" i="0" kern="1200" dirty="0">
+                <a:solidFill>
+                  <a:schemeClr val="tx1"/>
+                </a:solidFill>
+                <a:effectLst/>
+                <a:latin typeface="+mn-lt"/>
+                <a:ea typeface="+mn-ea"/>
+                <a:cs typeface="+mn-cs"/>
+              </a:rPr>
+              <a:t> (</a:t>
+            </a:r>
+            <a:r>
+              <a:rPr lang="en-US" sz="1200" b="0" i="0" kern="1200" dirty="0" err="1">
+                <a:solidFill>
+                  <a:schemeClr val="tx1"/>
+                </a:solidFill>
+                <a:effectLst/>
+                <a:latin typeface="+mn-lt"/>
+                <a:ea typeface="+mn-ea"/>
+                <a:cs typeface="+mn-cs"/>
+              </a:rPr>
+              <a:t>Pelánek</a:t>
+            </a:r>
+            <a:r>
+              <a:rPr lang="en-US" sz="1200" b="0" i="0" kern="1200" dirty="0">
+                <a:solidFill>
+                  <a:schemeClr val="tx1"/>
+                </a:solidFill>
+                <a:effectLst/>
+                <a:latin typeface="+mn-lt"/>
+                <a:ea typeface="+mn-ea"/>
+                <a:cs typeface="+mn-cs"/>
+              </a:rPr>
+              <a:t> 2016) — difficulty calibration.</a:t>
+            </a:r>
+          </a:p>
+          <a:p>
+            <a:r>
+              <a:rPr lang="en-US" sz="1200" b="1" i="0" kern="1200" dirty="0">
+                <a:solidFill>
+                  <a:schemeClr val="tx1"/>
+                </a:solidFill>
+                <a:effectLst/>
+                <a:latin typeface="+mn-lt"/>
+                <a:ea typeface="+mn-ea"/>
+                <a:cs typeface="+mn-cs"/>
+              </a:rPr>
+              <a:t>MAB / Thompson Sampling</a:t>
+            </a:r>
+            <a:r>
+              <a:rPr lang="en-US" sz="1200" b="0" i="0" kern="1200" dirty="0">
+                <a:solidFill>
+                  <a:schemeClr val="tx1"/>
+                </a:solidFill>
+                <a:effectLst/>
+                <a:latin typeface="+mn-lt"/>
+                <a:ea typeface="+mn-ea"/>
+                <a:cs typeface="+mn-cs"/>
+              </a:rPr>
+              <a:t> — explore vs. exploit.</a:t>
+            </a:r>
+          </a:p>
+          <a:p>
+            <a:r>
+              <a:rPr lang="en-US" sz="1200" b="1" i="0" kern="1200" dirty="0">
+                <a:solidFill>
+                  <a:schemeClr val="tx1"/>
+                </a:solidFill>
+                <a:effectLst/>
+                <a:latin typeface="+mn-lt"/>
+                <a:ea typeface="+mn-ea"/>
+                <a:cs typeface="+mn-cs"/>
+              </a:rPr>
+              <a:t>FSRS</a:t>
+            </a:r>
+            <a:r>
+              <a:rPr lang="en-US" sz="1200" b="0" i="0" kern="1200" dirty="0">
+                <a:solidFill>
+                  <a:schemeClr val="tx1"/>
+                </a:solidFill>
+                <a:effectLst/>
+                <a:latin typeface="+mn-lt"/>
+                <a:ea typeface="+mn-ea"/>
+                <a:cs typeface="+mn-cs"/>
+              </a:rPr>
+              <a:t> (Ye et al. 2022) — spaced reviews.</a:t>
+            </a:r>
+          </a:p>
+          <a:p>
+            <a:r>
+              <a:rPr lang="en-US" sz="1200" b="0" i="0" kern="1200" dirty="0">
+                <a:solidFill>
+                  <a:schemeClr val="tx1"/>
+                </a:solidFill>
+                <a:effectLst/>
+                <a:latin typeface="+mn-lt"/>
+                <a:ea typeface="+mn-ea"/>
+                <a:cs typeface="+mn-cs"/>
+              </a:rPr>
+              <a:t>Each studied </a:t>
+            </a:r>
+            <a:r>
+              <a:rPr lang="en-US" sz="1200" b="1" i="0" kern="1200" dirty="0">
+                <a:solidFill>
+                  <a:schemeClr val="tx1"/>
+                </a:solidFill>
+                <a:effectLst/>
+                <a:latin typeface="+mn-lt"/>
+                <a:ea typeface="+mn-ea"/>
+                <a:cs typeface="+mn-cs"/>
+              </a:rPr>
+              <a:t>alone or in pairs</a:t>
+            </a:r>
+            <a:r>
+              <a:rPr lang="en-US" sz="1200" b="0" i="0" kern="1200" dirty="0">
+                <a:solidFill>
+                  <a:schemeClr val="tx1"/>
+                </a:solidFill>
+                <a:effectLst/>
+                <a:latin typeface="+mn-lt"/>
+                <a:ea typeface="+mn-ea"/>
+                <a:cs typeface="+mn-cs"/>
+              </a:rPr>
+              <a:t>. </a:t>
+            </a:r>
+            <a:r>
+              <a:rPr lang="en-US" sz="1200" b="1" i="0" kern="1200" dirty="0">
+                <a:solidFill>
+                  <a:schemeClr val="tx1"/>
+                </a:solidFill>
+                <a:effectLst/>
+                <a:latin typeface="+mn-lt"/>
+                <a:ea typeface="+mn-ea"/>
+                <a:cs typeface="+mn-cs"/>
+              </a:rPr>
+              <a:t>Nobody</a:t>
+            </a:r>
+            <a:r>
+              <a:rPr lang="en-US" sz="1200" b="0" i="0" kern="1200" dirty="0">
+                <a:solidFill>
+                  <a:schemeClr val="tx1"/>
+                </a:solidFill>
+                <a:effectLst/>
+                <a:latin typeface="+mn-lt"/>
+                <a:ea typeface="+mn-ea"/>
+                <a:cs typeface="+mn-cs"/>
+              </a:rPr>
+              <a:t> has composed all four for </a:t>
+            </a:r>
+            <a:r>
+              <a:rPr lang="en-US" sz="1200" b="1" i="0" kern="1200" dirty="0">
+                <a:solidFill>
+                  <a:schemeClr val="tx1"/>
+                </a:solidFill>
+                <a:effectLst/>
+                <a:latin typeface="+mn-lt"/>
+                <a:ea typeface="+mn-ea"/>
+                <a:cs typeface="+mn-cs"/>
+              </a:rPr>
+              <a:t>programming education</a:t>
+            </a:r>
+            <a:r>
+              <a:rPr lang="en-US" sz="1200" b="0" i="0" kern="1200" dirty="0">
+                <a:solidFill>
+                  <a:schemeClr val="tx1"/>
+                </a:solidFill>
+                <a:effectLst/>
+                <a:latin typeface="+mn-lt"/>
+                <a:ea typeface="+mn-ea"/>
+                <a:cs typeface="+mn-cs"/>
+              </a:rPr>
+              <a:t> under a shared knowledge graph.</a:t>
+            </a:r>
+          </a:p>
+          <a:p>
+            <a:r>
+              <a:rPr lang="en-US" sz="1200" b="0" i="1" kern="1200" dirty="0">
+                <a:solidFill>
+                  <a:schemeClr val="tx1"/>
+                </a:solidFill>
+                <a:effectLst/>
+                <a:latin typeface="+mn-lt"/>
+                <a:ea typeface="+mn-ea"/>
+                <a:cs typeface="+mn-cs"/>
+              </a:rPr>
+              <a:t>That gap is what this paper closes.</a:t>
+            </a:r>
+            <a:endParaRPr lang="en-US" sz="1200" b="0" i="0" kern="1200" dirty="0">
+              <a:solidFill>
+                <a:schemeClr val="tx1"/>
+              </a:solidFill>
+              <a:effectLst/>
+              <a:latin typeface="+mn-lt"/>
+              <a:ea typeface="+mn-ea"/>
+              <a:cs typeface="+mn-cs"/>
+            </a:endParaRPr>
+          </a:p>
+          <a:p>
+            <a:endParaRPr lang="en-US" sz="1200" b="0" i="0" kern="1200" dirty="0">
+              <a:solidFill>
+                <a:schemeClr val="tx1"/>
+              </a:solidFill>
+              <a:effectLst/>
+              <a:latin typeface="+mn-lt"/>
+              <a:ea typeface="+mn-ea"/>
+              <a:cs typeface="+mn-cs"/>
+            </a:endParaRPr>
+          </a:p>
+          <a:p>
+            <a:endParaRPr lang="en-US" sz="1200" b="0" i="0" kern="1200" dirty="0">
+              <a:solidFill>
+                <a:schemeClr val="tx1"/>
+              </a:solidFill>
+              <a:effectLst/>
+              <a:latin typeface="+mn-lt"/>
+              <a:ea typeface="+mn-ea"/>
+              <a:cs typeface="+mn-cs"/>
+            </a:endParaRPr>
+          </a:p>
+          <a:p>
+            <a:r>
+              <a:rPr lang="en-US" sz="1200" b="0" i="0" kern="1200" dirty="0">
+                <a:solidFill>
+                  <a:schemeClr val="tx1"/>
+                </a:solidFill>
+                <a:effectLst/>
+                <a:latin typeface="+mn-lt"/>
+                <a:ea typeface="+mn-ea"/>
+                <a:cs typeface="+mn-cs"/>
+              </a:rPr>
+              <a:t>Slow on the four names — they're the four pillars of the rest of the talk.</a:t>
+            </a:r>
+          </a:p>
+          <a:p>
+            <a:endParaRPr lang="en-US" dirty="0"/>
+          </a:p>
+        </p:txBody>
+      </p:sp>
+      <p:sp>
+        <p:nvSpPr>
+          <p:cNvPr id="4" name="Slide Number Placeholder 3"/>
+          <p:cNvSpPr>
+            <a:spLocks noGrp="1"/>
+          </p:cNvSpPr>
+          <p:nvPr>
+            <p:ph type="sldNum" sz="quarter" idx="5"/>
+          </p:nvPr>
+        </p:nvSpPr>
+        <p:spPr/>
+        <p:txBody>
+          <a:bodyPr/>
+          <a:lstStyle/>
+          <a:p>
+            <a:fld id="{5F54E561-7F9C-441E-AFBA-1F000FF79D64}" type="slidenum">
+              <a:rPr lang="en-US" smtClean="0"/>
+              <a:t>3</a:t>
+            </a:fld>
+            <a:endParaRPr lang="en-US"/>
+          </a:p>
+        </p:txBody>
+      </p:sp>
+    </p:spTree>
+    <p:extLst>
+      <p:ext uri="{BB962C8B-B14F-4D97-AF65-F5344CB8AC3E}">
+        <p14:creationId xmlns:p14="http://schemas.microsoft.com/office/powerpoint/2010/main" val="1127273776"/>
+      </p:ext>
+    </p:extLst>
+  </p:cSld>
+  <p:clrMapOvr>
+    <a:masterClrMapping/>
+  </p:clrMapOvr>
+</p:notes>
+</file>
+
+<file path=ppt/notesSlides/notesSlide4.xml><?xml version="1.0" encoding="utf-8"?>
+<p:notes xmlns:a="http://schemas.openxmlformats.org/drawingml/2006/main" xmlns:r="http://schemas.openxmlformats.org/officeDocument/2006/relationships" xmlns:p="http://schemas.openxmlformats.org/presentationml/2006/main">
+  <p:cSld>
+    <p:spTree>
+      <p:nvGrpSpPr>
+        <p:cNvPr id="1" name=""/>
+        <p:cNvGrpSpPr/>
+        <p:nvPr/>
+      </p:nvGrpSpPr>
+      <p:grpSpPr>
+        <a:xfrm>
+          <a:off x="0" y="0"/>
+          <a:ext cx="0" cy="0"/>
+          <a:chOff x="0" y="0"/>
+          <a:chExt cx="0" cy="0"/>
+        </a:xfrm>
+      </p:grpSpPr>
+      <p:sp>
+        <p:nvSpPr>
+          <p:cNvPr id="2" name="Slide Image Placeholder 1"/>
+          <p:cNvSpPr>
+            <a:spLocks noGrp="1" noRot="1" noChangeAspect="1"/>
+          </p:cNvSpPr>
+          <p:nvPr>
+            <p:ph type="sldImg"/>
+          </p:nvPr>
+        </p:nvSpPr>
+        <p:spPr/>
+      </p:sp>
+      <p:sp>
+        <p:nvSpPr>
+          <p:cNvPr id="3" name="Notes Placeholder 2"/>
+          <p:cNvSpPr>
+            <a:spLocks noGrp="1"/>
+          </p:cNvSpPr>
+          <p:nvPr>
+            <p:ph type="body" idx="1"/>
+          </p:nvPr>
+        </p:nvSpPr>
+        <p:spPr/>
+        <p:txBody>
+          <a:bodyPr/>
+          <a:lstStyle/>
+          <a:p>
+            <a:r>
+              <a:rPr lang="en-US" sz="1200" b="0" i="0" kern="1200" dirty="0">
+                <a:solidFill>
+                  <a:schemeClr val="tx1"/>
+                </a:solidFill>
+                <a:effectLst/>
+                <a:latin typeface="+mn-lt"/>
+                <a:ea typeface="+mn-ea"/>
+                <a:cs typeface="+mn-cs"/>
+              </a:rPr>
+              <a:t>Foundation: </a:t>
+            </a:r>
+            <a:r>
+              <a:rPr lang="en-US" sz="1200" b="1" i="0" kern="1200" dirty="0">
+                <a:solidFill>
+                  <a:schemeClr val="tx1"/>
+                </a:solidFill>
+                <a:effectLst/>
+                <a:latin typeface="+mn-lt"/>
+                <a:ea typeface="+mn-ea"/>
+                <a:cs typeface="+mn-cs"/>
+              </a:rPr>
+              <a:t>knowledge graph</a:t>
+            </a:r>
+            <a:r>
+              <a:rPr lang="en-US" sz="1200" b="0" i="0" kern="1200" dirty="0">
+                <a:solidFill>
+                  <a:schemeClr val="tx1"/>
+                </a:solidFill>
+                <a:effectLst/>
+                <a:latin typeface="+mn-lt"/>
+                <a:ea typeface="+mn-ea"/>
+                <a:cs typeface="+mn-cs"/>
+              </a:rPr>
+              <a:t> of </a:t>
+            </a:r>
+            <a:r>
+              <a:rPr lang="en-US" sz="1200" b="1" i="0" kern="1200" dirty="0">
+                <a:solidFill>
+                  <a:schemeClr val="tx1"/>
+                </a:solidFill>
+                <a:effectLst/>
+                <a:latin typeface="+mn-lt"/>
+                <a:ea typeface="+mn-ea"/>
+                <a:cs typeface="+mn-cs"/>
+              </a:rPr>
+              <a:t>28 concepts</a:t>
+            </a:r>
+            <a:r>
+              <a:rPr lang="en-US" sz="1200" b="0" i="0" kern="1200" dirty="0">
+                <a:solidFill>
+                  <a:schemeClr val="tx1"/>
+                </a:solidFill>
+                <a:effectLst/>
+                <a:latin typeface="+mn-lt"/>
+                <a:ea typeface="+mn-ea"/>
+                <a:cs typeface="+mn-cs"/>
+              </a:rPr>
+              <a:t>, </a:t>
+            </a:r>
+            <a:r>
+              <a:rPr lang="en-US" sz="1200" b="1" i="0" kern="1200" dirty="0">
+                <a:solidFill>
+                  <a:schemeClr val="tx1"/>
+                </a:solidFill>
+                <a:effectLst/>
+                <a:latin typeface="+mn-lt"/>
+                <a:ea typeface="+mn-ea"/>
+                <a:cs typeface="+mn-cs"/>
+              </a:rPr>
+              <a:t>~45 prerequisite edges</a:t>
+            </a:r>
+            <a:r>
+              <a:rPr lang="en-US" sz="1200" b="0" i="0" kern="1200" dirty="0">
+                <a:solidFill>
+                  <a:schemeClr val="tx1"/>
+                </a:solidFill>
+                <a:effectLst/>
+                <a:latin typeface="+mn-lt"/>
+                <a:ea typeface="+mn-ea"/>
+                <a:cs typeface="+mn-cs"/>
+              </a:rPr>
+              <a:t>.</a:t>
+            </a:r>
+          </a:p>
+          <a:p>
+            <a:r>
+              <a:rPr lang="en-US" sz="1200" b="0" i="0" kern="1200" dirty="0">
+                <a:solidFill>
+                  <a:schemeClr val="tx1"/>
+                </a:solidFill>
+                <a:effectLst/>
+                <a:latin typeface="+mn-lt"/>
+                <a:ea typeface="+mn-ea"/>
+                <a:cs typeface="+mn-cs"/>
+              </a:rPr>
+              <a:t>L1 BKT — mastery posterior.</a:t>
+            </a:r>
+          </a:p>
+          <a:p>
+            <a:r>
+              <a:rPr lang="en-US" sz="1200" b="0" i="0" kern="1200" dirty="0">
+                <a:solidFill>
+                  <a:schemeClr val="tx1"/>
+                </a:solidFill>
+                <a:effectLst/>
+                <a:latin typeface="+mn-lt"/>
+                <a:ea typeface="+mn-ea"/>
+                <a:cs typeface="+mn-cs"/>
+              </a:rPr>
+              <a:t>L2 dynamic Elo — difficulty calibration.</a:t>
+            </a:r>
+          </a:p>
+          <a:p>
+            <a:r>
+              <a:rPr lang="en-US" sz="1200" b="0" i="0" kern="1200" dirty="0">
+                <a:solidFill>
+                  <a:schemeClr val="tx1"/>
+                </a:solidFill>
+                <a:effectLst/>
+                <a:latin typeface="+mn-lt"/>
+                <a:ea typeface="+mn-ea"/>
+                <a:cs typeface="+mn-cs"/>
+              </a:rPr>
+              <a:t>L3 hierarchical MAB — picks next concept and next problem.</a:t>
+            </a:r>
+          </a:p>
+          <a:p>
+            <a:r>
+              <a:rPr lang="en-US" sz="1200" b="0" i="0" kern="1200" dirty="0">
+                <a:solidFill>
+                  <a:schemeClr val="tx1"/>
+                </a:solidFill>
+                <a:effectLst/>
+                <a:latin typeface="+mn-lt"/>
+                <a:ea typeface="+mn-ea"/>
+                <a:cs typeface="+mn-cs"/>
+              </a:rPr>
+              <a:t>L4 FSRS — review scheduling.</a:t>
+            </a:r>
+          </a:p>
+          <a:p>
+            <a:r>
+              <a:rPr lang="en-US" sz="1200" b="0" i="0" kern="1200" dirty="0">
+                <a:solidFill>
+                  <a:schemeClr val="tx1"/>
+                </a:solidFill>
+                <a:effectLst/>
+                <a:latin typeface="+mn-lt"/>
+                <a:ea typeface="+mn-ea"/>
+                <a:cs typeface="+mn-cs"/>
+              </a:rPr>
+              <a:t>L5 LLM Socratic hints — </a:t>
+            </a:r>
+            <a:r>
+              <a:rPr lang="en-US" sz="1200" b="1" i="0" kern="1200" dirty="0">
+                <a:solidFill>
+                  <a:schemeClr val="tx1"/>
+                </a:solidFill>
+                <a:effectLst/>
+                <a:latin typeface="+mn-lt"/>
+                <a:ea typeface="+mn-ea"/>
+                <a:cs typeface="+mn-cs"/>
+              </a:rPr>
+              <a:t>off by default during evaluation</a:t>
+            </a:r>
+            <a:r>
+              <a:rPr lang="en-US" sz="1200" b="0" i="0" kern="1200" dirty="0">
+                <a:solidFill>
+                  <a:schemeClr val="tx1"/>
+                </a:solidFill>
+                <a:effectLst/>
+                <a:latin typeface="+mn-lt"/>
+                <a:ea typeface="+mn-ea"/>
+                <a:cs typeface="+mn-cs"/>
+              </a:rPr>
+              <a:t>.</a:t>
+            </a:r>
+          </a:p>
+          <a:p>
+            <a:endParaRPr lang="en-US" sz="1200" b="0" i="0" kern="1200" dirty="0">
+              <a:solidFill>
+                <a:schemeClr val="tx1"/>
+              </a:solidFill>
+              <a:effectLst/>
+              <a:latin typeface="+mn-lt"/>
+              <a:ea typeface="+mn-ea"/>
+              <a:cs typeface="+mn-cs"/>
+            </a:endParaRPr>
+          </a:p>
+          <a:p>
+            <a:endParaRPr lang="en-US" sz="1200" b="0" i="0" kern="1200" dirty="0">
+              <a:solidFill>
+                <a:schemeClr val="tx1"/>
+              </a:solidFill>
+              <a:effectLst/>
+              <a:latin typeface="+mn-lt"/>
+              <a:ea typeface="+mn-ea"/>
+              <a:cs typeface="+mn-cs"/>
+            </a:endParaRPr>
+          </a:p>
+          <a:p>
+            <a:r>
+              <a:rPr lang="en-US" sz="1200" b="0" i="0" kern="1200" dirty="0">
+                <a:solidFill>
+                  <a:schemeClr val="tx1"/>
+                </a:solidFill>
+                <a:effectLst/>
+                <a:latin typeface="+mn-lt"/>
+                <a:ea typeface="+mn-ea"/>
+                <a:cs typeface="+mn-cs"/>
+              </a:rPr>
+              <a:t>Use laser pointer top-down. Mention L5 quickly, then move on.																																							</a:t>
+            </a:r>
+          </a:p>
+          <a:p>
+            <a:endParaRPr lang="en-US" dirty="0"/>
+          </a:p>
+        </p:txBody>
+      </p:sp>
+      <p:sp>
+        <p:nvSpPr>
+          <p:cNvPr id="4" name="Slide Number Placeholder 3"/>
+          <p:cNvSpPr>
+            <a:spLocks noGrp="1"/>
+          </p:cNvSpPr>
+          <p:nvPr>
+            <p:ph type="sldNum" sz="quarter" idx="5"/>
+          </p:nvPr>
+        </p:nvSpPr>
+        <p:spPr/>
+        <p:txBody>
+          <a:bodyPr/>
+          <a:lstStyle/>
+          <a:p>
+            <a:fld id="{5F54E561-7F9C-441E-AFBA-1F000FF79D64}" type="slidenum">
+              <a:rPr lang="en-US" smtClean="0"/>
+              <a:t>4</a:t>
+            </a:fld>
+            <a:endParaRPr lang="en-US"/>
+          </a:p>
+        </p:txBody>
+      </p:sp>
+    </p:spTree>
+    <p:extLst>
+      <p:ext uri="{BB962C8B-B14F-4D97-AF65-F5344CB8AC3E}">
+        <p14:creationId xmlns:p14="http://schemas.microsoft.com/office/powerpoint/2010/main" val="2599428826"/>
+      </p:ext>
+    </p:extLst>
+  </p:cSld>
+  <p:clrMapOvr>
+    <a:masterClrMapping/>
+  </p:clrMapOvr>
+</p:notes>
+</file>
+
+<file path=ppt/notesSlides/notesSlide5.xml><?xml version="1.0" encoding="utf-8"?>
+<p:notes xmlns:a="http://schemas.openxmlformats.org/drawingml/2006/main" xmlns:r="http://schemas.openxmlformats.org/officeDocument/2006/relationships" xmlns:p="http://schemas.openxmlformats.org/presentationml/2006/main">
+  <p:cSld>
+    <p:spTree>
+      <p:nvGrpSpPr>
+        <p:cNvPr id="1" name=""/>
+        <p:cNvGrpSpPr/>
+        <p:nvPr/>
+      </p:nvGrpSpPr>
+      <p:grpSpPr>
+        <a:xfrm>
+          <a:off x="0" y="0"/>
+          <a:ext cx="0" cy="0"/>
+          <a:chOff x="0" y="0"/>
+          <a:chExt cx="0" cy="0"/>
+        </a:xfrm>
+      </p:grpSpPr>
+      <p:sp>
+        <p:nvSpPr>
+          <p:cNvPr id="2" name="Slide Image Placeholder 1"/>
+          <p:cNvSpPr>
+            <a:spLocks noGrp="1" noRot="1" noChangeAspect="1"/>
+          </p:cNvSpPr>
+          <p:nvPr>
+            <p:ph type="sldImg"/>
+          </p:nvPr>
+        </p:nvSpPr>
+        <p:spPr/>
+      </p:sp>
+      <p:sp>
+        <p:nvSpPr>
+          <p:cNvPr id="3" name="Notes Placeholder 2"/>
+          <p:cNvSpPr>
+            <a:spLocks noGrp="1"/>
+          </p:cNvSpPr>
+          <p:nvPr>
+            <p:ph type="body" idx="1"/>
+          </p:nvPr>
+        </p:nvSpPr>
+        <p:spPr/>
+        <p:txBody>
+          <a:bodyPr/>
+          <a:lstStyle/>
+          <a:p>
+            <a:r>
+              <a:rPr lang="en-US" sz="1200" b="0" i="0" kern="1200" dirty="0">
+                <a:solidFill>
+                  <a:schemeClr val="tx1"/>
+                </a:solidFill>
+                <a:effectLst/>
+                <a:latin typeface="+mn-lt"/>
+                <a:ea typeface="+mn-ea"/>
+                <a:cs typeface="+mn-cs"/>
+              </a:rPr>
+              <a:t>Per-learner, per-concept posterior — 4 classical params (prior, transition, guess, slip).</a:t>
+            </a:r>
+          </a:p>
+          <a:p>
+            <a:r>
+              <a:rPr lang="en-US" sz="1200" b="0" i="0" kern="1200" dirty="0">
+                <a:solidFill>
+                  <a:schemeClr val="tx1"/>
+                </a:solidFill>
+                <a:effectLst/>
+                <a:latin typeface="+mn-lt"/>
+                <a:ea typeface="+mn-ea"/>
+                <a:cs typeface="+mn-cs"/>
+              </a:rPr>
+              <a:t>Mastered when posterior crosses </a:t>
+            </a:r>
+            <a:r>
+              <a:rPr lang="en-US" sz="1200" b="1" i="0" kern="1200" dirty="0">
+                <a:solidFill>
+                  <a:schemeClr val="tx1"/>
+                </a:solidFill>
+                <a:effectLst/>
+                <a:latin typeface="+mn-lt"/>
+                <a:ea typeface="+mn-ea"/>
+                <a:cs typeface="+mn-cs"/>
+              </a:rPr>
+              <a:t>θₘ = 0.85</a:t>
+            </a:r>
+            <a:r>
+              <a:rPr lang="en-US" sz="1200" b="0" i="0" kern="1200" dirty="0">
+                <a:solidFill>
+                  <a:schemeClr val="tx1"/>
+                </a:solidFill>
+                <a:effectLst/>
+                <a:latin typeface="+mn-lt"/>
+                <a:ea typeface="+mn-ea"/>
+                <a:cs typeface="+mn-cs"/>
+              </a:rPr>
+              <a:t>.</a:t>
+            </a:r>
+          </a:p>
+          <a:p>
+            <a:r>
+              <a:rPr lang="en-US" sz="1200" b="1" i="0" kern="1200" dirty="0">
+                <a:solidFill>
+                  <a:schemeClr val="tx1"/>
+                </a:solidFill>
+                <a:effectLst/>
+                <a:latin typeface="+mn-lt"/>
+                <a:ea typeface="+mn-ea"/>
+                <a:cs typeface="+mn-cs"/>
+              </a:rPr>
+              <a:t>Tiered priors</a:t>
+            </a:r>
+            <a:r>
+              <a:rPr lang="en-US" sz="1200" b="0" i="0" kern="1200" dirty="0">
+                <a:solidFill>
+                  <a:schemeClr val="tx1"/>
+                </a:solidFill>
+                <a:effectLst/>
+                <a:latin typeface="+mn-lt"/>
+                <a:ea typeface="+mn-ea"/>
+                <a:cs typeface="+mn-cs"/>
+              </a:rPr>
+              <a:t> — 5 sets, one per difficulty tier → calibrated cold-start across the curriculum.</a:t>
+            </a:r>
+          </a:p>
+          <a:p>
+            <a:endParaRPr lang="en-US" sz="1200" b="0" i="0" kern="1200" dirty="0">
+              <a:solidFill>
+                <a:schemeClr val="tx1"/>
+              </a:solidFill>
+              <a:effectLst/>
+              <a:latin typeface="+mn-lt"/>
+              <a:ea typeface="+mn-ea"/>
+              <a:cs typeface="+mn-cs"/>
+            </a:endParaRPr>
+          </a:p>
+          <a:p>
+            <a:endParaRPr lang="en-US" sz="1200" b="0" i="0" kern="1200" dirty="0">
+              <a:solidFill>
+                <a:schemeClr val="tx1"/>
+              </a:solidFill>
+              <a:effectLst/>
+              <a:latin typeface="+mn-lt"/>
+              <a:ea typeface="+mn-ea"/>
+              <a:cs typeface="+mn-cs"/>
+            </a:endParaRPr>
+          </a:p>
+          <a:p>
+            <a:r>
+              <a:rPr lang="en-US" sz="1200" b="0" i="0" kern="1200" dirty="0">
+                <a:solidFill>
+                  <a:schemeClr val="tx1"/>
+                </a:solidFill>
+                <a:effectLst/>
+                <a:latin typeface="+mn-lt"/>
+                <a:ea typeface="+mn-ea"/>
+                <a:cs typeface="+mn-cs"/>
+              </a:rPr>
+              <a:t>Anticipate "Why BKT not DKT?" — answer is on the slide; defer to Q&amp;A if asked.</a:t>
+            </a:r>
+          </a:p>
+          <a:p>
+            <a:endParaRPr lang="en-US" dirty="0"/>
+          </a:p>
+        </p:txBody>
+      </p:sp>
+      <p:sp>
+        <p:nvSpPr>
+          <p:cNvPr id="4" name="Slide Number Placeholder 3"/>
+          <p:cNvSpPr>
+            <a:spLocks noGrp="1"/>
+          </p:cNvSpPr>
+          <p:nvPr>
+            <p:ph type="sldNum" sz="quarter" idx="5"/>
+          </p:nvPr>
+        </p:nvSpPr>
+        <p:spPr/>
+        <p:txBody>
+          <a:bodyPr/>
+          <a:lstStyle/>
+          <a:p>
+            <a:fld id="{5F54E561-7F9C-441E-AFBA-1F000FF79D64}" type="slidenum">
+              <a:rPr lang="en-US" smtClean="0"/>
+              <a:t>5</a:t>
+            </a:fld>
+            <a:endParaRPr lang="en-US"/>
+          </a:p>
+        </p:txBody>
+      </p:sp>
+    </p:spTree>
+    <p:extLst>
+      <p:ext uri="{BB962C8B-B14F-4D97-AF65-F5344CB8AC3E}">
+        <p14:creationId xmlns:p14="http://schemas.microsoft.com/office/powerpoint/2010/main" val="4091318887"/>
+      </p:ext>
+    </p:extLst>
+  </p:cSld>
+  <p:clrMapOvr>
+    <a:masterClrMapping/>
+  </p:clrMapOvr>
+</p:notes>
+</file>
+
+<file path=ppt/notesSlides/notesSlide6.xml><?xml version="1.0" encoding="utf-8"?>
+<p:notes xmlns:a="http://schemas.openxmlformats.org/drawingml/2006/main" xmlns:r="http://schemas.openxmlformats.org/officeDocument/2006/relationships" xmlns:p="http://schemas.openxmlformats.org/presentationml/2006/main">
+  <p:cSld>
+    <p:spTree>
+      <p:nvGrpSpPr>
+        <p:cNvPr id="1" name=""/>
+        <p:cNvGrpSpPr/>
+        <p:nvPr/>
+      </p:nvGrpSpPr>
+      <p:grpSpPr>
+        <a:xfrm>
+          <a:off x="0" y="0"/>
+          <a:ext cx="0" cy="0"/>
+          <a:chOff x="0" y="0"/>
+          <a:chExt cx="0" cy="0"/>
+        </a:xfrm>
+      </p:grpSpPr>
+      <p:sp>
+        <p:nvSpPr>
+          <p:cNvPr id="2" name="Slide Image Placeholder 1"/>
+          <p:cNvSpPr>
+            <a:spLocks noGrp="1" noRot="1" noChangeAspect="1"/>
+          </p:cNvSpPr>
+          <p:nvPr>
+            <p:ph type="sldImg"/>
+          </p:nvPr>
+        </p:nvSpPr>
+        <p:spPr/>
+      </p:sp>
+      <p:sp>
+        <p:nvSpPr>
+          <p:cNvPr id="3" name="Notes Placeholder 2"/>
+          <p:cNvSpPr>
+            <a:spLocks noGrp="1"/>
+          </p:cNvSpPr>
+          <p:nvPr>
+            <p:ph type="body" idx="1"/>
+          </p:nvPr>
+        </p:nvSpPr>
+        <p:spPr/>
+        <p:txBody>
+          <a:bodyPr/>
+          <a:lstStyle/>
+          <a:p>
+            <a:r>
+              <a:rPr lang="en-US" sz="1200" b="1" i="0" kern="1200" dirty="0">
+                <a:solidFill>
+                  <a:schemeClr val="tx1"/>
+                </a:solidFill>
+                <a:effectLst/>
+                <a:latin typeface="+mn-lt"/>
+                <a:ea typeface="+mn-ea"/>
+                <a:cs typeface="+mn-cs"/>
+              </a:rPr>
+              <a:t>Dual ratings</a:t>
+            </a:r>
+            <a:r>
+              <a:rPr lang="en-US" sz="1200" b="0" i="0" kern="1200" dirty="0">
+                <a:solidFill>
+                  <a:schemeClr val="tx1"/>
+                </a:solidFill>
+                <a:effectLst/>
+                <a:latin typeface="+mn-lt"/>
+                <a:ea typeface="+mn-ea"/>
+                <a:cs typeface="+mn-cs"/>
+              </a:rPr>
+              <a:t> — every learner rated, every problem rated.</a:t>
+            </a:r>
+          </a:p>
+          <a:p>
+            <a:r>
+              <a:rPr lang="en-US" sz="1200" b="1" i="0" kern="1200" dirty="0">
+                <a:solidFill>
+                  <a:schemeClr val="tx1"/>
+                </a:solidFill>
+                <a:effectLst/>
+                <a:latin typeface="+mn-lt"/>
+                <a:ea typeface="+mn-ea"/>
+                <a:cs typeface="+mn-cs"/>
+              </a:rPr>
+              <a:t>Dynamic K ∈ [10, 40]</a:t>
+            </a:r>
+            <a:r>
+              <a:rPr lang="en-US" sz="1200" b="0" i="0" kern="1200" dirty="0">
+                <a:solidFill>
+                  <a:schemeClr val="tx1"/>
+                </a:solidFill>
+                <a:effectLst/>
+                <a:latin typeface="+mn-lt"/>
+                <a:ea typeface="+mn-ea"/>
+                <a:cs typeface="+mn-cs"/>
+              </a:rPr>
+              <a:t> — bigger K when struggling, smaller when steady.</a:t>
+            </a:r>
+          </a:p>
+          <a:p>
+            <a:r>
+              <a:rPr lang="en-US" sz="1200" b="1" i="0" kern="1200" dirty="0">
+                <a:solidFill>
+                  <a:schemeClr val="tx1"/>
+                </a:solidFill>
+                <a:effectLst/>
+                <a:latin typeface="+mn-lt"/>
+                <a:ea typeface="+mn-ea"/>
+                <a:cs typeface="+mn-cs"/>
+              </a:rPr>
+              <a:t>ZPD filter δ ∈ [50, 250]</a:t>
+            </a:r>
+            <a:r>
+              <a:rPr lang="en-US" sz="1200" b="0" i="0" kern="1200" dirty="0">
+                <a:solidFill>
+                  <a:schemeClr val="tx1"/>
+                </a:solidFill>
+                <a:effectLst/>
+                <a:latin typeface="+mn-lt"/>
+                <a:ea typeface="+mn-ea"/>
+                <a:cs typeface="+mn-cs"/>
+              </a:rPr>
+              <a:t> rating points → ≈ </a:t>
+            </a:r>
+            <a:r>
+              <a:rPr lang="en-US" sz="1200" b="1" i="0" kern="1200" dirty="0">
+                <a:solidFill>
+                  <a:schemeClr val="tx1"/>
+                </a:solidFill>
+                <a:effectLst/>
+                <a:latin typeface="+mn-lt"/>
+                <a:ea typeface="+mn-ea"/>
+                <a:cs typeface="+mn-cs"/>
+              </a:rPr>
+              <a:t>36–64% predicted success</a:t>
+            </a:r>
+            <a:r>
+              <a:rPr lang="en-US" sz="1200" b="0" i="0" kern="1200" dirty="0">
+                <a:solidFill>
+                  <a:schemeClr val="tx1"/>
+                </a:solidFill>
+                <a:effectLst/>
+                <a:latin typeface="+mn-lt"/>
+                <a:ea typeface="+mn-ea"/>
+                <a:cs typeface="+mn-cs"/>
+              </a:rPr>
+              <a:t> ("hard, but not too hard" — Bjork's desirable difficulty).</a:t>
+            </a:r>
+          </a:p>
+          <a:p>
+            <a:r>
+              <a:rPr lang="en-US" sz="1200" b="0" i="0" kern="1200" dirty="0">
+                <a:solidFill>
+                  <a:schemeClr val="tx1"/>
+                </a:solidFill>
+                <a:effectLst/>
+                <a:latin typeface="+mn-lt"/>
+                <a:ea typeface="+mn-ea"/>
+                <a:cs typeface="+mn-cs"/>
+              </a:rPr>
+              <a:t>Output: candidate pool that L3 picks from.</a:t>
+            </a:r>
+          </a:p>
+          <a:p>
+            <a:endParaRPr lang="en-US" sz="1200" b="0" i="0" kern="1200" dirty="0">
+              <a:solidFill>
+                <a:schemeClr val="tx1"/>
+              </a:solidFill>
+              <a:effectLst/>
+              <a:latin typeface="+mn-lt"/>
+              <a:ea typeface="+mn-ea"/>
+              <a:cs typeface="+mn-cs"/>
+            </a:endParaRPr>
+          </a:p>
+          <a:p>
+            <a:endParaRPr lang="en-US" sz="1200" b="0" i="0" kern="1200" dirty="0">
+              <a:solidFill>
+                <a:schemeClr val="tx1"/>
+              </a:solidFill>
+              <a:effectLst/>
+              <a:latin typeface="+mn-lt"/>
+              <a:ea typeface="+mn-ea"/>
+              <a:cs typeface="+mn-cs"/>
+            </a:endParaRPr>
+          </a:p>
+          <a:p>
+            <a:r>
+              <a:rPr lang="en-US" sz="1200" b="0" i="0" kern="1200" dirty="0">
+                <a:solidFill>
+                  <a:schemeClr val="tx1"/>
+                </a:solidFill>
+                <a:effectLst/>
+                <a:latin typeface="+mn-lt"/>
+                <a:ea typeface="+mn-ea"/>
+                <a:cs typeface="+mn-cs"/>
+              </a:rPr>
+              <a:t>Stress "dual" and "dynamic". Slow on the </a:t>
+            </a:r>
+            <a:r>
+              <a:rPr lang="en-US" sz="1200" b="1" i="0" kern="1200" dirty="0">
+                <a:solidFill>
+                  <a:schemeClr val="tx1"/>
+                </a:solidFill>
+                <a:effectLst/>
+                <a:latin typeface="+mn-lt"/>
+                <a:ea typeface="+mn-ea"/>
+                <a:cs typeface="+mn-cs"/>
+              </a:rPr>
+              <a:t>36–64%</a:t>
+            </a:r>
+            <a:r>
+              <a:rPr lang="en-US" sz="1200" b="0" i="0" kern="1200" dirty="0">
+                <a:solidFill>
+                  <a:schemeClr val="tx1"/>
+                </a:solidFill>
+                <a:effectLst/>
+                <a:latin typeface="+mn-lt"/>
+                <a:ea typeface="+mn-ea"/>
+                <a:cs typeface="+mn-cs"/>
+              </a:rPr>
+              <a:t> number.</a:t>
+            </a:r>
+          </a:p>
+          <a:p>
+            <a:r>
+              <a:rPr lang="en-US" dirty="0"/>
+              <a:t>																															</a:t>
+            </a:r>
+          </a:p>
+        </p:txBody>
+      </p:sp>
+      <p:sp>
+        <p:nvSpPr>
+          <p:cNvPr id="4" name="Slide Number Placeholder 3"/>
+          <p:cNvSpPr>
+            <a:spLocks noGrp="1"/>
+          </p:cNvSpPr>
+          <p:nvPr>
+            <p:ph type="sldNum" sz="quarter" idx="5"/>
+          </p:nvPr>
+        </p:nvSpPr>
+        <p:spPr/>
+        <p:txBody>
+          <a:bodyPr/>
+          <a:lstStyle/>
+          <a:p>
+            <a:fld id="{5F54E561-7F9C-441E-AFBA-1F000FF79D64}" type="slidenum">
+              <a:rPr lang="en-US" smtClean="0"/>
+              <a:t>6</a:t>
+            </a:fld>
+            <a:endParaRPr lang="en-US"/>
+          </a:p>
+        </p:txBody>
+      </p:sp>
+    </p:spTree>
+    <p:extLst>
+      <p:ext uri="{BB962C8B-B14F-4D97-AF65-F5344CB8AC3E}">
+        <p14:creationId xmlns:p14="http://schemas.microsoft.com/office/powerpoint/2010/main" val="3425788311"/>
+      </p:ext>
+    </p:extLst>
+  </p:cSld>
+  <p:clrMapOvr>
+    <a:masterClrMapping/>
+  </p:clrMapOvr>
+</p:notes>
+</file>
+
+<file path=ppt/notesSlides/notesSlide7.xml><?xml version="1.0" encoding="utf-8"?>
+<p:notes xmlns:a="http://schemas.openxmlformats.org/drawingml/2006/main" xmlns:r="http://schemas.openxmlformats.org/officeDocument/2006/relationships" xmlns:p="http://schemas.openxmlformats.org/presentationml/2006/main">
+  <p:cSld>
+    <p:spTree>
+      <p:nvGrpSpPr>
+        <p:cNvPr id="1" name=""/>
+        <p:cNvGrpSpPr/>
+        <p:nvPr/>
+      </p:nvGrpSpPr>
+      <p:grpSpPr>
+        <a:xfrm>
+          <a:off x="0" y="0"/>
+          <a:ext cx="0" cy="0"/>
+          <a:chOff x="0" y="0"/>
+          <a:chExt cx="0" cy="0"/>
+        </a:xfrm>
+      </p:grpSpPr>
+      <p:sp>
+        <p:nvSpPr>
+          <p:cNvPr id="2" name="Slide Image Placeholder 1"/>
+          <p:cNvSpPr>
+            <a:spLocks noGrp="1" noRot="1" noChangeAspect="1"/>
+          </p:cNvSpPr>
+          <p:nvPr>
+            <p:ph type="sldImg"/>
+          </p:nvPr>
+        </p:nvSpPr>
+        <p:spPr/>
+      </p:sp>
+      <p:sp>
+        <p:nvSpPr>
+          <p:cNvPr id="3" name="Notes Placeholder 2"/>
+          <p:cNvSpPr>
+            <a:spLocks noGrp="1"/>
+          </p:cNvSpPr>
+          <p:nvPr>
+            <p:ph type="body" idx="1"/>
+          </p:nvPr>
+        </p:nvSpPr>
+        <p:spPr/>
+        <p:txBody>
+          <a:bodyPr/>
+          <a:lstStyle/>
+          <a:p>
+            <a:r>
+              <a:rPr lang="en-US" sz="1200" b="1" i="0" kern="1200" dirty="0">
+                <a:solidFill>
+                  <a:schemeClr val="tx1"/>
+                </a:solidFill>
+                <a:effectLst/>
+                <a:latin typeface="+mn-lt"/>
+                <a:ea typeface="+mn-ea"/>
+                <a:cs typeface="+mn-cs"/>
+              </a:rPr>
+              <a:t>Two-level Thompson Sampling</a:t>
+            </a:r>
+            <a:r>
+              <a:rPr lang="en-US" sz="1200" b="0" i="0" kern="1200" dirty="0">
+                <a:solidFill>
+                  <a:schemeClr val="tx1"/>
+                </a:solidFill>
+                <a:effectLst/>
+                <a:latin typeface="+mn-lt"/>
+                <a:ea typeface="+mn-ea"/>
+                <a:cs typeface="+mn-cs"/>
+              </a:rPr>
+              <a:t> — outer arm = concept, inner arm = problem.</a:t>
+            </a:r>
+          </a:p>
+          <a:p>
+            <a:r>
+              <a:rPr lang="en-US" sz="1200" b="0" i="0" kern="1200" dirty="0">
+                <a:solidFill>
+                  <a:schemeClr val="tx1"/>
+                </a:solidFill>
+                <a:effectLst/>
+                <a:latin typeface="+mn-lt"/>
+                <a:ea typeface="+mn-ea"/>
+                <a:cs typeface="+mn-cs"/>
+              </a:rPr>
+              <a:t>Each arm: </a:t>
+            </a:r>
+            <a:r>
+              <a:rPr lang="en-US" sz="1200" b="1" i="0" kern="1200" dirty="0">
+                <a:solidFill>
+                  <a:schemeClr val="tx1"/>
+                </a:solidFill>
+                <a:effectLst/>
+                <a:latin typeface="+mn-lt"/>
+                <a:ea typeface="+mn-ea"/>
+                <a:cs typeface="+mn-cs"/>
+              </a:rPr>
+              <a:t>Beta(</a:t>
+            </a:r>
+            <a:r>
+              <a:rPr lang="el-GR" sz="1200" b="1" i="0" kern="1200" dirty="0">
+                <a:solidFill>
+                  <a:schemeClr val="tx1"/>
+                </a:solidFill>
+                <a:effectLst/>
+                <a:latin typeface="+mn-lt"/>
+                <a:ea typeface="+mn-ea"/>
+                <a:cs typeface="+mn-cs"/>
+              </a:rPr>
+              <a:t>α, β)</a:t>
+            </a:r>
+            <a:r>
+              <a:rPr lang="el-GR" sz="1200" b="0" i="0" kern="1200" dirty="0">
+                <a:solidFill>
+                  <a:schemeClr val="tx1"/>
+                </a:solidFill>
+                <a:effectLst/>
+                <a:latin typeface="+mn-lt"/>
+                <a:ea typeface="+mn-ea"/>
+                <a:cs typeface="+mn-cs"/>
+              </a:rPr>
+              <a:t> </a:t>
+            </a:r>
+            <a:r>
+              <a:rPr lang="en-US" sz="1200" b="0" i="0" kern="1200" dirty="0">
+                <a:solidFill>
+                  <a:schemeClr val="tx1"/>
+                </a:solidFill>
+                <a:effectLst/>
+                <a:latin typeface="+mn-lt"/>
+                <a:ea typeface="+mn-ea"/>
+                <a:cs typeface="+mn-cs"/>
+              </a:rPr>
+              <a:t>posterior.</a:t>
+            </a:r>
+          </a:p>
+          <a:p>
+            <a:r>
+              <a:rPr lang="en-US" sz="1200" b="1" i="0" kern="1200" dirty="0">
+                <a:solidFill>
+                  <a:schemeClr val="tx1"/>
+                </a:solidFill>
+                <a:effectLst/>
+                <a:latin typeface="+mn-lt"/>
+                <a:ea typeface="+mn-ea"/>
+                <a:cs typeface="+mn-cs"/>
+              </a:rPr>
+              <a:t>Prerequisite gate</a:t>
+            </a:r>
+            <a:r>
+              <a:rPr lang="en-US" sz="1200" b="0" i="0" kern="1200" dirty="0">
+                <a:solidFill>
+                  <a:schemeClr val="tx1"/>
+                </a:solidFill>
+                <a:effectLst/>
+                <a:latin typeface="+mn-lt"/>
+                <a:ea typeface="+mn-ea"/>
+                <a:cs typeface="+mn-cs"/>
+              </a:rPr>
+              <a:t> — concept becomes an arm </a:t>
+            </a:r>
+            <a:r>
+              <a:rPr lang="en-US" sz="1200" b="0" i="1" kern="1200" dirty="0">
+                <a:solidFill>
+                  <a:schemeClr val="tx1"/>
+                </a:solidFill>
+                <a:effectLst/>
+                <a:latin typeface="+mn-lt"/>
+                <a:ea typeface="+mn-ea"/>
+                <a:cs typeface="+mn-cs"/>
+              </a:rPr>
+              <a:t>only if every prerequisite has BKT mastery ≥ </a:t>
+            </a:r>
+            <a:r>
+              <a:rPr lang="el-GR" sz="1200" b="0" i="1" kern="1200" dirty="0">
+                <a:solidFill>
+                  <a:schemeClr val="tx1"/>
+                </a:solidFill>
+                <a:effectLst/>
+                <a:latin typeface="+mn-lt"/>
+                <a:ea typeface="+mn-ea"/>
+                <a:cs typeface="+mn-cs"/>
+              </a:rPr>
+              <a:t>θ</a:t>
+            </a:r>
+            <a:r>
+              <a:rPr lang="en-US" sz="1200" b="0" i="1" kern="1200" dirty="0">
+                <a:solidFill>
+                  <a:schemeClr val="tx1"/>
+                </a:solidFill>
+                <a:effectLst/>
+                <a:latin typeface="+mn-lt"/>
+                <a:ea typeface="+mn-ea"/>
+                <a:cs typeface="+mn-cs"/>
+              </a:rPr>
+              <a:t>ₘ</a:t>
+            </a:r>
+            <a:r>
+              <a:rPr lang="en-US" sz="1200" b="0" i="0" kern="1200" dirty="0">
+                <a:solidFill>
+                  <a:schemeClr val="tx1"/>
+                </a:solidFill>
+                <a:effectLst/>
+                <a:latin typeface="+mn-lt"/>
+                <a:ea typeface="+mn-ea"/>
+                <a:cs typeface="+mn-cs"/>
+              </a:rPr>
+              <a:t>. Inner level filtered by ZPD.</a:t>
+            </a:r>
+          </a:p>
+          <a:p>
+            <a:r>
+              <a:rPr lang="en-US" sz="1200" b="0" i="0" kern="1200" dirty="0">
+                <a:solidFill>
+                  <a:schemeClr val="tx1"/>
+                </a:solidFill>
+                <a:effectLst/>
+                <a:latin typeface="+mn-lt"/>
+                <a:ea typeface="+mn-ea"/>
+                <a:cs typeface="+mn-cs"/>
+              </a:rPr>
+              <a:t>Reward ∈ [0, 1] = weighted combo of BKT learning gain + correctness + solve-time efficiency. Weights are </a:t>
+            </a:r>
+            <a:r>
+              <a:rPr lang="en-US" sz="1200" b="1" i="0" kern="1200" dirty="0">
+                <a:solidFill>
+                  <a:schemeClr val="tx1"/>
+                </a:solidFill>
+                <a:effectLst/>
+                <a:latin typeface="+mn-lt"/>
+                <a:ea typeface="+mn-ea"/>
+                <a:cs typeface="+mn-cs"/>
+              </a:rPr>
+              <a:t>heuristic</a:t>
+            </a:r>
+            <a:r>
+              <a:rPr lang="en-US" sz="1200" b="0" i="0" kern="1200" dirty="0">
+                <a:solidFill>
+                  <a:schemeClr val="tx1"/>
+                </a:solidFill>
+                <a:effectLst/>
+                <a:latin typeface="+mn-lt"/>
+                <a:ea typeface="+mn-ea"/>
+                <a:cs typeface="+mn-cs"/>
+              </a:rPr>
+              <a:t> — re-estimation from pilot traces is named future work.</a:t>
+            </a:r>
+          </a:p>
+          <a:p>
+            <a:endParaRPr lang="en-US" sz="1200" b="0" i="0" kern="1200" dirty="0">
+              <a:solidFill>
+                <a:schemeClr val="tx1"/>
+              </a:solidFill>
+              <a:effectLst/>
+              <a:latin typeface="+mn-lt"/>
+              <a:ea typeface="+mn-ea"/>
+              <a:cs typeface="+mn-cs"/>
+            </a:endParaRPr>
+          </a:p>
+          <a:p>
+            <a:endParaRPr lang="en-US" sz="1200" b="0" i="0" kern="1200" dirty="0">
+              <a:solidFill>
+                <a:schemeClr val="tx1"/>
+              </a:solidFill>
+              <a:effectLst/>
+              <a:latin typeface="+mn-lt"/>
+              <a:ea typeface="+mn-ea"/>
+              <a:cs typeface="+mn-cs"/>
+            </a:endParaRPr>
+          </a:p>
+          <a:p>
+            <a:r>
+              <a:rPr lang="en-US" sz="1200" b="0" i="0" kern="1200" dirty="0">
+                <a:solidFill>
+                  <a:schemeClr val="tx1"/>
+                </a:solidFill>
+                <a:effectLst/>
+                <a:latin typeface="+mn-lt"/>
+                <a:ea typeface="+mn-ea"/>
+                <a:cs typeface="+mn-cs"/>
+              </a:rPr>
+              <a:t>Densest slide. Hand-mime the two-level structure if helpful.</a:t>
+            </a:r>
+          </a:p>
+          <a:p>
+            <a:endParaRPr lang="en-US" dirty="0"/>
+          </a:p>
+        </p:txBody>
+      </p:sp>
+      <p:sp>
+        <p:nvSpPr>
+          <p:cNvPr id="4" name="Slide Number Placeholder 3"/>
+          <p:cNvSpPr>
+            <a:spLocks noGrp="1"/>
+          </p:cNvSpPr>
+          <p:nvPr>
+            <p:ph type="sldNum" sz="quarter" idx="5"/>
+          </p:nvPr>
+        </p:nvSpPr>
+        <p:spPr/>
+        <p:txBody>
+          <a:bodyPr/>
+          <a:lstStyle/>
+          <a:p>
+            <a:fld id="{5F54E561-7F9C-441E-AFBA-1F000FF79D64}" type="slidenum">
+              <a:rPr lang="en-US" smtClean="0"/>
+              <a:t>7</a:t>
+            </a:fld>
+            <a:endParaRPr lang="en-US"/>
+          </a:p>
+        </p:txBody>
+      </p:sp>
+    </p:spTree>
+    <p:extLst>
+      <p:ext uri="{BB962C8B-B14F-4D97-AF65-F5344CB8AC3E}">
+        <p14:creationId xmlns:p14="http://schemas.microsoft.com/office/powerpoint/2010/main" val="4058150426"/>
+      </p:ext>
+    </p:extLst>
+  </p:cSld>
+  <p:clrMapOvr>
+    <a:masterClrMapping/>
+  </p:clrMapOvr>
+</p:notes>
+</file>
+
+<file path=ppt/notesSlides/notesSlide8.xml><?xml version="1.0" encoding="utf-8"?>
+<p:notes xmlns:a="http://schemas.openxmlformats.org/drawingml/2006/main" xmlns:r="http://schemas.openxmlformats.org/officeDocument/2006/relationships" xmlns:p="http://schemas.openxmlformats.org/presentationml/2006/main">
+  <p:cSld>
+    <p:spTree>
+      <p:nvGrpSpPr>
+        <p:cNvPr id="1" name=""/>
+        <p:cNvGrpSpPr/>
+        <p:nvPr/>
+      </p:nvGrpSpPr>
+      <p:grpSpPr>
+        <a:xfrm>
+          <a:off x="0" y="0"/>
+          <a:ext cx="0" cy="0"/>
+          <a:chOff x="0" y="0"/>
+          <a:chExt cx="0" cy="0"/>
+        </a:xfrm>
+      </p:grpSpPr>
+      <p:sp>
+        <p:nvSpPr>
+          <p:cNvPr id="2" name="Slide Image Placeholder 1"/>
+          <p:cNvSpPr>
+            <a:spLocks noGrp="1" noRot="1" noChangeAspect="1"/>
+          </p:cNvSpPr>
+          <p:nvPr>
+            <p:ph type="sldImg"/>
+          </p:nvPr>
+        </p:nvSpPr>
+        <p:spPr/>
+      </p:sp>
+      <p:sp>
+        <p:nvSpPr>
+          <p:cNvPr id="3" name="Notes Placeholder 2"/>
+          <p:cNvSpPr>
+            <a:spLocks noGrp="1"/>
+          </p:cNvSpPr>
+          <p:nvPr>
+            <p:ph type="body" idx="1"/>
+          </p:nvPr>
+        </p:nvSpPr>
+        <p:spPr/>
+        <p:txBody>
+          <a:bodyPr/>
+          <a:lstStyle/>
+          <a:p>
+            <a:r>
+              <a:rPr lang="en-US" sz="1200" b="1" i="0" kern="1200" dirty="0">
+                <a:solidFill>
+                  <a:schemeClr val="tx1"/>
+                </a:solidFill>
+                <a:effectLst/>
+                <a:latin typeface="+mn-lt"/>
+                <a:ea typeface="+mn-ea"/>
+                <a:cs typeface="+mn-cs"/>
+              </a:rPr>
+              <a:t>Most original single idea</a:t>
+            </a:r>
+            <a:r>
+              <a:rPr lang="en-US" sz="1200" b="0" i="0" kern="1200" dirty="0">
+                <a:solidFill>
+                  <a:schemeClr val="tx1"/>
+                </a:solidFill>
+                <a:effectLst/>
+                <a:latin typeface="+mn-lt"/>
+                <a:ea typeface="+mn-ea"/>
+                <a:cs typeface="+mn-cs"/>
+              </a:rPr>
+              <a:t> — first application of </a:t>
+            </a:r>
+            <a:r>
+              <a:rPr lang="en-US" sz="1200" b="1" i="0" kern="1200" dirty="0">
+                <a:solidFill>
+                  <a:schemeClr val="tx1"/>
+                </a:solidFill>
+                <a:effectLst/>
+                <a:latin typeface="+mn-lt"/>
+                <a:ea typeface="+mn-ea"/>
+                <a:cs typeface="+mn-cs"/>
+              </a:rPr>
+              <a:t>FSRS to programming retention</a:t>
+            </a:r>
+            <a:r>
+              <a:rPr lang="en-US" sz="1200" b="0" i="0" kern="1200" dirty="0">
+                <a:solidFill>
+                  <a:schemeClr val="tx1"/>
+                </a:solidFill>
+                <a:effectLst/>
+                <a:latin typeface="+mn-lt"/>
+                <a:ea typeface="+mn-ea"/>
+                <a:cs typeface="+mn-cs"/>
+              </a:rPr>
+              <a:t>.</a:t>
+            </a:r>
+          </a:p>
+          <a:p>
+            <a:r>
+              <a:rPr lang="en-US" sz="1200" b="0" i="0" kern="1200" dirty="0">
+                <a:solidFill>
+                  <a:schemeClr val="tx1"/>
+                </a:solidFill>
+                <a:effectLst/>
+                <a:latin typeface="+mn-lt"/>
+                <a:ea typeface="+mn-ea"/>
+                <a:cs typeface="+mn-cs"/>
+              </a:rPr>
+              <a:t>FSRS designed for flashcards (single signal, 4-level recall: Again/Hard/Good/Easy).</a:t>
+            </a:r>
+          </a:p>
+          <a:p>
+            <a:r>
+              <a:rPr lang="en-US" sz="1200" b="0" i="0" kern="1200" dirty="0">
+                <a:solidFill>
+                  <a:schemeClr val="tx1"/>
+                </a:solidFill>
+                <a:effectLst/>
+                <a:latin typeface="+mn-lt"/>
+                <a:ea typeface="+mn-ea"/>
+                <a:cs typeface="+mn-cs"/>
+              </a:rPr>
+              <a:t>Code submission has </a:t>
+            </a:r>
+            <a:r>
+              <a:rPr lang="en-US" sz="1200" b="1" i="0" kern="1200" dirty="0">
+                <a:solidFill>
+                  <a:schemeClr val="tx1"/>
+                </a:solidFill>
+                <a:effectLst/>
+                <a:latin typeface="+mn-lt"/>
+                <a:ea typeface="+mn-ea"/>
+                <a:cs typeface="+mn-cs"/>
+              </a:rPr>
+              <a:t>richer signal</a:t>
+            </a:r>
+            <a:r>
+              <a:rPr lang="en-US" sz="1200" b="0" i="0" kern="1200" dirty="0">
+                <a:solidFill>
+                  <a:schemeClr val="tx1"/>
+                </a:solidFill>
+                <a:effectLst/>
+                <a:latin typeface="+mn-lt"/>
+                <a:ea typeface="+mn-ea"/>
+                <a:cs typeface="+mn-cs"/>
+              </a:rPr>
+              <a:t> — correctness + attempts + time.</a:t>
+            </a:r>
+          </a:p>
+          <a:p>
+            <a:r>
+              <a:rPr lang="en-US" sz="1200" b="0" i="0" kern="1200" dirty="0">
+                <a:solidFill>
+                  <a:schemeClr val="tx1"/>
+                </a:solidFill>
+                <a:effectLst/>
+                <a:latin typeface="+mn-lt"/>
+                <a:ea typeface="+mn-ea"/>
+                <a:cs typeface="+mn-cs"/>
+              </a:rPr>
+              <a:t>Mapping (right side):</a:t>
+            </a:r>
+          </a:p>
+          <a:p>
+            <a:pPr lvl="1"/>
+            <a:r>
+              <a:rPr lang="en-US" sz="1200" b="0" i="0" kern="1200" dirty="0">
+                <a:solidFill>
+                  <a:schemeClr val="tx1"/>
+                </a:solidFill>
+                <a:effectLst/>
+                <a:latin typeface="+mn-lt"/>
+                <a:ea typeface="+mn-ea"/>
+                <a:cs typeface="+mn-cs"/>
+              </a:rPr>
+              <a:t>wrong → </a:t>
+            </a:r>
+            <a:r>
+              <a:rPr lang="en-US" sz="1200" b="1" i="0" kern="1200" dirty="0">
+                <a:solidFill>
+                  <a:schemeClr val="tx1"/>
+                </a:solidFill>
+                <a:effectLst/>
+                <a:latin typeface="+mn-lt"/>
+                <a:ea typeface="+mn-ea"/>
+                <a:cs typeface="+mn-cs"/>
+              </a:rPr>
+              <a:t>Again</a:t>
+            </a:r>
+            <a:endParaRPr lang="en-US" sz="1200" b="0" i="0" kern="1200" dirty="0">
+              <a:solidFill>
+                <a:schemeClr val="tx1"/>
+              </a:solidFill>
+              <a:effectLst/>
+              <a:latin typeface="+mn-lt"/>
+              <a:ea typeface="+mn-ea"/>
+              <a:cs typeface="+mn-cs"/>
+            </a:endParaRPr>
+          </a:p>
+          <a:p>
+            <a:pPr lvl="1"/>
+            <a:r>
+              <a:rPr lang="en-US" sz="1200" b="0" i="0" kern="1200" dirty="0">
+                <a:solidFill>
+                  <a:schemeClr val="tx1"/>
+                </a:solidFill>
+                <a:effectLst/>
+                <a:latin typeface="+mn-lt"/>
+                <a:ea typeface="+mn-ea"/>
+                <a:cs typeface="+mn-cs"/>
+              </a:rPr>
+              <a:t>correct, 1st attempt, &lt; 2 min → </a:t>
+            </a:r>
+            <a:r>
+              <a:rPr lang="en-US" sz="1200" b="1" i="0" kern="1200" dirty="0">
+                <a:solidFill>
+                  <a:schemeClr val="tx1"/>
+                </a:solidFill>
+                <a:effectLst/>
+                <a:latin typeface="+mn-lt"/>
+                <a:ea typeface="+mn-ea"/>
+                <a:cs typeface="+mn-cs"/>
+              </a:rPr>
+              <a:t>Easy</a:t>
+            </a:r>
+            <a:endParaRPr lang="en-US" sz="1200" b="0" i="0" kern="1200" dirty="0">
+              <a:solidFill>
+                <a:schemeClr val="tx1"/>
+              </a:solidFill>
+              <a:effectLst/>
+              <a:latin typeface="+mn-lt"/>
+              <a:ea typeface="+mn-ea"/>
+              <a:cs typeface="+mn-cs"/>
+            </a:endParaRPr>
+          </a:p>
+          <a:p>
+            <a:pPr lvl="1"/>
+            <a:r>
+              <a:rPr lang="en-US" sz="1200" b="0" i="0" kern="1200" dirty="0">
+                <a:solidFill>
+                  <a:schemeClr val="tx1"/>
+                </a:solidFill>
+                <a:effectLst/>
+                <a:latin typeface="+mn-lt"/>
+                <a:ea typeface="+mn-ea"/>
+                <a:cs typeface="+mn-cs"/>
+              </a:rPr>
+              <a:t>2–5 min → </a:t>
+            </a:r>
+            <a:r>
+              <a:rPr lang="en-US" sz="1200" b="1" i="0" kern="1200" dirty="0">
+                <a:solidFill>
+                  <a:schemeClr val="tx1"/>
+                </a:solidFill>
+                <a:effectLst/>
+                <a:latin typeface="+mn-lt"/>
+                <a:ea typeface="+mn-ea"/>
+                <a:cs typeface="+mn-cs"/>
+              </a:rPr>
+              <a:t>Good</a:t>
+            </a:r>
+            <a:r>
+              <a:rPr lang="en-US" sz="1200" b="0" i="0" kern="1200" dirty="0">
+                <a:solidFill>
+                  <a:schemeClr val="tx1"/>
+                </a:solidFill>
+                <a:effectLst/>
+                <a:latin typeface="+mn-lt"/>
+                <a:ea typeface="+mn-ea"/>
+                <a:cs typeface="+mn-cs"/>
+              </a:rPr>
+              <a:t>; &gt; 5 min → </a:t>
+            </a:r>
+            <a:r>
+              <a:rPr lang="en-US" sz="1200" b="1" i="0" kern="1200" dirty="0">
+                <a:solidFill>
+                  <a:schemeClr val="tx1"/>
+                </a:solidFill>
+                <a:effectLst/>
+                <a:latin typeface="+mn-lt"/>
+                <a:ea typeface="+mn-ea"/>
+                <a:cs typeface="+mn-cs"/>
+              </a:rPr>
+              <a:t>Hard</a:t>
+            </a:r>
+            <a:r>
+              <a:rPr lang="en-US" sz="1200" b="0" i="0" kern="1200" dirty="0">
+                <a:solidFill>
+                  <a:schemeClr val="tx1"/>
+                </a:solidFill>
+                <a:effectLst/>
+                <a:latin typeface="+mn-lt"/>
+                <a:ea typeface="+mn-ea"/>
+                <a:cs typeface="+mn-cs"/>
+              </a:rPr>
+              <a:t>; &gt; 1 attempt → </a:t>
+            </a:r>
+            <a:r>
+              <a:rPr lang="en-US" sz="1200" b="1" i="0" kern="1200" dirty="0">
+                <a:solidFill>
+                  <a:schemeClr val="tx1"/>
+                </a:solidFill>
+                <a:effectLst/>
+                <a:latin typeface="+mn-lt"/>
+                <a:ea typeface="+mn-ea"/>
+                <a:cs typeface="+mn-cs"/>
+              </a:rPr>
+              <a:t>Hard</a:t>
+            </a:r>
+            <a:endParaRPr lang="en-US" sz="1200" b="0" i="0" kern="1200" dirty="0">
+              <a:solidFill>
+                <a:schemeClr val="tx1"/>
+              </a:solidFill>
+              <a:effectLst/>
+              <a:latin typeface="+mn-lt"/>
+              <a:ea typeface="+mn-ea"/>
+              <a:cs typeface="+mn-cs"/>
+            </a:endParaRPr>
+          </a:p>
+          <a:p>
+            <a:r>
+              <a:rPr lang="en-US" sz="1200" b="0" i="0" kern="1200" dirty="0">
+                <a:solidFill>
+                  <a:schemeClr val="tx1"/>
+                </a:solidFill>
+                <a:effectLst/>
+                <a:latin typeface="+mn-lt"/>
+                <a:ea typeface="+mn-ea"/>
+                <a:cs typeface="+mn-cs"/>
+              </a:rPr>
+              <a:t>Review fires when </a:t>
+            </a:r>
+            <a:r>
+              <a:rPr lang="en-US" sz="1200" b="1" i="0" kern="1200" dirty="0">
+                <a:solidFill>
+                  <a:schemeClr val="tx1"/>
+                </a:solidFill>
+                <a:effectLst/>
+                <a:latin typeface="+mn-lt"/>
+                <a:ea typeface="+mn-ea"/>
+                <a:cs typeface="+mn-cs"/>
+              </a:rPr>
+              <a:t>retrievability R(t) &lt; 0.9</a:t>
+            </a:r>
+            <a:r>
+              <a:rPr lang="en-US" sz="1200" b="0" i="0" kern="1200" dirty="0">
+                <a:solidFill>
+                  <a:schemeClr val="tx1"/>
+                </a:solidFill>
+                <a:effectLst/>
+                <a:latin typeface="+mn-lt"/>
+                <a:ea typeface="+mn-ea"/>
+                <a:cs typeface="+mn-cs"/>
+              </a:rPr>
+              <a:t>.</a:t>
+            </a:r>
+          </a:p>
+          <a:p>
+            <a:endParaRPr lang="en-US" sz="1200" b="0" i="0" kern="1200" dirty="0">
+              <a:solidFill>
+                <a:schemeClr val="tx1"/>
+              </a:solidFill>
+              <a:effectLst/>
+              <a:latin typeface="+mn-lt"/>
+              <a:ea typeface="+mn-ea"/>
+              <a:cs typeface="+mn-cs"/>
+            </a:endParaRPr>
+          </a:p>
+          <a:p>
+            <a:endParaRPr lang="en-US" sz="1200" b="0" i="0" kern="1200" dirty="0">
+              <a:solidFill>
+                <a:schemeClr val="tx1"/>
+              </a:solidFill>
+              <a:effectLst/>
+              <a:latin typeface="+mn-lt"/>
+              <a:ea typeface="+mn-ea"/>
+              <a:cs typeface="+mn-cs"/>
+            </a:endParaRPr>
+          </a:p>
+          <a:p>
+            <a:r>
+              <a:rPr lang="en-US" sz="1200" b="0" i="0" kern="1200" dirty="0">
+                <a:solidFill>
+                  <a:schemeClr val="tx1"/>
+                </a:solidFill>
+                <a:effectLst/>
+                <a:latin typeface="+mn-lt"/>
+                <a:ea typeface="+mn-ea"/>
+                <a:cs typeface="+mn-cs"/>
+              </a:rPr>
+              <a:t>Quotable slide. Deliver slowly. Point at code as you read each branch.</a:t>
+            </a:r>
+          </a:p>
+          <a:p>
+            <a:endParaRPr lang="en-US" dirty="0"/>
+          </a:p>
+        </p:txBody>
+      </p:sp>
+      <p:sp>
+        <p:nvSpPr>
+          <p:cNvPr id="4" name="Slide Number Placeholder 3"/>
+          <p:cNvSpPr>
+            <a:spLocks noGrp="1"/>
+          </p:cNvSpPr>
+          <p:nvPr>
+            <p:ph type="sldNum" sz="quarter" idx="5"/>
+          </p:nvPr>
+        </p:nvSpPr>
+        <p:spPr/>
+        <p:txBody>
+          <a:bodyPr/>
+          <a:lstStyle/>
+          <a:p>
+            <a:fld id="{5F54E561-7F9C-441E-AFBA-1F000FF79D64}" type="slidenum">
+              <a:rPr lang="en-US" smtClean="0"/>
+              <a:t>8</a:t>
+            </a:fld>
+            <a:endParaRPr lang="en-US"/>
+          </a:p>
+        </p:txBody>
+      </p:sp>
+    </p:spTree>
+    <p:extLst>
+      <p:ext uri="{BB962C8B-B14F-4D97-AF65-F5344CB8AC3E}">
+        <p14:creationId xmlns:p14="http://schemas.microsoft.com/office/powerpoint/2010/main" val="4090277759"/>
+      </p:ext>
+    </p:extLst>
+  </p:cSld>
+  <p:clrMapOvr>
+    <a:masterClrMapping/>
+  </p:clrMapOvr>
+</p:notes>
+</file>
+
+<file path=ppt/notesSlides/notesSlide9.xml><?xml version="1.0" encoding="utf-8"?>
+<p:notes xmlns:a="http://schemas.openxmlformats.org/drawingml/2006/main" xmlns:r="http://schemas.openxmlformats.org/officeDocument/2006/relationships" xmlns:p="http://schemas.openxmlformats.org/presentationml/2006/main">
+  <p:cSld>
+    <p:spTree>
+      <p:nvGrpSpPr>
+        <p:cNvPr id="1" name=""/>
+        <p:cNvGrpSpPr/>
+        <p:nvPr/>
+      </p:nvGrpSpPr>
+      <p:grpSpPr>
+        <a:xfrm>
+          <a:off x="0" y="0"/>
+          <a:ext cx="0" cy="0"/>
+          <a:chOff x="0" y="0"/>
+          <a:chExt cx="0" cy="0"/>
+        </a:xfrm>
+      </p:grpSpPr>
+      <p:sp>
+        <p:nvSpPr>
+          <p:cNvPr id="2" name="Slide Image Placeholder 1"/>
+          <p:cNvSpPr>
+            <a:spLocks noGrp="1" noRot="1" noChangeAspect="1"/>
+          </p:cNvSpPr>
+          <p:nvPr>
+            <p:ph type="sldImg"/>
+          </p:nvPr>
+        </p:nvSpPr>
+        <p:spPr/>
+      </p:sp>
+      <p:sp>
+        <p:nvSpPr>
+          <p:cNvPr id="3" name="Notes Placeholder 2"/>
+          <p:cNvSpPr>
+            <a:spLocks noGrp="1"/>
+          </p:cNvSpPr>
+          <p:nvPr>
+            <p:ph type="body" idx="1"/>
+          </p:nvPr>
+        </p:nvSpPr>
+        <p:spPr/>
+        <p:txBody>
+          <a:bodyPr/>
+          <a:lstStyle/>
+          <a:p>
+            <a:r>
+              <a:rPr lang="en-US" sz="1200" b="1" i="0" kern="1200" dirty="0">
+                <a:solidFill>
+                  <a:schemeClr val="tx1"/>
+                </a:solidFill>
+                <a:effectLst/>
+                <a:latin typeface="+mn-lt"/>
+                <a:ea typeface="+mn-ea"/>
+                <a:cs typeface="+mn-cs"/>
+              </a:rPr>
+              <a:t>Most important slide of the talk.</a:t>
+            </a:r>
+            <a:endParaRPr lang="en-US" sz="1200" b="0" i="0" kern="1200" dirty="0">
+              <a:solidFill>
+                <a:schemeClr val="tx1"/>
+              </a:solidFill>
+              <a:effectLst/>
+              <a:latin typeface="+mn-lt"/>
+              <a:ea typeface="+mn-ea"/>
+              <a:cs typeface="+mn-cs"/>
+            </a:endParaRPr>
+          </a:p>
+          <a:p>
+            <a:r>
+              <a:rPr lang="en-US" sz="1200" b="0" i="0" kern="1200" dirty="0">
+                <a:solidFill>
+                  <a:schemeClr val="tx1"/>
+                </a:solidFill>
+                <a:effectLst/>
+                <a:latin typeface="+mn-lt"/>
+                <a:ea typeface="+mn-ea"/>
+                <a:cs typeface="+mn-cs"/>
+              </a:rPr>
+              <a:t>One concrete submission — Python solution, problem tagged </a:t>
+            </a:r>
+            <a:r>
+              <a:rPr lang="en-US" sz="1200" b="0" i="1" kern="1200" dirty="0">
+                <a:solidFill>
+                  <a:schemeClr val="tx1"/>
+                </a:solidFill>
+                <a:effectLst/>
+                <a:latin typeface="+mn-lt"/>
+                <a:ea typeface="+mn-ea"/>
+                <a:cs typeface="+mn-cs"/>
+              </a:rPr>
+              <a:t>recursion</a:t>
+            </a:r>
+            <a:r>
+              <a:rPr lang="en-US" sz="1200" b="0" i="0" kern="1200" dirty="0">
+                <a:solidFill>
+                  <a:schemeClr val="tx1"/>
+                </a:solidFill>
+                <a:effectLst/>
+                <a:latin typeface="+mn-lt"/>
+                <a:ea typeface="+mn-ea"/>
+                <a:cs typeface="+mn-cs"/>
+              </a:rPr>
+              <a:t>.</a:t>
+            </a:r>
+          </a:p>
+          <a:p>
+            <a:r>
+              <a:rPr lang="en-US" sz="1200" b="0" i="0" kern="1200" dirty="0">
+                <a:solidFill>
+                  <a:schemeClr val="tx1"/>
+                </a:solidFill>
+                <a:effectLst/>
+                <a:latin typeface="+mn-lt"/>
+                <a:ea typeface="+mn-ea"/>
+                <a:cs typeface="+mn-cs"/>
+              </a:rPr>
+              <a:t>Sandboxed run → verdict triple </a:t>
+            </a:r>
+            <a:r>
+              <a:rPr lang="en-US" sz="1200" b="1" i="0" kern="1200" dirty="0">
+                <a:solidFill>
+                  <a:schemeClr val="tx1"/>
+                </a:solidFill>
+                <a:effectLst/>
+                <a:latin typeface="+mn-lt"/>
+                <a:ea typeface="+mn-ea"/>
+                <a:cs typeface="+mn-cs"/>
+              </a:rPr>
+              <a:t>(correctness, attempts, time)</a:t>
+            </a:r>
+            <a:r>
+              <a:rPr lang="en-US" sz="1200" b="0" i="0" kern="1200" dirty="0">
+                <a:solidFill>
+                  <a:schemeClr val="tx1"/>
+                </a:solidFill>
+                <a:effectLst/>
+                <a:latin typeface="+mn-lt"/>
+                <a:ea typeface="+mn-ea"/>
+                <a:cs typeface="+mn-cs"/>
+              </a:rPr>
+              <a:t>.</a:t>
+            </a:r>
+          </a:p>
+          <a:p>
+            <a:r>
+              <a:rPr lang="en-US" sz="1200" b="0" i="0" kern="1200" dirty="0">
+                <a:solidFill>
+                  <a:schemeClr val="tx1"/>
+                </a:solidFill>
+                <a:effectLst/>
+                <a:latin typeface="+mn-lt"/>
+                <a:ea typeface="+mn-ea"/>
+                <a:cs typeface="+mn-cs"/>
+              </a:rPr>
+              <a:t>Single </a:t>
+            </a:r>
+            <a:r>
+              <a:rPr lang="en-US" sz="1200" b="0" i="0" kern="1200" dirty="0" err="1">
+                <a:solidFill>
+                  <a:schemeClr val="tx1"/>
+                </a:solidFill>
+                <a:effectLst/>
+                <a:latin typeface="+mn-lt"/>
+                <a:ea typeface="+mn-ea"/>
+                <a:cs typeface="+mn-cs"/>
+              </a:rPr>
+              <a:t>asyncio.gather</a:t>
+            </a:r>
+            <a:r>
+              <a:rPr lang="en-US" sz="1200" b="0" i="0" kern="1200" dirty="0">
+                <a:solidFill>
+                  <a:schemeClr val="tx1"/>
+                </a:solidFill>
+                <a:effectLst/>
+                <a:latin typeface="+mn-lt"/>
+                <a:ea typeface="+mn-ea"/>
+                <a:cs typeface="+mn-cs"/>
+              </a:rPr>
+              <a:t>(...) → </a:t>
+            </a:r>
+            <a:r>
+              <a:rPr lang="en-US" sz="1200" b="1" i="0" kern="1200" dirty="0">
+                <a:solidFill>
+                  <a:schemeClr val="tx1"/>
+                </a:solidFill>
+                <a:effectLst/>
+                <a:latin typeface="+mn-lt"/>
+                <a:ea typeface="+mn-ea"/>
+                <a:cs typeface="+mn-cs"/>
+              </a:rPr>
+              <a:t>4 parallel updates</a:t>
+            </a:r>
+            <a:r>
+              <a:rPr lang="en-US" sz="1200" b="0" i="0" kern="1200" dirty="0">
+                <a:solidFill>
+                  <a:schemeClr val="tx1"/>
+                </a:solidFill>
+                <a:effectLst/>
+                <a:latin typeface="+mn-lt"/>
+                <a:ea typeface="+mn-ea"/>
+                <a:cs typeface="+mn-cs"/>
+              </a:rPr>
+              <a:t>:</a:t>
+            </a:r>
+          </a:p>
+          <a:p>
+            <a:pPr lvl="1"/>
+            <a:r>
+              <a:rPr lang="en-US" sz="1200" b="0" i="0" kern="1200" dirty="0">
+                <a:solidFill>
+                  <a:schemeClr val="tx1"/>
+                </a:solidFill>
+                <a:effectLst/>
+                <a:latin typeface="+mn-lt"/>
+                <a:ea typeface="+mn-ea"/>
+                <a:cs typeface="+mn-cs"/>
+              </a:rPr>
+              <a:t>L1 updates BKT posterior for </a:t>
+            </a:r>
+            <a:r>
+              <a:rPr lang="en-US" sz="1200" b="0" i="1" kern="1200" dirty="0">
+                <a:solidFill>
+                  <a:schemeClr val="tx1"/>
+                </a:solidFill>
+                <a:effectLst/>
+                <a:latin typeface="+mn-lt"/>
+                <a:ea typeface="+mn-ea"/>
+                <a:cs typeface="+mn-cs"/>
+              </a:rPr>
+              <a:t>recursion</a:t>
+            </a:r>
+            <a:endParaRPr lang="en-US" sz="1200" b="0" i="0" kern="1200" dirty="0">
+              <a:solidFill>
+                <a:schemeClr val="tx1"/>
+              </a:solidFill>
+              <a:effectLst/>
+              <a:latin typeface="+mn-lt"/>
+              <a:ea typeface="+mn-ea"/>
+              <a:cs typeface="+mn-cs"/>
+            </a:endParaRPr>
+          </a:p>
+          <a:p>
+            <a:pPr lvl="1"/>
+            <a:r>
+              <a:rPr lang="en-US" sz="1200" b="0" i="0" kern="1200" dirty="0">
+                <a:solidFill>
+                  <a:schemeClr val="tx1"/>
+                </a:solidFill>
+                <a:effectLst/>
+                <a:latin typeface="+mn-lt"/>
+                <a:ea typeface="+mn-ea"/>
+                <a:cs typeface="+mn-cs"/>
+              </a:rPr>
+              <a:t>L2 updates learner's &amp; problem's Elo</a:t>
+            </a:r>
+          </a:p>
+          <a:p>
+            <a:pPr lvl="1"/>
+            <a:r>
+              <a:rPr lang="en-US" sz="1200" b="0" i="0" kern="1200" dirty="0">
+                <a:solidFill>
+                  <a:schemeClr val="tx1"/>
+                </a:solidFill>
+                <a:effectLst/>
+                <a:latin typeface="+mn-lt"/>
+                <a:ea typeface="+mn-ea"/>
+                <a:cs typeface="+mn-cs"/>
+              </a:rPr>
+              <a:t>L4 maps verdict → FSRS rating, rewrites due date</a:t>
+            </a:r>
+          </a:p>
+          <a:p>
+            <a:pPr lvl="1"/>
+            <a:r>
+              <a:rPr lang="en-US" sz="1200" b="0" i="0" kern="1200" dirty="0">
+                <a:solidFill>
+                  <a:schemeClr val="tx1"/>
+                </a:solidFill>
+                <a:effectLst/>
+                <a:latin typeface="+mn-lt"/>
+                <a:ea typeface="+mn-ea"/>
+                <a:cs typeface="+mn-cs"/>
+              </a:rPr>
+              <a:t>L3 takes new state, re-ranks candidate pool</a:t>
+            </a:r>
+          </a:p>
+          <a:p>
+            <a:r>
+              <a:rPr lang="en-US" sz="1200" b="0" i="0" kern="1200" dirty="0">
+                <a:solidFill>
+                  <a:schemeClr val="tx1"/>
+                </a:solidFill>
+                <a:effectLst/>
+                <a:latin typeface="+mn-lt"/>
+                <a:ea typeface="+mn-ea"/>
+                <a:cs typeface="+mn-cs"/>
+              </a:rPr>
+              <a:t>Cache invalidated → next request gets fresh state. </a:t>
+            </a:r>
+            <a:r>
+              <a:rPr lang="en-US" sz="1200" b="1" i="0" kern="1200" dirty="0">
+                <a:solidFill>
+                  <a:schemeClr val="tx1"/>
+                </a:solidFill>
+                <a:effectLst/>
+                <a:latin typeface="+mn-lt"/>
+                <a:ea typeface="+mn-ea"/>
+                <a:cs typeface="+mn-cs"/>
+              </a:rPr>
+              <a:t>Learner model never stale.</a:t>
+            </a:r>
+            <a:endParaRPr lang="en-US" sz="1200" b="0" i="0" kern="1200" dirty="0">
+              <a:solidFill>
+                <a:schemeClr val="tx1"/>
+              </a:solidFill>
+              <a:effectLst/>
+              <a:latin typeface="+mn-lt"/>
+              <a:ea typeface="+mn-ea"/>
+              <a:cs typeface="+mn-cs"/>
+            </a:endParaRPr>
+          </a:p>
+          <a:p>
+            <a:r>
+              <a:rPr lang="en-US" sz="1200" b="0" i="0" kern="1200" dirty="0">
+                <a:solidFill>
+                  <a:schemeClr val="tx1"/>
+                </a:solidFill>
+                <a:effectLst/>
+                <a:latin typeface="+mn-lt"/>
+                <a:ea typeface="+mn-ea"/>
+                <a:cs typeface="+mn-cs"/>
+              </a:rPr>
+              <a:t>All under </a:t>
+            </a:r>
+            <a:r>
+              <a:rPr lang="en-US" sz="1200" b="1" i="0" kern="1200" dirty="0">
+                <a:solidFill>
+                  <a:schemeClr val="tx1"/>
+                </a:solidFill>
+                <a:effectLst/>
+                <a:latin typeface="+mn-lt"/>
+                <a:ea typeface="+mn-ea"/>
+                <a:cs typeface="+mn-cs"/>
+              </a:rPr>
+              <a:t>500 </a:t>
+            </a:r>
+            <a:r>
+              <a:rPr lang="en-US" sz="1200" b="1" i="0" kern="1200" dirty="0" err="1">
+                <a:solidFill>
+                  <a:schemeClr val="tx1"/>
+                </a:solidFill>
+                <a:effectLst/>
+                <a:latin typeface="+mn-lt"/>
+                <a:ea typeface="+mn-ea"/>
+                <a:cs typeface="+mn-cs"/>
+              </a:rPr>
+              <a:t>ms</a:t>
+            </a:r>
+            <a:r>
+              <a:rPr lang="en-US" sz="1200" b="0" i="0" kern="1200" dirty="0">
+                <a:solidFill>
+                  <a:schemeClr val="tx1"/>
+                </a:solidFill>
+                <a:effectLst/>
+                <a:latin typeface="+mn-lt"/>
+                <a:ea typeface="+mn-ea"/>
+                <a:cs typeface="+mn-cs"/>
+              </a:rPr>
+              <a:t> at </a:t>
+            </a:r>
+            <a:r>
+              <a:rPr lang="en-US" sz="1200" b="1" i="0" kern="1200" dirty="0">
+                <a:solidFill>
+                  <a:schemeClr val="tx1"/>
+                </a:solidFill>
+                <a:effectLst/>
+                <a:latin typeface="+mn-lt"/>
+                <a:ea typeface="+mn-ea"/>
+                <a:cs typeface="+mn-cs"/>
+              </a:rPr>
+              <a:t>100 concurrent users</a:t>
+            </a:r>
+            <a:r>
+              <a:rPr lang="en-US" sz="1200" b="0" i="0" kern="1200" dirty="0">
+                <a:solidFill>
+                  <a:schemeClr val="tx1"/>
+                </a:solidFill>
+                <a:effectLst/>
+                <a:latin typeface="+mn-lt"/>
+                <a:ea typeface="+mn-ea"/>
+                <a:cs typeface="+mn-cs"/>
+              </a:rPr>
+              <a:t>.</a:t>
+            </a:r>
+          </a:p>
+          <a:p>
+            <a:endParaRPr lang="en-US" sz="1200" b="0" i="0" kern="1200" dirty="0">
+              <a:solidFill>
+                <a:schemeClr val="tx1"/>
+              </a:solidFill>
+              <a:effectLst/>
+              <a:latin typeface="+mn-lt"/>
+              <a:ea typeface="+mn-ea"/>
+              <a:cs typeface="+mn-cs"/>
+            </a:endParaRPr>
+          </a:p>
+          <a:p>
+            <a:endParaRPr lang="en-US" sz="1200" b="0" i="0" kern="1200" dirty="0">
+              <a:solidFill>
+                <a:schemeClr val="tx1"/>
+              </a:solidFill>
+              <a:effectLst/>
+              <a:latin typeface="+mn-lt"/>
+              <a:ea typeface="+mn-ea"/>
+              <a:cs typeface="+mn-cs"/>
+            </a:endParaRPr>
+          </a:p>
+          <a:p>
+            <a:r>
+              <a:rPr lang="en-US" sz="1200" b="0" i="0" kern="1200" dirty="0">
+                <a:solidFill>
+                  <a:schemeClr val="tx1"/>
+                </a:solidFill>
+                <a:effectLst/>
+                <a:latin typeface="+mn-lt"/>
+                <a:ea typeface="+mn-ea"/>
+                <a:cs typeface="+mn-cs"/>
+              </a:rPr>
+              <a:t>Walk the sequence diagram left → right with laser pointer.</a:t>
+            </a:r>
+          </a:p>
+          <a:p>
+            <a:endParaRPr lang="en-US" dirty="0"/>
+          </a:p>
+        </p:txBody>
+      </p:sp>
+      <p:sp>
+        <p:nvSpPr>
+          <p:cNvPr id="4" name="Slide Number Placeholder 3"/>
+          <p:cNvSpPr>
+            <a:spLocks noGrp="1"/>
+          </p:cNvSpPr>
+          <p:nvPr>
+            <p:ph type="sldNum" sz="quarter" idx="5"/>
+          </p:nvPr>
+        </p:nvSpPr>
+        <p:spPr/>
+        <p:txBody>
+          <a:bodyPr/>
+          <a:lstStyle/>
+          <a:p>
+            <a:fld id="{5F54E561-7F9C-441E-AFBA-1F000FF79D64}" type="slidenum">
+              <a:rPr lang="en-US" smtClean="0"/>
+              <a:t>9</a:t>
+            </a:fld>
+            <a:endParaRPr lang="en-US"/>
+          </a:p>
+        </p:txBody>
+      </p:sp>
+    </p:spTree>
+    <p:extLst>
+      <p:ext uri="{BB962C8B-B14F-4D97-AF65-F5344CB8AC3E}">
+        <p14:creationId xmlns:p14="http://schemas.microsoft.com/office/powerpoint/2010/main" val="4217010027"/>
+      </p:ext>
+    </p:extLst>
+  </p:cSld>
+  <p:clrMapOvr>
+    <a:masterClrMapping/>
+  </p:clrMapOvr>
+</p:notes>
 </file>
 
 <file path=ppt/slideLayouts/slideLayout1.xml><?xml version="1.0" encoding="utf-8"?>
@@ -157,10 +4979,9 @@
           <a:lstStyle/>
           <a:p>
             <a:r>
-              <a:rPr lang="en-US" smtClean="0"/>
+              <a:rPr lang="en-US"/>
               <a:t>Click to edit Master title style</a:t>
             </a:r>
-            <a:endParaRPr lang="en-US"/>
           </a:p>
         </p:txBody>
       </p:sp>
@@ -276,10 +5097,9 @@
           </a:lstStyle>
           <a:p>
             <a:r>
-              <a:rPr lang="en-US" smtClean="0"/>
+              <a:rPr lang="en-US"/>
               <a:t>Click to edit Master subtitle style</a:t>
             </a:r>
-            <a:endParaRPr lang="en-US"/>
           </a:p>
         </p:txBody>
       </p:sp>
@@ -300,7 +5120,7 @@
           <a:p>
             <a:fld id="{5BCAD085-E8A6-8845-BD4E-CB4CCA059FC4}" type="datetimeFigureOut">
               <a:rPr lang="en-US" smtClean="0"/>
-              <a:t>1/27/13</a:t>
+              <a:t>5/9/2026</a:t>
             </a:fld>
             <a:endParaRPr lang="en-US"/>
           </a:p>
@@ -394,10 +5214,9 @@
           <a:lstStyle/>
           <a:p>
             <a:r>
-              <a:rPr lang="en-US" smtClean="0"/>
+              <a:rPr lang="en-US"/>
               <a:t>Click to edit Master title style</a:t>
             </a:r>
-            <a:endParaRPr lang="en-US"/>
           </a:p>
         </p:txBody>
       </p:sp>
@@ -418,38 +5237,37 @@
           <a:p>
             <a:pPr lvl="0"/>
             <a:r>
-              <a:rPr lang="en-US" smtClean="0"/>
+              <a:rPr lang="en-US"/>
               <a:t>Click to edit Master text styles</a:t>
             </a:r>
           </a:p>
           <a:p>
             <a:pPr lvl="1"/>
             <a:r>
-              <a:rPr lang="en-US" smtClean="0"/>
+              <a:rPr lang="en-US"/>
               <a:t>Second level</a:t>
             </a:r>
           </a:p>
           <a:p>
             <a:pPr lvl="2"/>
             <a:r>
-              <a:rPr lang="en-US" smtClean="0"/>
+              <a:rPr lang="en-US"/>
               <a:t>Third level</a:t>
             </a:r>
           </a:p>
           <a:p>
             <a:pPr lvl="3"/>
             <a:r>
-              <a:rPr lang="en-US" smtClean="0"/>
+              <a:rPr lang="en-US"/>
               <a:t>Fourth level</a:t>
             </a:r>
           </a:p>
           <a:p>
             <a:pPr lvl="4"/>
             <a:r>
-              <a:rPr lang="en-US" smtClean="0"/>
+              <a:rPr lang="en-US"/>
               <a:t>Fifth level</a:t>
             </a:r>
-            <a:endParaRPr lang="en-US"/>
           </a:p>
         </p:txBody>
       </p:sp>
@@ -470,7 +5288,7 @@
           <a:p>
             <a:fld id="{5BCAD085-E8A6-8845-BD4E-CB4CCA059FC4}" type="datetimeFigureOut">
               <a:rPr lang="en-US" smtClean="0"/>
-              <a:t>1/27/13</a:t>
+              <a:t>5/9/2026</a:t>
             </a:fld>
             <a:endParaRPr lang="en-US"/>
           </a:p>
@@ -569,10 +5387,9 @@
           <a:lstStyle/>
           <a:p>
             <a:r>
-              <a:rPr lang="en-US" smtClean="0"/>
+              <a:rPr lang="en-US"/>
               <a:t>Click to edit Master title style</a:t>
             </a:r>
-            <a:endParaRPr lang="en-US"/>
           </a:p>
         </p:txBody>
       </p:sp>
@@ -598,38 +5415,37 @@
           <a:p>
             <a:pPr lvl="0"/>
             <a:r>
-              <a:rPr lang="en-US" smtClean="0"/>
+              <a:rPr lang="en-US"/>
               <a:t>Click to edit Master text styles</a:t>
             </a:r>
           </a:p>
           <a:p>
             <a:pPr lvl="1"/>
             <a:r>
-              <a:rPr lang="en-US" smtClean="0"/>
+              <a:rPr lang="en-US"/>
               <a:t>Second level</a:t>
             </a:r>
           </a:p>
           <a:p>
             <a:pPr lvl="2"/>
             <a:r>
-              <a:rPr lang="en-US" smtClean="0"/>
+              <a:rPr lang="en-US"/>
               <a:t>Third level</a:t>
             </a:r>
           </a:p>
           <a:p>
             <a:pPr lvl="3"/>
             <a:r>
-              <a:rPr lang="en-US" smtClean="0"/>
+              <a:rPr lang="en-US"/>
               <a:t>Fourth level</a:t>
             </a:r>
           </a:p>
           <a:p>
             <a:pPr lvl="4"/>
             <a:r>
-              <a:rPr lang="en-US" smtClean="0"/>
+              <a:rPr lang="en-US"/>
               <a:t>Fifth level</a:t>
             </a:r>
-            <a:endParaRPr lang="en-US"/>
           </a:p>
         </p:txBody>
       </p:sp>
@@ -650,7 +5466,7 @@
           <a:p>
             <a:fld id="{5BCAD085-E8A6-8845-BD4E-CB4CCA059FC4}" type="datetimeFigureOut">
               <a:rPr lang="en-US" smtClean="0"/>
-              <a:t>1/27/13</a:t>
+              <a:t>5/9/2026</a:t>
             </a:fld>
             <a:endParaRPr lang="en-US"/>
           </a:p>
@@ -744,10 +5560,9 @@
           <a:lstStyle/>
           <a:p>
             <a:r>
-              <a:rPr lang="en-US" smtClean="0"/>
+              <a:rPr lang="en-US"/>
               <a:t>Click to edit Master title style</a:t>
             </a:r>
-            <a:endParaRPr lang="en-US"/>
           </a:p>
         </p:txBody>
       </p:sp>
@@ -768,38 +5583,37 @@
           <a:p>
             <a:pPr lvl="0"/>
             <a:r>
-              <a:rPr lang="en-US" smtClean="0"/>
+              <a:rPr lang="en-US"/>
               <a:t>Click to edit Master text styles</a:t>
             </a:r>
           </a:p>
           <a:p>
             <a:pPr lvl="1"/>
             <a:r>
-              <a:rPr lang="en-US" smtClean="0"/>
+              <a:rPr lang="en-US"/>
               <a:t>Second level</a:t>
             </a:r>
           </a:p>
           <a:p>
             <a:pPr lvl="2"/>
             <a:r>
-              <a:rPr lang="en-US" smtClean="0"/>
+              <a:rPr lang="en-US"/>
               <a:t>Third level</a:t>
             </a:r>
           </a:p>
           <a:p>
             <a:pPr lvl="3"/>
             <a:r>
-              <a:rPr lang="en-US" smtClean="0"/>
+              <a:rPr lang="en-US"/>
               <a:t>Fourth level</a:t>
             </a:r>
           </a:p>
           <a:p>
             <a:pPr lvl="4"/>
             <a:r>
-              <a:rPr lang="en-US" smtClean="0"/>
+              <a:rPr lang="en-US"/>
               <a:t>Fifth level</a:t>
             </a:r>
-            <a:endParaRPr lang="en-US"/>
           </a:p>
         </p:txBody>
       </p:sp>
@@ -820,7 +5634,7 @@
           <a:p>
             <a:fld id="{5BCAD085-E8A6-8845-BD4E-CB4CCA059FC4}" type="datetimeFigureOut">
               <a:rPr lang="en-US" smtClean="0"/>
-              <a:t>1/27/13</a:t>
+              <a:t>5/9/2026</a:t>
             </a:fld>
             <a:endParaRPr lang="en-US"/>
           </a:p>
@@ -923,10 +5737,9 @@
           </a:lstStyle>
           <a:p>
             <a:r>
-              <a:rPr lang="en-US" smtClean="0"/>
+              <a:rPr lang="en-US"/>
               <a:t>Click to edit Master title style</a:t>
             </a:r>
-            <a:endParaRPr lang="en-US"/>
           </a:p>
         </p:txBody>
       </p:sp>
@@ -1043,7 +5856,7 @@
           <a:p>
             <a:pPr lvl="0"/>
             <a:r>
-              <a:rPr lang="en-US" smtClean="0"/>
+              <a:rPr lang="en-US"/>
               <a:t>Click to edit Master text styles</a:t>
             </a:r>
           </a:p>
@@ -1066,7 +5879,7 @@
           <a:p>
             <a:fld id="{5BCAD085-E8A6-8845-BD4E-CB4CCA059FC4}" type="datetimeFigureOut">
               <a:rPr lang="en-US" smtClean="0"/>
-              <a:t>1/27/13</a:t>
+              <a:t>5/9/2026</a:t>
             </a:fld>
             <a:endParaRPr lang="en-US"/>
           </a:p>
@@ -1160,10 +5973,9 @@
           <a:lstStyle/>
           <a:p>
             <a:r>
-              <a:rPr lang="en-US" smtClean="0"/>
+              <a:rPr lang="en-US"/>
               <a:t>Click to edit Master title style</a:t>
             </a:r>
-            <a:endParaRPr lang="en-US"/>
           </a:p>
         </p:txBody>
       </p:sp>
@@ -1217,38 +6029,37 @@
           <a:p>
             <a:pPr lvl="0"/>
             <a:r>
-              <a:rPr lang="en-US" smtClean="0"/>
+              <a:rPr lang="en-US"/>
               <a:t>Click to edit Master text styles</a:t>
             </a:r>
           </a:p>
           <a:p>
             <a:pPr lvl="1"/>
             <a:r>
-              <a:rPr lang="en-US" smtClean="0"/>
+              <a:rPr lang="en-US"/>
               <a:t>Second level</a:t>
             </a:r>
           </a:p>
           <a:p>
             <a:pPr lvl="2"/>
             <a:r>
-              <a:rPr lang="en-US" smtClean="0"/>
+              <a:rPr lang="en-US"/>
               <a:t>Third level</a:t>
             </a:r>
           </a:p>
           <a:p>
             <a:pPr lvl="3"/>
             <a:r>
-              <a:rPr lang="en-US" smtClean="0"/>
+              <a:rPr lang="en-US"/>
               <a:t>Fourth level</a:t>
             </a:r>
           </a:p>
           <a:p>
             <a:pPr lvl="4"/>
             <a:r>
-              <a:rPr lang="en-US" smtClean="0"/>
+              <a:rPr lang="en-US"/>
               <a:t>Fifth level</a:t>
             </a:r>
-            <a:endParaRPr lang="en-US"/>
           </a:p>
         </p:txBody>
       </p:sp>
@@ -1302,38 +6113,37 @@
           <a:p>
             <a:pPr lvl="0"/>
             <a:r>
-              <a:rPr lang="en-US" smtClean="0"/>
+              <a:rPr lang="en-US"/>
               <a:t>Click to edit Master text styles</a:t>
             </a:r>
           </a:p>
           <a:p>
             <a:pPr lvl="1"/>
             <a:r>
-              <a:rPr lang="en-US" smtClean="0"/>
+              <a:rPr lang="en-US"/>
               <a:t>Second level</a:t>
             </a:r>
           </a:p>
           <a:p>
             <a:pPr lvl="2"/>
             <a:r>
-              <a:rPr lang="en-US" smtClean="0"/>
+              <a:rPr lang="en-US"/>
               <a:t>Third level</a:t>
             </a:r>
           </a:p>
           <a:p>
             <a:pPr lvl="3"/>
             <a:r>
-              <a:rPr lang="en-US" smtClean="0"/>
+              <a:rPr lang="en-US"/>
               <a:t>Fourth level</a:t>
             </a:r>
           </a:p>
           <a:p>
             <a:pPr lvl="4"/>
             <a:r>
-              <a:rPr lang="en-US" smtClean="0"/>
+              <a:rPr lang="en-US"/>
               <a:t>Fifth level</a:t>
             </a:r>
-            <a:endParaRPr lang="en-US"/>
           </a:p>
         </p:txBody>
       </p:sp>
@@ -1354,7 +6164,7 @@
           <a:p>
             <a:fld id="{5BCAD085-E8A6-8845-BD4E-CB4CCA059FC4}" type="datetimeFigureOut">
               <a:rPr lang="en-US" smtClean="0"/>
-              <a:t>1/27/13</a:t>
+              <a:t>5/9/2026</a:t>
             </a:fld>
             <a:endParaRPr lang="en-US"/>
           </a:p>
@@ -1452,10 +6262,9 @@
           </a:lstStyle>
           <a:p>
             <a:r>
-              <a:rPr lang="en-US" smtClean="0"/>
+              <a:rPr lang="en-US"/>
               <a:t>Click to edit Master title style</a:t>
             </a:r>
-            <a:endParaRPr lang="en-US"/>
           </a:p>
         </p:txBody>
       </p:sp>
@@ -1518,7 +6327,7 @@
           <a:p>
             <a:pPr lvl="0"/>
             <a:r>
-              <a:rPr lang="en-US" smtClean="0"/>
+              <a:rPr lang="en-US"/>
               <a:t>Click to edit Master text styles</a:t>
             </a:r>
           </a:p>
@@ -1574,38 +6383,37 @@
           <a:p>
             <a:pPr lvl="0"/>
             <a:r>
-              <a:rPr lang="en-US" smtClean="0"/>
+              <a:rPr lang="en-US"/>
               <a:t>Click to edit Master text styles</a:t>
             </a:r>
           </a:p>
           <a:p>
             <a:pPr lvl="1"/>
             <a:r>
-              <a:rPr lang="en-US" smtClean="0"/>
+              <a:rPr lang="en-US"/>
               <a:t>Second level</a:t>
             </a:r>
           </a:p>
           <a:p>
             <a:pPr lvl="2"/>
             <a:r>
-              <a:rPr lang="en-US" smtClean="0"/>
+              <a:rPr lang="en-US"/>
               <a:t>Third level</a:t>
             </a:r>
           </a:p>
           <a:p>
             <a:pPr lvl="3"/>
             <a:r>
-              <a:rPr lang="en-US" smtClean="0"/>
+              <a:rPr lang="en-US"/>
               <a:t>Fourth level</a:t>
             </a:r>
           </a:p>
           <a:p>
             <a:pPr lvl="4"/>
             <a:r>
-              <a:rPr lang="en-US" smtClean="0"/>
+              <a:rPr lang="en-US"/>
               <a:t>Fifth level</a:t>
             </a:r>
-            <a:endParaRPr lang="en-US"/>
           </a:p>
         </p:txBody>
       </p:sp>
@@ -1668,7 +6476,7 @@
           <a:p>
             <a:pPr lvl="0"/>
             <a:r>
-              <a:rPr lang="en-US" smtClean="0"/>
+              <a:rPr lang="en-US"/>
               <a:t>Click to edit Master text styles</a:t>
             </a:r>
           </a:p>
@@ -1724,38 +6532,37 @@
           <a:p>
             <a:pPr lvl="0"/>
             <a:r>
-              <a:rPr lang="en-US" smtClean="0"/>
+              <a:rPr lang="en-US"/>
               <a:t>Click to edit Master text styles</a:t>
             </a:r>
           </a:p>
           <a:p>
             <a:pPr lvl="1"/>
             <a:r>
-              <a:rPr lang="en-US" smtClean="0"/>
+              <a:rPr lang="en-US"/>
               <a:t>Second level</a:t>
             </a:r>
           </a:p>
           <a:p>
             <a:pPr lvl="2"/>
             <a:r>
-              <a:rPr lang="en-US" smtClean="0"/>
+              <a:rPr lang="en-US"/>
               <a:t>Third level</a:t>
             </a:r>
           </a:p>
           <a:p>
             <a:pPr lvl="3"/>
             <a:r>
-              <a:rPr lang="en-US" smtClean="0"/>
+              <a:rPr lang="en-US"/>
               <a:t>Fourth level</a:t>
             </a:r>
           </a:p>
           <a:p>
             <a:pPr lvl="4"/>
             <a:r>
-              <a:rPr lang="en-US" smtClean="0"/>
+              <a:rPr lang="en-US"/>
               <a:t>Fifth level</a:t>
             </a:r>
-            <a:endParaRPr lang="en-US"/>
           </a:p>
         </p:txBody>
       </p:sp>
@@ -1776,7 +6583,7 @@
           <a:p>
             <a:fld id="{5BCAD085-E8A6-8845-BD4E-CB4CCA059FC4}" type="datetimeFigureOut">
               <a:rPr lang="en-US" smtClean="0"/>
-              <a:t>1/27/13</a:t>
+              <a:t>5/9/2026</a:t>
             </a:fld>
             <a:endParaRPr lang="en-US"/>
           </a:p>
@@ -1870,10 +6677,9 @@
           <a:lstStyle/>
           <a:p>
             <a:r>
-              <a:rPr lang="en-US" smtClean="0"/>
+              <a:rPr lang="en-US"/>
               <a:t>Click to edit Master title style</a:t>
             </a:r>
-            <a:endParaRPr lang="en-US"/>
           </a:p>
         </p:txBody>
       </p:sp>
@@ -1894,7 +6700,7 @@
           <a:p>
             <a:fld id="{5BCAD085-E8A6-8845-BD4E-CB4CCA059FC4}" type="datetimeFigureOut">
               <a:rPr lang="en-US" smtClean="0"/>
-              <a:t>1/27/13</a:t>
+              <a:t>5/9/2026</a:t>
             </a:fld>
             <a:endParaRPr lang="en-US"/>
           </a:p>
@@ -1989,7 +6795,7 @@
           <a:p>
             <a:fld id="{5BCAD085-E8A6-8845-BD4E-CB4CCA059FC4}" type="datetimeFigureOut">
               <a:rPr lang="en-US" smtClean="0"/>
-              <a:t>1/27/13</a:t>
+              <a:t>5/9/2026</a:t>
             </a:fld>
             <a:endParaRPr lang="en-US"/>
           </a:p>
@@ -2092,10 +6898,9 @@
           </a:lstStyle>
           <a:p>
             <a:r>
-              <a:rPr lang="en-US" smtClean="0"/>
+              <a:rPr lang="en-US"/>
               <a:t>Click to edit Master title style</a:t>
             </a:r>
-            <a:endParaRPr lang="en-US"/>
           </a:p>
         </p:txBody>
       </p:sp>
@@ -2149,38 +6954,37 @@
           <a:p>
             <a:pPr lvl="0"/>
             <a:r>
-              <a:rPr lang="en-US" smtClean="0"/>
+              <a:rPr lang="en-US"/>
               <a:t>Click to edit Master text styles</a:t>
             </a:r>
           </a:p>
           <a:p>
             <a:pPr lvl="1"/>
             <a:r>
-              <a:rPr lang="en-US" smtClean="0"/>
+              <a:rPr lang="en-US"/>
               <a:t>Second level</a:t>
             </a:r>
           </a:p>
           <a:p>
             <a:pPr lvl="2"/>
             <a:r>
-              <a:rPr lang="en-US" smtClean="0"/>
+              <a:rPr lang="en-US"/>
               <a:t>Third level</a:t>
             </a:r>
           </a:p>
           <a:p>
             <a:pPr lvl="3"/>
             <a:r>
-              <a:rPr lang="en-US" smtClean="0"/>
+              <a:rPr lang="en-US"/>
               <a:t>Fourth level</a:t>
             </a:r>
           </a:p>
           <a:p>
             <a:pPr lvl="4"/>
             <a:r>
-              <a:rPr lang="en-US" smtClean="0"/>
+              <a:rPr lang="en-US"/>
               <a:t>Fifth level</a:t>
             </a:r>
-            <a:endParaRPr lang="en-US"/>
           </a:p>
         </p:txBody>
       </p:sp>
@@ -2243,7 +7047,7 @@
           <a:p>
             <a:pPr lvl="0"/>
             <a:r>
-              <a:rPr lang="en-US" smtClean="0"/>
+              <a:rPr lang="en-US"/>
               <a:t>Click to edit Master text styles</a:t>
             </a:r>
           </a:p>
@@ -2266,7 +7070,7 @@
           <a:p>
             <a:fld id="{5BCAD085-E8A6-8845-BD4E-CB4CCA059FC4}" type="datetimeFigureOut">
               <a:rPr lang="en-US" smtClean="0"/>
-              <a:t>1/27/13</a:t>
+              <a:t>5/9/2026</a:t>
             </a:fld>
             <a:endParaRPr lang="en-US"/>
           </a:p>
@@ -2369,10 +7173,9 @@
           </a:lstStyle>
           <a:p>
             <a:r>
-              <a:rPr lang="en-US" smtClean="0"/>
+              <a:rPr lang="en-US"/>
               <a:t>Click to edit Master title style</a:t>
             </a:r>
-            <a:endParaRPr lang="en-US"/>
           </a:p>
         </p:txBody>
       </p:sp>
@@ -2496,7 +7299,7 @@
           <a:p>
             <a:pPr lvl="0"/>
             <a:r>
-              <a:rPr lang="en-US" smtClean="0"/>
+              <a:rPr lang="en-US"/>
               <a:t>Click to edit Master text styles</a:t>
             </a:r>
           </a:p>
@@ -2519,7 +7322,7 @@
           <a:p>
             <a:fld id="{5BCAD085-E8A6-8845-BD4E-CB4CCA059FC4}" type="datetimeFigureOut">
               <a:rPr lang="en-US" smtClean="0"/>
-              <a:t>1/27/13</a:t>
+              <a:t>5/9/2026</a:t>
             </a:fld>
             <a:endParaRPr lang="en-US"/>
           </a:p>
@@ -2628,10 +7431,9 @@
           <a:lstStyle/>
           <a:p>
             <a:r>
-              <a:rPr lang="en-US" smtClean="0"/>
+              <a:rPr lang="en-US"/>
               <a:t>Click to edit Master title style</a:t>
             </a:r>
-            <a:endParaRPr lang="en-US"/>
           </a:p>
         </p:txBody>
       </p:sp>
@@ -2662,38 +7464,37 @@
           <a:p>
             <a:pPr lvl="0"/>
             <a:r>
-              <a:rPr lang="en-US" smtClean="0"/>
+              <a:rPr lang="en-US"/>
               <a:t>Click to edit Master text styles</a:t>
             </a:r>
           </a:p>
           <a:p>
             <a:pPr lvl="1"/>
             <a:r>
-              <a:rPr lang="en-US" smtClean="0"/>
+              <a:rPr lang="en-US"/>
               <a:t>Second level</a:t>
             </a:r>
           </a:p>
           <a:p>
             <a:pPr lvl="2"/>
             <a:r>
-              <a:rPr lang="en-US" smtClean="0"/>
+              <a:rPr lang="en-US"/>
               <a:t>Third level</a:t>
             </a:r>
           </a:p>
           <a:p>
             <a:pPr lvl="3"/>
             <a:r>
-              <a:rPr lang="en-US" smtClean="0"/>
+              <a:rPr lang="en-US"/>
               <a:t>Fourth level</a:t>
             </a:r>
           </a:p>
           <a:p>
             <a:pPr lvl="4"/>
             <a:r>
-              <a:rPr lang="en-US" smtClean="0"/>
+              <a:rPr lang="en-US"/>
               <a:t>Fifth level</a:t>
             </a:r>
-            <a:endParaRPr lang="en-US"/>
           </a:p>
         </p:txBody>
       </p:sp>
@@ -2732,7 +7533,7 @@
           <a:p>
             <a:fld id="{5BCAD085-E8A6-8845-BD4E-CB4CCA059FC4}" type="datetimeFigureOut">
               <a:rPr lang="en-US" smtClean="0"/>
-              <a:t>1/27/13</a:t>
+              <a:t>5/9/2026</a:t>
             </a:fld>
             <a:endParaRPr lang="en-US"/>
           </a:p>
@@ -3091,7 +7892,7 @@
 </file>
 
 <file path=ppt/slides/slide1.xml><?xml version="1.0" encoding="utf-8"?>
-<p:sld xmlns:a="http://schemas.openxmlformats.org/drawingml/2006/main" xmlns:p="http://schemas.openxmlformats.org/presentationml/2006/main" xmlns:r="http://schemas.openxmlformats.org/officeDocument/2006/relationships">
+<p:sld xmlns:a="http://schemas.openxmlformats.org/drawingml/2006/main" xmlns:r="http://schemas.openxmlformats.org/officeDocument/2006/relationships" xmlns:p="http://schemas.openxmlformats.org/presentationml/2006/main">
   <p:cSld>
     <p:spTree>
       <p:nvGrpSpPr>
@@ -3099,7 +7900,14 @@
         <p:cNvGrpSpPr/>
         <p:nvPr/>
       </p:nvGrpSpPr>
-      <p:grpSpPr/>
+      <p:grpSpPr>
+        <a:xfrm>
+          <a:off x="0" y="0"/>
+          <a:ext cx="0" cy="0"/>
+          <a:chOff x="0" y="0"/>
+          <a:chExt cx="0" cy="0"/>
+        </a:xfrm>
+      </p:grpSpPr>
       <p:sp>
         <p:nvSpPr>
           <p:cNvPr id="2" name="Rectangle 1"/>
@@ -3141,6 +7949,7 @@
           <a:lstStyle/>
           <a:p>
             <a:pPr algn="ctr"/>
+            <a:endParaRPr/>
           </a:p>
         </p:txBody>
       </p:sp>
@@ -3185,6 +7994,7 @@
           <a:lstStyle/>
           <a:p>
             <a:pPr algn="ctr"/>
+            <a:endParaRPr/>
           </a:p>
         </p:txBody>
       </p:sp>
@@ -3205,7 +8015,7 @@
           <a:noFill/>
         </p:spPr>
         <p:txBody>
-          <a:bodyPr wrap="square" anchor="t" lIns="0" rIns="0" tIns="0" bIns="0">
+          <a:bodyPr wrap="square" lIns="0" tIns="0" rIns="0" bIns="0" anchor="t">
             <a:spAutoFit/>
           </a:bodyPr>
           <a:lstStyle/>
@@ -3240,7 +8050,7 @@
           <a:noFill/>
         </p:spPr>
         <p:txBody>
-          <a:bodyPr wrap="square" anchor="t" lIns="0" rIns="0" tIns="0" bIns="0">
+          <a:bodyPr wrap="square" lIns="0" tIns="0" rIns="0" bIns="0" anchor="t">
             <a:spAutoFit/>
           </a:bodyPr>
           <a:lstStyle/>
@@ -3276,7 +8086,7 @@
           <a:noFill/>
         </p:spPr>
         <p:txBody>
-          <a:bodyPr wrap="square" anchor="t" lIns="0" rIns="0" tIns="0" bIns="0">
+          <a:bodyPr wrap="square" lIns="0" tIns="0" rIns="0" bIns="0" anchor="t">
             <a:spAutoFit/>
           </a:bodyPr>
           <a:lstStyle/>
@@ -3311,7 +8121,7 @@
           <a:noFill/>
         </p:spPr>
         <p:txBody>
-          <a:bodyPr wrap="square" anchor="t" lIns="0" rIns="0" tIns="0" bIns="0">
+          <a:bodyPr wrap="square" lIns="0" tIns="0" rIns="0" bIns="0" anchor="t">
             <a:spAutoFit/>
           </a:bodyPr>
           <a:lstStyle/>
@@ -3346,7 +8156,7 @@
           <a:noFill/>
         </p:spPr>
         <p:txBody>
-          <a:bodyPr wrap="square" anchor="t" lIns="0" rIns="0" tIns="0" bIns="0">
+          <a:bodyPr wrap="square" lIns="0" tIns="0" rIns="0" bIns="0" anchor="t">
             <a:spAutoFit/>
           </a:bodyPr>
           <a:lstStyle/>
@@ -3381,7 +8191,7 @@
           <a:noFill/>
         </p:spPr>
         <p:txBody>
-          <a:bodyPr wrap="square" anchor="t" lIns="0" rIns="0" tIns="0" bIns="0">
+          <a:bodyPr wrap="square" lIns="0" tIns="0" rIns="0" bIns="0" anchor="t">
             <a:spAutoFit/>
           </a:bodyPr>
           <a:lstStyle/>
@@ -3416,14 +8226,14 @@
           <a:noFill/>
         </p:spPr>
         <p:txBody>
-          <a:bodyPr wrap="square" anchor="t" lIns="0" rIns="0" tIns="0" bIns="0">
+          <a:bodyPr wrap="square" lIns="0" tIns="0" rIns="0" bIns="0" anchor="t">
             <a:spAutoFit/>
           </a:bodyPr>
           <a:lstStyle/>
           <a:p>
             <a:pPr algn="l"/>
             <a:r>
-              <a:rPr sz="1400" b="0" i="1">
+              <a:rPr sz="1400" b="0" i="1" dirty="0">
                 <a:solidFill>
                   <a:srgbClr val="4A5568"/>
                 </a:solidFill>
@@ -3451,7 +8261,7 @@
           <a:noFill/>
         </p:spPr>
         <p:txBody>
-          <a:bodyPr wrap="square" anchor="t" lIns="0" rIns="0" tIns="0" bIns="0">
+          <a:bodyPr wrap="square" lIns="0" tIns="0" rIns="0" bIns="0" anchor="t">
             <a:spAutoFit/>
           </a:bodyPr>
           <a:lstStyle/>
@@ -3478,7 +8288,7 @@
 </file>
 
 <file path=ppt/slides/slide10.xml><?xml version="1.0" encoding="utf-8"?>
-<p:sld xmlns:a="http://schemas.openxmlformats.org/drawingml/2006/main" xmlns:p="http://schemas.openxmlformats.org/presentationml/2006/main" xmlns:r="http://schemas.openxmlformats.org/officeDocument/2006/relationships">
+<p:sld xmlns:a="http://schemas.openxmlformats.org/drawingml/2006/main" xmlns:r="http://schemas.openxmlformats.org/officeDocument/2006/relationships" xmlns:p="http://schemas.openxmlformats.org/presentationml/2006/main">
   <p:cSld>
     <p:spTree>
       <p:nvGrpSpPr>
@@ -3486,7 +8296,14 @@
         <p:cNvGrpSpPr/>
         <p:nvPr/>
       </p:nvGrpSpPr>
-      <p:grpSpPr/>
+      <p:grpSpPr>
+        <a:xfrm>
+          <a:off x="0" y="0"/>
+          <a:ext cx="0" cy="0"/>
+          <a:chOff x="0" y="0"/>
+          <a:chExt cx="0" cy="0"/>
+        </a:xfrm>
+      </p:grpSpPr>
       <p:sp>
         <p:nvSpPr>
           <p:cNvPr id="2" name="Rectangle 1"/>
@@ -3528,6 +8345,7 @@
           <a:lstStyle/>
           <a:p>
             <a:pPr algn="ctr"/>
+            <a:endParaRPr/>
           </a:p>
         </p:txBody>
       </p:sp>
@@ -3548,7 +8366,7 @@
           <a:noFill/>
         </p:spPr>
         <p:txBody>
-          <a:bodyPr wrap="square" anchor="t" lIns="0" rIns="0" tIns="0" bIns="0">
+          <a:bodyPr wrap="square" lIns="0" tIns="0" rIns="0" bIns="0" anchor="t">
             <a:spAutoFit/>
           </a:bodyPr>
           <a:lstStyle/>
@@ -3583,7 +8401,7 @@
           <a:noFill/>
         </p:spPr>
         <p:txBody>
-          <a:bodyPr wrap="square" anchor="t" lIns="0" rIns="0" tIns="0" bIns="0">
+          <a:bodyPr wrap="square" lIns="0" tIns="0" rIns="0" bIns="0" anchor="t">
             <a:spAutoFit/>
           </a:bodyPr>
           <a:lstStyle/>
@@ -3610,15 +8428,15 @@
           <p:nvPr/>
         </p:nvPicPr>
         <p:blipFill>
-          <a:blip r:embed="rId2"/>
+          <a:blip r:embed="rId3"/>
           <a:stretch>
             <a:fillRect/>
           </a:stretch>
         </p:blipFill>
         <p:spPr>
           <a:xfrm>
-            <a:off x="548640" y="2797861"/>
-            <a:ext cx="6766560" cy="2450998"/>
+            <a:off x="241934" y="2477820"/>
+            <a:ext cx="7210425" cy="2611776"/>
           </a:xfrm>
           <a:prstGeom prst="rect">
             <a:avLst/>
@@ -3668,6 +8486,7 @@
           <a:lstStyle/>
           <a:p>
             <a:pPr algn="ctr"/>
+            <a:endParaRPr/>
           </a:p>
         </p:txBody>
       </p:sp>
@@ -3712,6 +8531,7 @@
           <a:lstStyle/>
           <a:p>
             <a:pPr algn="ctr"/>
+            <a:endParaRPr/>
           </a:p>
         </p:txBody>
       </p:sp>
@@ -3732,7 +8552,7 @@
           <a:noFill/>
         </p:spPr>
         <p:txBody>
-          <a:bodyPr wrap="square" anchor="ctr" lIns="0" rIns="0" tIns="0" bIns="0">
+          <a:bodyPr wrap="square" lIns="0" tIns="0" rIns="0" bIns="0" anchor="ctr">
             <a:spAutoFit/>
           </a:bodyPr>
           <a:lstStyle/>
@@ -3767,7 +8587,7 @@
           <a:noFill/>
         </p:spPr>
         <p:txBody>
-          <a:bodyPr wrap="square" anchor="ctr" lIns="0" rIns="0" tIns="0" bIns="0">
+          <a:bodyPr wrap="square" lIns="0" tIns="0" rIns="0" bIns="0" anchor="ctr">
             <a:spAutoFit/>
           </a:bodyPr>
           <a:lstStyle/>
@@ -3802,7 +8622,7 @@
           <a:noFill/>
         </p:spPr>
         <p:txBody>
-          <a:bodyPr wrap="square" anchor="ctr" lIns="0" rIns="0" tIns="0" bIns="0">
+          <a:bodyPr wrap="square" lIns="0" tIns="0" rIns="0" bIns="0" anchor="ctr">
             <a:spAutoFit/>
           </a:bodyPr>
           <a:lstStyle/>
@@ -3837,7 +8657,7 @@
           <a:noFill/>
         </p:spPr>
         <p:txBody>
-          <a:bodyPr wrap="square" anchor="ctr" lIns="0" rIns="0" tIns="0" bIns="0">
+          <a:bodyPr wrap="square" lIns="0" tIns="0" rIns="0" bIns="0" anchor="ctr">
             <a:spAutoFit/>
           </a:bodyPr>
           <a:lstStyle/>
@@ -3872,7 +8692,7 @@
           <a:noFill/>
         </p:spPr>
         <p:txBody>
-          <a:bodyPr wrap="square" anchor="ctr" lIns="0" rIns="0" tIns="0" bIns="0">
+          <a:bodyPr wrap="square" lIns="0" tIns="0" rIns="0" bIns="0" anchor="ctr">
             <a:spAutoFit/>
           </a:bodyPr>
           <a:lstStyle/>
@@ -3907,7 +8727,7 @@
           <a:noFill/>
         </p:spPr>
         <p:txBody>
-          <a:bodyPr wrap="square" anchor="ctr" lIns="0" rIns="0" tIns="0" bIns="0">
+          <a:bodyPr wrap="square" lIns="0" tIns="0" rIns="0" bIns="0" anchor="ctr">
             <a:spAutoFit/>
           </a:bodyPr>
           <a:lstStyle/>
@@ -3942,7 +8762,7 @@
           <a:noFill/>
         </p:spPr>
         <p:txBody>
-          <a:bodyPr wrap="square" anchor="ctr" lIns="0" rIns="0" tIns="0" bIns="0">
+          <a:bodyPr wrap="square" lIns="0" tIns="0" rIns="0" bIns="0" anchor="ctr">
             <a:spAutoFit/>
           </a:bodyPr>
           <a:lstStyle/>
@@ -3977,7 +8797,7 @@
           <a:noFill/>
         </p:spPr>
         <p:txBody>
-          <a:bodyPr wrap="square" anchor="ctr" lIns="0" rIns="0" tIns="0" bIns="0">
+          <a:bodyPr wrap="square" lIns="0" tIns="0" rIns="0" bIns="0" anchor="ctr">
             <a:spAutoFit/>
           </a:bodyPr>
           <a:lstStyle/>
@@ -4012,7 +8832,7 @@
           <a:noFill/>
         </p:spPr>
         <p:txBody>
-          <a:bodyPr wrap="square" anchor="ctr" lIns="0" rIns="0" tIns="0" bIns="0">
+          <a:bodyPr wrap="square" lIns="0" tIns="0" rIns="0" bIns="0" anchor="ctr">
             <a:spAutoFit/>
           </a:bodyPr>
           <a:lstStyle/>
@@ -4047,7 +8867,7 @@
           <a:noFill/>
         </p:spPr>
         <p:txBody>
-          <a:bodyPr wrap="square" anchor="ctr" lIns="0" rIns="0" tIns="0" bIns="0">
+          <a:bodyPr wrap="square" lIns="0" tIns="0" rIns="0" bIns="0" anchor="ctr">
             <a:spAutoFit/>
           </a:bodyPr>
           <a:lstStyle/>
@@ -4082,7 +8902,7 @@
           <a:noFill/>
         </p:spPr>
         <p:txBody>
-          <a:bodyPr wrap="square" anchor="ctr" lIns="0" rIns="0" tIns="0" bIns="0">
+          <a:bodyPr wrap="square" lIns="0" tIns="0" rIns="0" bIns="0" anchor="ctr">
             <a:spAutoFit/>
           </a:bodyPr>
           <a:lstStyle/>
@@ -4117,7 +8937,7 @@
           <a:noFill/>
         </p:spPr>
         <p:txBody>
-          <a:bodyPr wrap="square" anchor="ctr" lIns="0" rIns="0" tIns="0" bIns="0">
+          <a:bodyPr wrap="square" lIns="0" tIns="0" rIns="0" bIns="0" anchor="ctr">
             <a:spAutoFit/>
           </a:bodyPr>
           <a:lstStyle/>
@@ -4152,7 +8972,7 @@
           <a:noFill/>
         </p:spPr>
         <p:txBody>
-          <a:bodyPr wrap="square" anchor="t" lIns="0" rIns="0" tIns="0" bIns="0">
+          <a:bodyPr wrap="square" lIns="0" tIns="0" rIns="0" bIns="0" anchor="t">
             <a:spAutoFit/>
           </a:bodyPr>
           <a:lstStyle/>
@@ -4187,7 +9007,7 @@
           <a:noFill/>
         </p:spPr>
         <p:txBody>
-          <a:bodyPr wrap="square" anchor="t" lIns="0" rIns="0" tIns="0" bIns="0">
+          <a:bodyPr wrap="square" lIns="0" tIns="0" rIns="0" bIns="0" anchor="t">
             <a:spAutoFit/>
           </a:bodyPr>
           <a:lstStyle/>
@@ -4214,7 +9034,7 @@
 </file>
 
 <file path=ppt/slides/slide11.xml><?xml version="1.0" encoding="utf-8"?>
-<p:sld xmlns:a="http://schemas.openxmlformats.org/drawingml/2006/main" xmlns:p="http://schemas.openxmlformats.org/presentationml/2006/main" xmlns:r="http://schemas.openxmlformats.org/officeDocument/2006/relationships">
+<p:sld xmlns:a="http://schemas.openxmlformats.org/drawingml/2006/main" xmlns:r="http://schemas.openxmlformats.org/officeDocument/2006/relationships" xmlns:p="http://schemas.openxmlformats.org/presentationml/2006/main">
   <p:cSld>
     <p:spTree>
       <p:nvGrpSpPr>
@@ -4222,7 +9042,14 @@
         <p:cNvGrpSpPr/>
         <p:nvPr/>
       </p:nvGrpSpPr>
-      <p:grpSpPr/>
+      <p:grpSpPr>
+        <a:xfrm>
+          <a:off x="0" y="0"/>
+          <a:ext cx="0" cy="0"/>
+          <a:chOff x="0" y="0"/>
+          <a:chExt cx="0" cy="0"/>
+        </a:xfrm>
+      </p:grpSpPr>
       <p:sp>
         <p:nvSpPr>
           <p:cNvPr id="2" name="Rectangle 1"/>
@@ -4264,6 +9091,7 @@
           <a:lstStyle/>
           <a:p>
             <a:pPr algn="ctr"/>
+            <a:endParaRPr/>
           </a:p>
         </p:txBody>
       </p:sp>
@@ -4284,7 +9112,7 @@
           <a:noFill/>
         </p:spPr>
         <p:txBody>
-          <a:bodyPr wrap="square" anchor="t" lIns="0" rIns="0" tIns="0" bIns="0">
+          <a:bodyPr wrap="square" lIns="0" tIns="0" rIns="0" bIns="0" anchor="t">
             <a:spAutoFit/>
           </a:bodyPr>
           <a:lstStyle/>
@@ -4319,7 +9147,7 @@
           <a:noFill/>
         </p:spPr>
         <p:txBody>
-          <a:bodyPr wrap="square" anchor="t" lIns="0" rIns="0" tIns="0" bIns="0">
+          <a:bodyPr wrap="square" lIns="0" tIns="0" rIns="0" bIns="0" anchor="t">
             <a:spAutoFit/>
           </a:bodyPr>
           <a:lstStyle/>
@@ -4346,15 +9174,16 @@
           <p:nvPr/>
         </p:nvPicPr>
         <p:blipFill>
-          <a:blip r:embed="rId2"/>
+          <a:blip r:embed="rId3"/>
+          <a:srcRect t="19394"/>
           <a:stretch>
             <a:fillRect/>
           </a:stretch>
         </p:blipFill>
         <p:spPr>
           <a:xfrm>
-            <a:off x="548640" y="2455479"/>
-            <a:ext cx="7680960" cy="3135761"/>
+            <a:off x="129540" y="2366358"/>
+            <a:ext cx="8216918" cy="2703990"/>
           </a:xfrm>
           <a:prstGeom prst="rect">
             <a:avLst/>
@@ -4378,7 +9207,7 @@
           <a:noFill/>
         </p:spPr>
         <p:txBody>
-          <a:bodyPr wrap="square" anchor="t" lIns="0" rIns="0" tIns="0" bIns="0">
+          <a:bodyPr wrap="square" lIns="0" tIns="0" rIns="0" bIns="0" anchor="t">
             <a:spAutoFit/>
           </a:bodyPr>
           <a:lstStyle/>
@@ -4389,7 +9218,7 @@
               </a:lnSpc>
             </a:pPr>
             <a:r>
-              <a:rPr sz="1600" b="1" i="0">
+              <a:rPr sz="1600" b="1" i="0" dirty="0">
                 <a:solidFill>
                   <a:srgbClr val="0A2540"/>
                 </a:solidFill>
@@ -4405,7 +9234,7 @@
               </a:lnSpc>
             </a:pPr>
             <a:r>
-              <a:rPr sz="1300" b="0" i="0">
+              <a:rPr sz="1300" b="0" i="0" dirty="0">
                 <a:solidFill>
                   <a:srgbClr val="4A5568"/>
                 </a:solidFill>
@@ -4421,7 +9250,7 @@
               </a:lnSpc>
             </a:pPr>
             <a:r>
-              <a:rPr sz="1300" b="0" i="0">
+              <a:rPr sz="1300" b="0" i="0" dirty="0">
                 <a:solidFill>
                   <a:srgbClr val="4A5568"/>
                 </a:solidFill>
@@ -4437,7 +9266,7 @@
               </a:lnSpc>
             </a:pPr>
             <a:r>
-              <a:rPr sz="1000" b="0" i="0">
+              <a:rPr sz="1000" b="0" i="0" dirty="0">
                 <a:solidFill>
                   <a:srgbClr val="0A2540"/>
                 </a:solidFill>
@@ -4453,7 +9282,7 @@
               </a:lnSpc>
             </a:pPr>
             <a:r>
-              <a:rPr sz="1600" b="1" i="0">
+              <a:rPr sz="1600" b="1" i="0" dirty="0">
                 <a:solidFill>
                   <a:srgbClr val="0A2540"/>
                 </a:solidFill>
@@ -4469,7 +9298,7 @@
               </a:lnSpc>
             </a:pPr>
             <a:r>
-              <a:rPr sz="1300" b="0" i="0">
+              <a:rPr sz="1300" b="0" i="0" dirty="0">
                 <a:solidFill>
                   <a:srgbClr val="4A5568"/>
                 </a:solidFill>
@@ -4485,7 +9314,7 @@
               </a:lnSpc>
             </a:pPr>
             <a:r>
-              <a:rPr sz="1300" b="0" i="0">
+              <a:rPr sz="1300" b="0" i="0" dirty="0">
                 <a:solidFill>
                   <a:srgbClr val="4A5568"/>
                 </a:solidFill>
@@ -4501,7 +9330,7 @@
               </a:lnSpc>
             </a:pPr>
             <a:r>
-              <a:rPr sz="1000" b="0" i="0">
+              <a:rPr sz="1000" b="0" i="0" dirty="0">
                 <a:solidFill>
                   <a:srgbClr val="0A2540"/>
                 </a:solidFill>
@@ -4517,7 +9346,7 @@
               </a:lnSpc>
             </a:pPr>
             <a:r>
-              <a:rPr sz="1600" b="1" i="0">
+              <a:rPr sz="1600" b="1" i="0" dirty="0">
                 <a:solidFill>
                   <a:srgbClr val="0A2540"/>
                 </a:solidFill>
@@ -4533,7 +9362,7 @@
               </a:lnSpc>
             </a:pPr>
             <a:r>
-              <a:rPr sz="1300" b="0" i="0">
+              <a:rPr sz="1300" b="0" i="0" dirty="0">
                 <a:solidFill>
                   <a:srgbClr val="4A5568"/>
                 </a:solidFill>
@@ -4549,7 +9378,7 @@
               </a:lnSpc>
             </a:pPr>
             <a:r>
-              <a:rPr sz="1000" b="0" i="0">
+              <a:rPr sz="1000" b="0" i="0" dirty="0">
                 <a:solidFill>
                   <a:srgbClr val="0A2540"/>
                 </a:solidFill>
@@ -4565,7 +9394,7 @@
               </a:lnSpc>
             </a:pPr>
             <a:r>
-              <a:rPr sz="1600" b="1" i="0">
+              <a:rPr sz="1600" b="1" i="0" dirty="0">
                 <a:solidFill>
                   <a:srgbClr val="FF6B35"/>
                 </a:solidFill>
@@ -4581,7 +9410,7 @@
               </a:lnSpc>
             </a:pPr>
             <a:r>
-              <a:rPr sz="1300" b="0" i="0">
+              <a:rPr sz="1300" b="0" i="0" dirty="0">
                 <a:solidFill>
                   <a:srgbClr val="4A5568"/>
                 </a:solidFill>
@@ -4597,7 +9426,7 @@
               </a:lnSpc>
             </a:pPr>
             <a:r>
-              <a:rPr sz="1300" b="1" i="0">
+              <a:rPr sz="1300" b="1" i="0" dirty="0">
                 <a:solidFill>
                   <a:srgbClr val="0A2540"/>
                 </a:solidFill>
@@ -4613,7 +9442,7 @@
               </a:lnSpc>
             </a:pPr>
             <a:r>
-              <a:rPr sz="1000" b="0" i="0">
+              <a:rPr sz="1000" b="0" i="0" dirty="0">
                 <a:solidFill>
                   <a:srgbClr val="0A2540"/>
                 </a:solidFill>
@@ -4629,7 +9458,7 @@
               </a:lnSpc>
             </a:pPr>
             <a:r>
-              <a:rPr sz="1200" b="0" i="1">
+              <a:rPr sz="1200" b="0" i="1" dirty="0">
                 <a:solidFill>
                   <a:srgbClr val="64748B"/>
                 </a:solidFill>
@@ -4645,7 +9474,7 @@
               </a:lnSpc>
             </a:pPr>
             <a:r>
-              <a:rPr sz="1200" b="0" i="1">
+              <a:rPr sz="1200" b="0" i="1" dirty="0">
                 <a:solidFill>
                   <a:srgbClr val="64748B"/>
                 </a:solidFill>
@@ -4673,7 +9502,7 @@
           <a:noFill/>
         </p:spPr>
         <p:txBody>
-          <a:bodyPr wrap="square" anchor="t" lIns="0" rIns="0" tIns="0" bIns="0">
+          <a:bodyPr wrap="square" lIns="0" tIns="0" rIns="0" bIns="0" anchor="t">
             <a:spAutoFit/>
           </a:bodyPr>
           <a:lstStyle/>
@@ -4708,7 +9537,7 @@
           <a:noFill/>
         </p:spPr>
         <p:txBody>
-          <a:bodyPr wrap="square" anchor="t" lIns="0" rIns="0" tIns="0" bIns="0">
+          <a:bodyPr wrap="square" lIns="0" tIns="0" rIns="0" bIns="0" anchor="t">
             <a:spAutoFit/>
           </a:bodyPr>
           <a:lstStyle/>
@@ -4735,7 +9564,7 @@
 </file>
 
 <file path=ppt/slides/slide12.xml><?xml version="1.0" encoding="utf-8"?>
-<p:sld xmlns:a="http://schemas.openxmlformats.org/drawingml/2006/main" xmlns:p="http://schemas.openxmlformats.org/presentationml/2006/main" xmlns:r="http://schemas.openxmlformats.org/officeDocument/2006/relationships">
+<p:sld xmlns:a="http://schemas.openxmlformats.org/drawingml/2006/main" xmlns:r="http://schemas.openxmlformats.org/officeDocument/2006/relationships" xmlns:p="http://schemas.openxmlformats.org/presentationml/2006/main">
   <p:cSld>
     <p:spTree>
       <p:nvGrpSpPr>
@@ -4743,7 +9572,14 @@
         <p:cNvGrpSpPr/>
         <p:nvPr/>
       </p:nvGrpSpPr>
-      <p:grpSpPr/>
+      <p:grpSpPr>
+        <a:xfrm>
+          <a:off x="0" y="0"/>
+          <a:ext cx="0" cy="0"/>
+          <a:chOff x="0" y="0"/>
+          <a:chExt cx="0" cy="0"/>
+        </a:xfrm>
+      </p:grpSpPr>
       <p:sp>
         <p:nvSpPr>
           <p:cNvPr id="2" name="Rectangle 1"/>
@@ -4785,6 +9621,7 @@
           <a:lstStyle/>
           <a:p>
             <a:pPr algn="ctr"/>
+            <a:endParaRPr/>
           </a:p>
         </p:txBody>
       </p:sp>
@@ -4805,7 +9642,7 @@
           <a:noFill/>
         </p:spPr>
         <p:txBody>
-          <a:bodyPr wrap="square" anchor="t" lIns="0" rIns="0" tIns="0" bIns="0">
+          <a:bodyPr wrap="square" lIns="0" tIns="0" rIns="0" bIns="0" anchor="t">
             <a:spAutoFit/>
           </a:bodyPr>
           <a:lstStyle/>
@@ -4864,6 +9701,7 @@
           <a:lstStyle/>
           <a:p>
             <a:pPr algn="ctr"/>
+            <a:endParaRPr/>
           </a:p>
         </p:txBody>
       </p:sp>
@@ -4884,7 +9722,7 @@
           <a:noFill/>
         </p:spPr>
         <p:txBody>
-          <a:bodyPr wrap="square" anchor="ctr" lIns="0" rIns="0" tIns="0" bIns="0">
+          <a:bodyPr wrap="square" lIns="0" tIns="0" rIns="0" bIns="0" anchor="ctr">
             <a:spAutoFit/>
           </a:bodyPr>
           <a:lstStyle/>
@@ -4919,7 +9757,7 @@
           <a:noFill/>
         </p:spPr>
         <p:txBody>
-          <a:bodyPr wrap="square" anchor="t" lIns="0" rIns="0" tIns="0" bIns="0">
+          <a:bodyPr wrap="square" lIns="0" tIns="0" rIns="0" bIns="0" anchor="t">
             <a:spAutoFit/>
           </a:bodyPr>
           <a:lstStyle/>
@@ -4954,7 +9792,7 @@
           <a:noFill/>
         </p:spPr>
         <p:txBody>
-          <a:bodyPr wrap="square" anchor="t" lIns="0" rIns="0" tIns="0" bIns="0">
+          <a:bodyPr wrap="square" lIns="0" tIns="0" rIns="0" bIns="0" anchor="t">
             <a:spAutoFit/>
           </a:bodyPr>
           <a:lstStyle/>
@@ -5013,6 +9851,7 @@
           <a:lstStyle/>
           <a:p>
             <a:pPr algn="ctr"/>
+            <a:endParaRPr/>
           </a:p>
         </p:txBody>
       </p:sp>
@@ -5033,7 +9872,7 @@
           <a:noFill/>
         </p:spPr>
         <p:txBody>
-          <a:bodyPr wrap="square" anchor="ctr" lIns="0" rIns="0" tIns="0" bIns="0">
+          <a:bodyPr wrap="square" lIns="0" tIns="0" rIns="0" bIns="0" anchor="ctr">
             <a:spAutoFit/>
           </a:bodyPr>
           <a:lstStyle/>
@@ -5068,7 +9907,7 @@
           <a:noFill/>
         </p:spPr>
         <p:txBody>
-          <a:bodyPr wrap="square" anchor="t" lIns="0" rIns="0" tIns="0" bIns="0">
+          <a:bodyPr wrap="square" lIns="0" tIns="0" rIns="0" bIns="0" anchor="t">
             <a:spAutoFit/>
           </a:bodyPr>
           <a:lstStyle/>
@@ -5103,7 +9942,7 @@
           <a:noFill/>
         </p:spPr>
         <p:txBody>
-          <a:bodyPr wrap="square" anchor="t" lIns="0" rIns="0" tIns="0" bIns="0">
+          <a:bodyPr wrap="square" lIns="0" tIns="0" rIns="0" bIns="0" anchor="t">
             <a:spAutoFit/>
           </a:bodyPr>
           <a:lstStyle/>
@@ -5138,7 +9977,7 @@
           <a:noFill/>
         </p:spPr>
         <p:txBody>
-          <a:bodyPr wrap="square" anchor="t" lIns="0" rIns="0" tIns="0" bIns="0">
+          <a:bodyPr wrap="square" lIns="0" tIns="0" rIns="0" bIns="0" anchor="t">
             <a:spAutoFit/>
           </a:bodyPr>
           <a:lstStyle/>
@@ -5149,7 +9988,7 @@
               </a:lnSpc>
             </a:pPr>
             <a:r>
-              <a:rPr sz="1400" b="0" i="0">
+              <a:rPr sz="1400" b="0" i="0" dirty="0">
                 <a:solidFill>
                   <a:srgbClr val="0A2540"/>
                 </a:solidFill>
@@ -5165,7 +10004,7 @@
               </a:lnSpc>
             </a:pPr>
             <a:r>
-              <a:rPr sz="1400" b="0" i="1">
+              <a:rPr sz="1400" b="0" i="1" dirty="0">
                 <a:solidFill>
                   <a:srgbClr val="FF6B35"/>
                 </a:solidFill>
@@ -5193,7 +10032,7 @@
           <a:noFill/>
         </p:spPr>
         <p:txBody>
-          <a:bodyPr wrap="square" anchor="t" lIns="0" rIns="0" tIns="0" bIns="0">
+          <a:bodyPr wrap="square" lIns="0" tIns="0" rIns="0" bIns="0" anchor="t">
             <a:spAutoFit/>
           </a:bodyPr>
           <a:lstStyle/>
@@ -5228,7 +10067,7 @@
           <a:noFill/>
         </p:spPr>
         <p:txBody>
-          <a:bodyPr wrap="square" anchor="t" lIns="0" rIns="0" tIns="0" bIns="0">
+          <a:bodyPr wrap="square" lIns="0" tIns="0" rIns="0" bIns="0" anchor="t">
             <a:spAutoFit/>
           </a:bodyPr>
           <a:lstStyle/>
@@ -5255,7 +10094,7 @@
 </file>
 
 <file path=ppt/slides/slide13.xml><?xml version="1.0" encoding="utf-8"?>
-<p:sld xmlns:a="http://schemas.openxmlformats.org/drawingml/2006/main" xmlns:p="http://schemas.openxmlformats.org/presentationml/2006/main" xmlns:r="http://schemas.openxmlformats.org/officeDocument/2006/relationships">
+<p:sld xmlns:a="http://schemas.openxmlformats.org/drawingml/2006/main" xmlns:r="http://schemas.openxmlformats.org/officeDocument/2006/relationships" xmlns:p="http://schemas.openxmlformats.org/presentationml/2006/main">
   <p:cSld>
     <p:spTree>
       <p:nvGrpSpPr>
@@ -5263,7 +10102,14 @@
         <p:cNvGrpSpPr/>
         <p:nvPr/>
       </p:nvGrpSpPr>
-      <p:grpSpPr/>
+      <p:grpSpPr>
+        <a:xfrm>
+          <a:off x="0" y="0"/>
+          <a:ext cx="0" cy="0"/>
+          <a:chOff x="0" y="0"/>
+          <a:chExt cx="0" cy="0"/>
+        </a:xfrm>
+      </p:grpSpPr>
       <p:sp>
         <p:nvSpPr>
           <p:cNvPr id="2" name="Rectangle 1"/>
@@ -5305,6 +10151,7 @@
           <a:lstStyle/>
           <a:p>
             <a:pPr algn="ctr"/>
+            <a:endParaRPr/>
           </a:p>
         </p:txBody>
       </p:sp>
@@ -5325,7 +10172,7 @@
           <a:noFill/>
         </p:spPr>
         <p:txBody>
-          <a:bodyPr wrap="square" anchor="t" lIns="0" rIns="0" tIns="0" bIns="0">
+          <a:bodyPr wrap="square" lIns="0" tIns="0" rIns="0" bIns="0" anchor="t">
             <a:spAutoFit/>
           </a:bodyPr>
           <a:lstStyle/>
@@ -5360,7 +10207,7 @@
           <a:noFill/>
         </p:spPr>
         <p:txBody>
-          <a:bodyPr wrap="square" anchor="t" lIns="0" rIns="0" tIns="0" bIns="0">
+          <a:bodyPr wrap="square" lIns="0" tIns="0" rIns="0" bIns="0" anchor="t">
             <a:spAutoFit/>
           </a:bodyPr>
           <a:lstStyle/>
@@ -5422,6 +10269,7 @@
           <a:lstStyle/>
           <a:p>
             <a:pPr algn="ctr"/>
+            <a:endParaRPr/>
           </a:p>
         </p:txBody>
       </p:sp>
@@ -5442,7 +10290,7 @@
           <a:noFill/>
         </p:spPr>
         <p:txBody>
-          <a:bodyPr wrap="square" anchor="t" lIns="0" rIns="0" tIns="0" bIns="0">
+          <a:bodyPr wrap="square" lIns="0" tIns="0" rIns="0" bIns="0" anchor="t">
             <a:spAutoFit/>
           </a:bodyPr>
           <a:lstStyle/>
@@ -5477,7 +10325,7 @@
           <a:noFill/>
         </p:spPr>
         <p:txBody>
-          <a:bodyPr wrap="square" anchor="t" lIns="0" rIns="0" tIns="0" bIns="0">
+          <a:bodyPr wrap="square" lIns="0" tIns="0" rIns="0" bIns="0" anchor="t">
             <a:spAutoFit/>
           </a:bodyPr>
           <a:lstStyle/>
@@ -5512,7 +10360,7 @@
           <a:noFill/>
         </p:spPr>
         <p:txBody>
-          <a:bodyPr wrap="square" anchor="t" lIns="0" rIns="0" tIns="0" bIns="0">
+          <a:bodyPr wrap="square" lIns="0" tIns="0" rIns="0" bIns="0" anchor="t">
             <a:spAutoFit/>
           </a:bodyPr>
           <a:lstStyle/>
@@ -5547,7 +10395,7 @@
           <a:noFill/>
         </p:spPr>
         <p:txBody>
-          <a:bodyPr wrap="square" anchor="t" lIns="0" rIns="0" tIns="0" bIns="0">
+          <a:bodyPr wrap="square" lIns="0" tIns="0" rIns="0" bIns="0" anchor="t">
             <a:spAutoFit/>
           </a:bodyPr>
           <a:lstStyle/>
@@ -5574,7 +10422,7 @@
 </file>
 
 <file path=ppt/slides/slide2.xml><?xml version="1.0" encoding="utf-8"?>
-<p:sld xmlns:a="http://schemas.openxmlformats.org/drawingml/2006/main" xmlns:p="http://schemas.openxmlformats.org/presentationml/2006/main" xmlns:r="http://schemas.openxmlformats.org/officeDocument/2006/relationships">
+<p:sld xmlns:a="http://schemas.openxmlformats.org/drawingml/2006/main" xmlns:r="http://schemas.openxmlformats.org/officeDocument/2006/relationships" xmlns:p="http://schemas.openxmlformats.org/presentationml/2006/main">
   <p:cSld>
     <p:spTree>
       <p:nvGrpSpPr>
@@ -5582,7 +10430,14 @@
         <p:cNvGrpSpPr/>
         <p:nvPr/>
       </p:nvGrpSpPr>
-      <p:grpSpPr/>
+      <p:grpSpPr>
+        <a:xfrm>
+          <a:off x="0" y="0"/>
+          <a:ext cx="0" cy="0"/>
+          <a:chOff x="0" y="0"/>
+          <a:chExt cx="0" cy="0"/>
+        </a:xfrm>
+      </p:grpSpPr>
       <p:sp>
         <p:nvSpPr>
           <p:cNvPr id="2" name="Rectangle 1"/>
@@ -5624,6 +10479,7 @@
           <a:lstStyle/>
           <a:p>
             <a:pPr algn="ctr"/>
+            <a:endParaRPr/>
           </a:p>
         </p:txBody>
       </p:sp>
@@ -5644,7 +10500,7 @@
           <a:noFill/>
         </p:spPr>
         <p:txBody>
-          <a:bodyPr wrap="square" anchor="t" lIns="0" rIns="0" tIns="0" bIns="0">
+          <a:bodyPr wrap="square" lIns="0" tIns="0" rIns="0" bIns="0" anchor="t">
             <a:spAutoFit/>
           </a:bodyPr>
           <a:lstStyle/>
@@ -5679,7 +10535,7 @@
           <a:noFill/>
         </p:spPr>
         <p:txBody>
-          <a:bodyPr wrap="square" anchor="ctr" lIns="0" rIns="0" tIns="0" bIns="0">
+          <a:bodyPr wrap="square" lIns="0" tIns="0" rIns="0" bIns="0" anchor="ctr">
             <a:spAutoFit/>
           </a:bodyPr>
           <a:lstStyle/>
@@ -5714,7 +10570,7 @@
           <a:noFill/>
         </p:spPr>
         <p:txBody>
-          <a:bodyPr wrap="square" anchor="t" lIns="0" rIns="0" tIns="0" bIns="0">
+          <a:bodyPr wrap="square" lIns="0" tIns="0" rIns="0" bIns="0" anchor="t">
             <a:spAutoFit/>
           </a:bodyPr>
           <a:lstStyle/>
@@ -5749,7 +10605,7 @@
           <a:noFill/>
         </p:spPr>
         <p:txBody>
-          <a:bodyPr wrap="square" anchor="t" lIns="0" rIns="0" tIns="0" bIns="0">
+          <a:bodyPr wrap="square" lIns="0" tIns="0" rIns="0" bIns="0" anchor="t">
             <a:spAutoFit/>
           </a:bodyPr>
           <a:lstStyle/>
@@ -5784,7 +10640,7 @@
           <a:noFill/>
         </p:spPr>
         <p:txBody>
-          <a:bodyPr wrap="square" anchor="t" lIns="0" rIns="0" tIns="0" bIns="0">
+          <a:bodyPr wrap="square" lIns="0" tIns="0" rIns="0" bIns="0" anchor="t">
             <a:spAutoFit/>
           </a:bodyPr>
           <a:lstStyle/>
@@ -5795,7 +10651,7 @@
               </a:lnSpc>
             </a:pPr>
             <a:r>
-              <a:rPr sz="2200" b="1" i="0">
+              <a:rPr sz="2200" b="1" i="0" dirty="0">
                 <a:solidFill>
                   <a:srgbClr val="0A2540"/>
                 </a:solidFill>
@@ -5811,7 +10667,7 @@
               </a:lnSpc>
             </a:pPr>
             <a:r>
-              <a:rPr sz="800" b="0" i="0">
+              <a:rPr sz="800" b="0" i="0" dirty="0">
                 <a:solidFill>
                   <a:srgbClr val="0A2540"/>
                 </a:solidFill>
@@ -5827,7 +10683,7 @@
               </a:lnSpc>
             </a:pPr>
             <a:r>
-              <a:rPr sz="1600" b="0" i="0">
+              <a:rPr sz="1600" b="0" i="0" dirty="0">
                 <a:solidFill>
                   <a:srgbClr val="4A5568"/>
                 </a:solidFill>
@@ -5843,7 +10699,7 @@
               </a:lnSpc>
             </a:pPr>
             <a:r>
-              <a:rPr sz="1600" b="1" i="0">
+              <a:rPr sz="1600" b="1" i="0" dirty="0">
                 <a:solidFill>
                   <a:srgbClr val="0A2540"/>
                 </a:solidFill>
@@ -5859,7 +10715,7 @@
               </a:lnSpc>
             </a:pPr>
             <a:r>
-              <a:rPr sz="1200" b="0" i="0">
+              <a:rPr sz="1200" b="0" i="0" dirty="0">
                 <a:solidFill>
                   <a:srgbClr val="0A2540"/>
                 </a:solidFill>
@@ -5875,7 +10731,7 @@
               </a:lnSpc>
             </a:pPr>
             <a:r>
-              <a:rPr sz="1600" b="0" i="0">
+              <a:rPr sz="1600" b="0" i="0" dirty="0">
                 <a:solidFill>
                   <a:srgbClr val="4A5568"/>
                 </a:solidFill>
@@ -5891,7 +10747,7 @@
               </a:lnSpc>
             </a:pPr>
             <a:r>
-              <a:rPr sz="1600" b="0" i="1">
+              <a:rPr sz="1600" b="0" i="1" dirty="0">
                 <a:solidFill>
                   <a:srgbClr val="FF6B35"/>
                 </a:solidFill>
@@ -5907,7 +10763,7 @@
               </a:lnSpc>
             </a:pPr>
             <a:r>
-              <a:rPr sz="1600" b="0" i="0">
+              <a:rPr sz="1600" b="0" i="0" dirty="0">
                 <a:solidFill>
                   <a:srgbClr val="4A5568"/>
                 </a:solidFill>
@@ -5923,7 +10779,7 @@
               </a:lnSpc>
             </a:pPr>
             <a:r>
-              <a:rPr sz="1600" b="0" i="1">
+              <a:rPr sz="1600" b="0" i="1" dirty="0">
                 <a:solidFill>
                   <a:srgbClr val="FF6B35"/>
                 </a:solidFill>
@@ -5939,7 +10795,7 @@
               </a:lnSpc>
             </a:pPr>
             <a:r>
-              <a:rPr sz="1200" b="0" i="0">
+              <a:rPr sz="1200" b="0" i="0" dirty="0">
                 <a:solidFill>
                   <a:srgbClr val="0A2540"/>
                 </a:solidFill>
@@ -5955,7 +10811,7 @@
               </a:lnSpc>
             </a:pPr>
             <a:r>
-              <a:rPr sz="1700" b="1" i="0">
+              <a:rPr sz="1700" b="1" i="0" dirty="0">
                 <a:solidFill>
                   <a:srgbClr val="0A2540"/>
                 </a:solidFill>
@@ -5983,7 +10839,7 @@
           <a:noFill/>
         </p:spPr>
         <p:txBody>
-          <a:bodyPr wrap="square" anchor="t" lIns="0" rIns="0" tIns="0" bIns="0">
+          <a:bodyPr wrap="square" lIns="0" tIns="0" rIns="0" bIns="0" anchor="t">
             <a:spAutoFit/>
           </a:bodyPr>
           <a:lstStyle/>
@@ -6018,7 +10874,7 @@
           <a:noFill/>
         </p:spPr>
         <p:txBody>
-          <a:bodyPr wrap="square" anchor="t" lIns="0" rIns="0" tIns="0" bIns="0">
+          <a:bodyPr wrap="square" lIns="0" tIns="0" rIns="0" bIns="0" anchor="t">
             <a:spAutoFit/>
           </a:bodyPr>
           <a:lstStyle/>
@@ -6045,7 +10901,7 @@
 </file>
 
 <file path=ppt/slides/slide3.xml><?xml version="1.0" encoding="utf-8"?>
-<p:sld xmlns:a="http://schemas.openxmlformats.org/drawingml/2006/main" xmlns:p="http://schemas.openxmlformats.org/presentationml/2006/main" xmlns:r="http://schemas.openxmlformats.org/officeDocument/2006/relationships">
+<p:sld xmlns:a="http://schemas.openxmlformats.org/drawingml/2006/main" xmlns:r="http://schemas.openxmlformats.org/officeDocument/2006/relationships" xmlns:p="http://schemas.openxmlformats.org/presentationml/2006/main">
   <p:cSld>
     <p:spTree>
       <p:nvGrpSpPr>
@@ -6053,7 +10909,14 @@
         <p:cNvGrpSpPr/>
         <p:nvPr/>
       </p:nvGrpSpPr>
-      <p:grpSpPr/>
+      <p:grpSpPr>
+        <a:xfrm>
+          <a:off x="0" y="0"/>
+          <a:ext cx="0" cy="0"/>
+          <a:chOff x="0" y="0"/>
+          <a:chExt cx="0" cy="0"/>
+        </a:xfrm>
+      </p:grpSpPr>
       <p:sp>
         <p:nvSpPr>
           <p:cNvPr id="2" name="Rectangle 1"/>
@@ -6095,6 +10958,7 @@
           <a:lstStyle/>
           <a:p>
             <a:pPr algn="ctr"/>
+            <a:endParaRPr/>
           </a:p>
         </p:txBody>
       </p:sp>
@@ -6115,7 +10979,7 @@
           <a:noFill/>
         </p:spPr>
         <p:txBody>
-          <a:bodyPr wrap="square" anchor="t" lIns="0" rIns="0" tIns="0" bIns="0">
+          <a:bodyPr wrap="square" lIns="0" tIns="0" rIns="0" bIns="0" anchor="t">
             <a:spAutoFit/>
           </a:bodyPr>
           <a:lstStyle/>
@@ -6150,7 +11014,7 @@
           <a:noFill/>
         </p:spPr>
         <p:txBody>
-          <a:bodyPr wrap="square" anchor="t" lIns="0" rIns="0" tIns="0" bIns="0">
+          <a:bodyPr wrap="square" lIns="0" tIns="0" rIns="0" bIns="0" anchor="t">
             <a:spAutoFit/>
           </a:bodyPr>
           <a:lstStyle/>
@@ -6211,6 +11075,7 @@
           <a:lstStyle/>
           <a:p>
             <a:pPr algn="ctr"/>
+            <a:endParaRPr/>
           </a:p>
         </p:txBody>
       </p:sp>
@@ -6255,6 +11120,7 @@
           <a:lstStyle/>
           <a:p>
             <a:pPr algn="ctr"/>
+            <a:endParaRPr/>
           </a:p>
         </p:txBody>
       </p:sp>
@@ -6275,7 +11141,7 @@
           <a:noFill/>
         </p:spPr>
         <p:txBody>
-          <a:bodyPr wrap="square" anchor="ctr" lIns="0" rIns="0" tIns="0" bIns="0">
+          <a:bodyPr wrap="square" lIns="0" tIns="0" rIns="0" bIns="0" anchor="ctr">
             <a:spAutoFit/>
           </a:bodyPr>
           <a:lstStyle/>
@@ -6310,7 +11176,7 @@
           <a:noFill/>
         </p:spPr>
         <p:txBody>
-          <a:bodyPr wrap="square" anchor="ctr" lIns="0" rIns="0" tIns="0" bIns="0">
+          <a:bodyPr wrap="square" lIns="0" tIns="0" rIns="0" bIns="0" anchor="ctr">
             <a:spAutoFit/>
           </a:bodyPr>
           <a:lstStyle/>
@@ -6345,7 +11211,7 @@
           <a:noFill/>
         </p:spPr>
         <p:txBody>
-          <a:bodyPr wrap="square" anchor="ctr" lIns="0" rIns="0" tIns="0" bIns="0">
+          <a:bodyPr wrap="square" lIns="0" tIns="0" rIns="0" bIns="0" anchor="ctr">
             <a:spAutoFit/>
           </a:bodyPr>
           <a:lstStyle/>
@@ -6406,6 +11272,7 @@
           <a:lstStyle/>
           <a:p>
             <a:pPr algn="ctr"/>
+            <a:endParaRPr/>
           </a:p>
         </p:txBody>
       </p:sp>
@@ -6450,6 +11317,7 @@
           <a:lstStyle/>
           <a:p>
             <a:pPr algn="ctr"/>
+            <a:endParaRPr/>
           </a:p>
         </p:txBody>
       </p:sp>
@@ -6470,7 +11338,7 @@
           <a:noFill/>
         </p:spPr>
         <p:txBody>
-          <a:bodyPr wrap="square" anchor="ctr" lIns="0" rIns="0" tIns="0" bIns="0">
+          <a:bodyPr wrap="square" lIns="0" tIns="0" rIns="0" bIns="0" anchor="ctr">
             <a:spAutoFit/>
           </a:bodyPr>
           <a:lstStyle/>
@@ -6505,7 +11373,7 @@
           <a:noFill/>
         </p:spPr>
         <p:txBody>
-          <a:bodyPr wrap="square" anchor="ctr" lIns="0" rIns="0" tIns="0" bIns="0">
+          <a:bodyPr wrap="square" lIns="0" tIns="0" rIns="0" bIns="0" anchor="ctr">
             <a:spAutoFit/>
           </a:bodyPr>
           <a:lstStyle/>
@@ -6540,7 +11408,7 @@
           <a:noFill/>
         </p:spPr>
         <p:txBody>
-          <a:bodyPr wrap="square" anchor="ctr" lIns="0" rIns="0" tIns="0" bIns="0">
+          <a:bodyPr wrap="square" lIns="0" tIns="0" rIns="0" bIns="0" anchor="ctr">
             <a:spAutoFit/>
           </a:bodyPr>
           <a:lstStyle/>
@@ -6601,6 +11469,7 @@
           <a:lstStyle/>
           <a:p>
             <a:pPr algn="ctr"/>
+            <a:endParaRPr/>
           </a:p>
         </p:txBody>
       </p:sp>
@@ -6645,6 +11514,7 @@
           <a:lstStyle/>
           <a:p>
             <a:pPr algn="ctr"/>
+            <a:endParaRPr/>
           </a:p>
         </p:txBody>
       </p:sp>
@@ -6665,7 +11535,7 @@
           <a:noFill/>
         </p:spPr>
         <p:txBody>
-          <a:bodyPr wrap="square" anchor="ctr" lIns="0" rIns="0" tIns="0" bIns="0">
+          <a:bodyPr wrap="square" lIns="0" tIns="0" rIns="0" bIns="0" anchor="ctr">
             <a:spAutoFit/>
           </a:bodyPr>
           <a:lstStyle/>
@@ -6700,7 +11570,7 @@
           <a:noFill/>
         </p:spPr>
         <p:txBody>
-          <a:bodyPr wrap="square" anchor="ctr" lIns="0" rIns="0" tIns="0" bIns="0">
+          <a:bodyPr wrap="square" lIns="0" tIns="0" rIns="0" bIns="0" anchor="ctr">
             <a:spAutoFit/>
           </a:bodyPr>
           <a:lstStyle/>
@@ -6735,7 +11605,7 @@
           <a:noFill/>
         </p:spPr>
         <p:txBody>
-          <a:bodyPr wrap="square" anchor="ctr" lIns="0" rIns="0" tIns="0" bIns="0">
+          <a:bodyPr wrap="square" lIns="0" tIns="0" rIns="0" bIns="0" anchor="ctr">
             <a:spAutoFit/>
           </a:bodyPr>
           <a:lstStyle/>
@@ -6796,6 +11666,7 @@
           <a:lstStyle/>
           <a:p>
             <a:pPr algn="ctr"/>
+            <a:endParaRPr/>
           </a:p>
         </p:txBody>
       </p:sp>
@@ -6840,6 +11711,7 @@
           <a:lstStyle/>
           <a:p>
             <a:pPr algn="ctr"/>
+            <a:endParaRPr/>
           </a:p>
         </p:txBody>
       </p:sp>
@@ -6860,7 +11732,7 @@
           <a:noFill/>
         </p:spPr>
         <p:txBody>
-          <a:bodyPr wrap="square" anchor="ctr" lIns="0" rIns="0" tIns="0" bIns="0">
+          <a:bodyPr wrap="square" lIns="0" tIns="0" rIns="0" bIns="0" anchor="ctr">
             <a:spAutoFit/>
           </a:bodyPr>
           <a:lstStyle/>
@@ -6895,7 +11767,7 @@
           <a:noFill/>
         </p:spPr>
         <p:txBody>
-          <a:bodyPr wrap="square" anchor="ctr" lIns="0" rIns="0" tIns="0" bIns="0">
+          <a:bodyPr wrap="square" lIns="0" tIns="0" rIns="0" bIns="0" anchor="ctr">
             <a:spAutoFit/>
           </a:bodyPr>
           <a:lstStyle/>
@@ -6930,7 +11802,7 @@
           <a:noFill/>
         </p:spPr>
         <p:txBody>
-          <a:bodyPr wrap="square" anchor="ctr" lIns="0" rIns="0" tIns="0" bIns="0">
+          <a:bodyPr wrap="square" lIns="0" tIns="0" rIns="0" bIns="0" anchor="ctr">
             <a:spAutoFit/>
           </a:bodyPr>
           <a:lstStyle/>
@@ -6965,7 +11837,7 @@
           <a:noFill/>
         </p:spPr>
         <p:txBody>
-          <a:bodyPr wrap="square" anchor="t" lIns="0" rIns="0" tIns="0" bIns="0">
+          <a:bodyPr wrap="square" lIns="0" tIns="0" rIns="0" bIns="0" anchor="t">
             <a:spAutoFit/>
           </a:bodyPr>
           <a:lstStyle/>
@@ -7084,7 +11956,7 @@
           <a:noFill/>
         </p:spPr>
         <p:txBody>
-          <a:bodyPr wrap="square" anchor="t" lIns="0" rIns="0" tIns="0" bIns="0">
+          <a:bodyPr wrap="square" lIns="0" tIns="0" rIns="0" bIns="0" anchor="t">
             <a:spAutoFit/>
           </a:bodyPr>
           <a:lstStyle/>
@@ -7119,7 +11991,7 @@
           <a:noFill/>
         </p:spPr>
         <p:txBody>
-          <a:bodyPr wrap="square" anchor="t" lIns="0" rIns="0" tIns="0" bIns="0">
+          <a:bodyPr wrap="square" lIns="0" tIns="0" rIns="0" bIns="0" anchor="t">
             <a:spAutoFit/>
           </a:bodyPr>
           <a:lstStyle/>
@@ -7146,7 +12018,7 @@
 </file>
 
 <file path=ppt/slides/slide4.xml><?xml version="1.0" encoding="utf-8"?>
-<p:sld xmlns:a="http://schemas.openxmlformats.org/drawingml/2006/main" xmlns:p="http://schemas.openxmlformats.org/presentationml/2006/main" xmlns:r="http://schemas.openxmlformats.org/officeDocument/2006/relationships">
+<p:sld xmlns:a="http://schemas.openxmlformats.org/drawingml/2006/main" xmlns:r="http://schemas.openxmlformats.org/officeDocument/2006/relationships" xmlns:p="http://schemas.openxmlformats.org/presentationml/2006/main">
   <p:cSld>
     <p:spTree>
       <p:nvGrpSpPr>
@@ -7154,7 +12026,14 @@
         <p:cNvGrpSpPr/>
         <p:nvPr/>
       </p:nvGrpSpPr>
-      <p:grpSpPr/>
+      <p:grpSpPr>
+        <a:xfrm>
+          <a:off x="0" y="0"/>
+          <a:ext cx="0" cy="0"/>
+          <a:chOff x="0" y="0"/>
+          <a:chExt cx="0" cy="0"/>
+        </a:xfrm>
+      </p:grpSpPr>
       <p:sp>
         <p:nvSpPr>
           <p:cNvPr id="2" name="Rectangle 1"/>
@@ -7196,6 +12075,7 @@
           <a:lstStyle/>
           <a:p>
             <a:pPr algn="ctr"/>
+            <a:endParaRPr/>
           </a:p>
         </p:txBody>
       </p:sp>
@@ -7216,7 +12096,7 @@
           <a:noFill/>
         </p:spPr>
         <p:txBody>
-          <a:bodyPr wrap="square" anchor="t" lIns="0" rIns="0" tIns="0" bIns="0">
+          <a:bodyPr wrap="square" lIns="0" tIns="0" rIns="0" bIns="0" anchor="t">
             <a:spAutoFit/>
           </a:bodyPr>
           <a:lstStyle/>
@@ -7251,7 +12131,7 @@
           <a:noFill/>
         </p:spPr>
         <p:txBody>
-          <a:bodyPr wrap="square" anchor="t" lIns="0" rIns="0" tIns="0" bIns="0">
+          <a:bodyPr wrap="square" lIns="0" tIns="0" rIns="0" bIns="0" anchor="t">
             <a:spAutoFit/>
           </a:bodyPr>
           <a:lstStyle/>
@@ -7278,15 +12158,16 @@
           <p:nvPr/>
         </p:nvPicPr>
         <p:blipFill>
-          <a:blip r:embed="rId2"/>
+          <a:blip r:embed="rId3"/>
+          <a:srcRect b="3000"/>
           <a:stretch>
             <a:fillRect/>
           </a:stretch>
         </p:blipFill>
         <p:spPr>
           <a:xfrm>
-            <a:off x="1676988" y="1737360"/>
-            <a:ext cx="5058504" cy="4572000"/>
+            <a:off x="1609724" y="1601877"/>
+            <a:ext cx="5419725" cy="4751526"/>
           </a:xfrm>
           <a:prstGeom prst="rect">
             <a:avLst/>
@@ -7310,7 +12191,7 @@
           <a:noFill/>
         </p:spPr>
         <p:txBody>
-          <a:bodyPr wrap="square" anchor="t" lIns="0" rIns="0" tIns="0" bIns="0">
+          <a:bodyPr wrap="square" lIns="0" tIns="0" rIns="0" bIns="0" anchor="t">
             <a:spAutoFit/>
           </a:bodyPr>
           <a:lstStyle/>
@@ -7557,7 +12438,7 @@
           <a:noFill/>
         </p:spPr>
         <p:txBody>
-          <a:bodyPr wrap="square" anchor="t" lIns="0" rIns="0" tIns="0" bIns="0">
+          <a:bodyPr wrap="square" lIns="0" tIns="0" rIns="0" bIns="0" anchor="t">
             <a:spAutoFit/>
           </a:bodyPr>
           <a:lstStyle/>
@@ -7592,7 +12473,7 @@
           <a:noFill/>
         </p:spPr>
         <p:txBody>
-          <a:bodyPr wrap="square" anchor="t" lIns="0" rIns="0" tIns="0" bIns="0">
+          <a:bodyPr wrap="square" lIns="0" tIns="0" rIns="0" bIns="0" anchor="t">
             <a:spAutoFit/>
           </a:bodyPr>
           <a:lstStyle/>
@@ -7619,7 +12500,7 @@
 </file>
 
 <file path=ppt/slides/slide5.xml><?xml version="1.0" encoding="utf-8"?>
-<p:sld xmlns:a="http://schemas.openxmlformats.org/drawingml/2006/main" xmlns:p="http://schemas.openxmlformats.org/presentationml/2006/main" xmlns:r="http://schemas.openxmlformats.org/officeDocument/2006/relationships">
+<p:sld xmlns:a="http://schemas.openxmlformats.org/drawingml/2006/main" xmlns:r="http://schemas.openxmlformats.org/officeDocument/2006/relationships" xmlns:p="http://schemas.openxmlformats.org/presentationml/2006/main">
   <p:cSld>
     <p:spTree>
       <p:nvGrpSpPr>
@@ -7627,7 +12508,14 @@
         <p:cNvGrpSpPr/>
         <p:nvPr/>
       </p:nvGrpSpPr>
-      <p:grpSpPr/>
+      <p:grpSpPr>
+        <a:xfrm>
+          <a:off x="0" y="0"/>
+          <a:ext cx="0" cy="0"/>
+          <a:chOff x="0" y="0"/>
+          <a:chExt cx="0" cy="0"/>
+        </a:xfrm>
+      </p:grpSpPr>
       <p:sp>
         <p:nvSpPr>
           <p:cNvPr id="2" name="Rectangle 1"/>
@@ -7669,6 +12557,7 @@
           <a:lstStyle/>
           <a:p>
             <a:pPr algn="ctr"/>
+            <a:endParaRPr/>
           </a:p>
         </p:txBody>
       </p:sp>
@@ -7689,7 +12578,7 @@
           <a:noFill/>
         </p:spPr>
         <p:txBody>
-          <a:bodyPr wrap="square" anchor="t" lIns="0" rIns="0" tIns="0" bIns="0">
+          <a:bodyPr wrap="square" lIns="0" tIns="0" rIns="0" bIns="0" anchor="t">
             <a:spAutoFit/>
           </a:bodyPr>
           <a:lstStyle/>
@@ -7724,7 +12613,7 @@
           <a:noFill/>
         </p:spPr>
         <p:txBody>
-          <a:bodyPr wrap="square" anchor="t" lIns="0" rIns="0" tIns="0" bIns="0">
+          <a:bodyPr wrap="square" lIns="0" tIns="0" rIns="0" bIns="0" anchor="t">
             <a:spAutoFit/>
           </a:bodyPr>
           <a:lstStyle/>
@@ -7759,7 +12648,7 @@
           <a:noFill/>
         </p:spPr>
         <p:txBody>
-          <a:bodyPr wrap="square" anchor="t" lIns="0" rIns="0" tIns="0" bIns="0">
+          <a:bodyPr wrap="square" lIns="0" tIns="0" rIns="0" bIns="0" anchor="t">
             <a:spAutoFit/>
           </a:bodyPr>
           <a:lstStyle/>
@@ -7770,7 +12659,7 @@
               </a:lnSpc>
             </a:pPr>
             <a:r>
-              <a:rPr sz="1800" b="1" i="0">
+              <a:rPr sz="1800" b="1" i="0" dirty="0">
                 <a:solidFill>
                   <a:srgbClr val="0A2540"/>
                 </a:solidFill>
@@ -7786,7 +12675,7 @@
               </a:lnSpc>
             </a:pPr>
             <a:r>
-              <a:rPr sz="800" b="0" i="0">
+              <a:rPr sz="800" b="0" i="0" dirty="0">
                 <a:solidFill>
                   <a:srgbClr val="0A2540"/>
                 </a:solidFill>
@@ -7802,7 +12691,7 @@
               </a:lnSpc>
             </a:pPr>
             <a:r>
-              <a:rPr sz="1400" b="0" i="0">
+              <a:rPr sz="1400" b="0" i="0" dirty="0">
                 <a:solidFill>
                   <a:srgbClr val="4A5568"/>
                 </a:solidFill>
@@ -7818,7 +12707,7 @@
               </a:lnSpc>
             </a:pPr>
             <a:r>
-              <a:rPr sz="1400" b="0" i="0">
+              <a:rPr sz="1400" b="0" i="0" dirty="0">
                 <a:solidFill>
                   <a:srgbClr val="4A5568"/>
                 </a:solidFill>
@@ -7834,7 +12723,7 @@
               </a:lnSpc>
             </a:pPr>
             <a:r>
-              <a:rPr sz="1400" b="0" i="0">
+              <a:rPr sz="1400" b="0" i="0" dirty="0">
                 <a:solidFill>
                   <a:srgbClr val="4A5568"/>
                 </a:solidFill>
@@ -7850,7 +12739,7 @@
               </a:lnSpc>
             </a:pPr>
             <a:r>
-              <a:rPr sz="800" b="0" i="0">
+              <a:rPr sz="800" b="0" i="0" dirty="0">
                 <a:solidFill>
                   <a:srgbClr val="0A2540"/>
                 </a:solidFill>
@@ -7866,7 +12755,7 @@
               </a:lnSpc>
             </a:pPr>
             <a:r>
-              <a:rPr sz="1400" b="0" i="1">
+              <a:rPr sz="1400" b="0" i="1" dirty="0">
                 <a:solidFill>
                   <a:srgbClr val="0A2540"/>
                 </a:solidFill>
@@ -7882,7 +12771,7 @@
               </a:lnSpc>
             </a:pPr>
             <a:r>
-              <a:rPr sz="1600" b="0" i="0">
+              <a:rPr sz="1600" b="0" i="0" dirty="0">
                 <a:solidFill>
                   <a:srgbClr val="0A2540"/>
                 </a:solidFill>
@@ -7898,7 +12787,7 @@
               </a:lnSpc>
             </a:pPr>
             <a:r>
-              <a:rPr sz="1800" b="1" i="0">
+              <a:rPr sz="1800" b="1" i="0" dirty="0">
                 <a:solidFill>
                   <a:srgbClr val="FF6B35"/>
                 </a:solidFill>
@@ -7914,7 +12803,7 @@
               </a:lnSpc>
             </a:pPr>
             <a:r>
-              <a:rPr sz="400" b="0" i="0">
+              <a:rPr sz="400" b="0" i="0" dirty="0">
                 <a:solidFill>
                   <a:srgbClr val="0A2540"/>
                 </a:solidFill>
@@ -7930,7 +12819,7 @@
               </a:lnSpc>
             </a:pPr>
             <a:r>
-              <a:rPr sz="1300" b="0" i="0">
+              <a:rPr sz="1300" b="0" i="0" dirty="0">
                 <a:solidFill>
                   <a:srgbClr val="4A5568"/>
                 </a:solidFill>
@@ -7946,7 +12835,7 @@
               </a:lnSpc>
             </a:pPr>
             <a:r>
-              <a:rPr sz="1300" b="0" i="0">
+              <a:rPr sz="1300" b="0" i="0" dirty="0">
                 <a:solidFill>
                   <a:srgbClr val="4A5568"/>
                 </a:solidFill>
@@ -7962,7 +12851,7 @@
               </a:lnSpc>
             </a:pPr>
             <a:r>
-              <a:rPr sz="800" b="0" i="0">
+              <a:rPr sz="800" b="0" i="0" dirty="0">
                 <a:solidFill>
                   <a:srgbClr val="0A2540"/>
                 </a:solidFill>
@@ -7978,7 +12867,7 @@
               </a:lnSpc>
             </a:pPr>
             <a:r>
-              <a:rPr sz="1400" b="1" i="0">
+              <a:rPr sz="1400" b="1" i="0" dirty="0">
                 <a:solidFill>
                   <a:srgbClr val="0A2540"/>
                 </a:solidFill>
@@ -7994,7 +12883,7 @@
               </a:lnSpc>
             </a:pPr>
             <a:r>
-              <a:rPr sz="1200" b="0" i="0">
+              <a:rPr sz="1200" b="0" i="0" dirty="0">
                 <a:solidFill>
                   <a:srgbClr val="4A5568"/>
                 </a:solidFill>
@@ -8010,7 +12899,7 @@
               </a:lnSpc>
             </a:pPr>
             <a:r>
-              <a:rPr sz="1200" b="0" i="0">
+              <a:rPr sz="1200" b="0" i="0" dirty="0">
                 <a:solidFill>
                   <a:srgbClr val="4A5568"/>
                 </a:solidFill>
@@ -8030,15 +12919,15 @@
           <p:nvPr/>
         </p:nvPicPr>
         <p:blipFill>
-          <a:blip r:embed="rId2"/>
+          <a:blip r:embed="rId3"/>
           <a:stretch>
             <a:fillRect/>
           </a:stretch>
         </p:blipFill>
         <p:spPr>
           <a:xfrm>
-            <a:off x="6400800" y="2982544"/>
-            <a:ext cx="5303520" cy="2081631"/>
+            <a:off x="5971588" y="2182444"/>
+            <a:ext cx="6220412" cy="2441511"/>
           </a:xfrm>
           <a:prstGeom prst="rect">
             <a:avLst/>
@@ -8062,7 +12951,7 @@
           <a:noFill/>
         </p:spPr>
         <p:txBody>
-          <a:bodyPr wrap="square" anchor="t" lIns="0" rIns="0" tIns="0" bIns="0">
+          <a:bodyPr wrap="square" lIns="0" tIns="0" rIns="0" bIns="0" anchor="t">
             <a:spAutoFit/>
           </a:bodyPr>
           <a:lstStyle/>
@@ -8097,7 +12986,7 @@
           <a:noFill/>
         </p:spPr>
         <p:txBody>
-          <a:bodyPr wrap="square" anchor="t" lIns="0" rIns="0" tIns="0" bIns="0">
+          <a:bodyPr wrap="square" lIns="0" tIns="0" rIns="0" bIns="0" anchor="t">
             <a:spAutoFit/>
           </a:bodyPr>
           <a:lstStyle/>
@@ -8124,7 +13013,7 @@
 </file>
 
 <file path=ppt/slides/slide6.xml><?xml version="1.0" encoding="utf-8"?>
-<p:sld xmlns:a="http://schemas.openxmlformats.org/drawingml/2006/main" xmlns:p="http://schemas.openxmlformats.org/presentationml/2006/main" xmlns:r="http://schemas.openxmlformats.org/officeDocument/2006/relationships">
+<p:sld xmlns:a="http://schemas.openxmlformats.org/drawingml/2006/main" xmlns:r="http://schemas.openxmlformats.org/officeDocument/2006/relationships" xmlns:p="http://schemas.openxmlformats.org/presentationml/2006/main">
   <p:cSld>
     <p:spTree>
       <p:nvGrpSpPr>
@@ -8132,7 +13021,14 @@
         <p:cNvGrpSpPr/>
         <p:nvPr/>
       </p:nvGrpSpPr>
-      <p:grpSpPr/>
+      <p:grpSpPr>
+        <a:xfrm>
+          <a:off x="0" y="0"/>
+          <a:ext cx="0" cy="0"/>
+          <a:chOff x="0" y="0"/>
+          <a:chExt cx="0" cy="0"/>
+        </a:xfrm>
+      </p:grpSpPr>
       <p:sp>
         <p:nvSpPr>
           <p:cNvPr id="2" name="Rectangle 1"/>
@@ -8174,6 +13070,7 @@
           <a:lstStyle/>
           <a:p>
             <a:pPr algn="ctr"/>
+            <a:endParaRPr/>
           </a:p>
         </p:txBody>
       </p:sp>
@@ -8194,7 +13091,7 @@
           <a:noFill/>
         </p:spPr>
         <p:txBody>
-          <a:bodyPr wrap="square" anchor="t" lIns="0" rIns="0" tIns="0" bIns="0">
+          <a:bodyPr wrap="square" lIns="0" tIns="0" rIns="0" bIns="0" anchor="t">
             <a:spAutoFit/>
           </a:bodyPr>
           <a:lstStyle/>
@@ -8229,7 +13126,7 @@
           <a:noFill/>
         </p:spPr>
         <p:txBody>
-          <a:bodyPr wrap="square" anchor="t" lIns="0" rIns="0" tIns="0" bIns="0">
+          <a:bodyPr wrap="square" lIns="0" tIns="0" rIns="0" bIns="0" anchor="t">
             <a:spAutoFit/>
           </a:bodyPr>
           <a:lstStyle/>
@@ -8264,7 +13161,7 @@
           <a:noFill/>
         </p:spPr>
         <p:txBody>
-          <a:bodyPr wrap="square" anchor="t" lIns="0" rIns="0" tIns="0" bIns="0">
+          <a:bodyPr wrap="square" lIns="0" tIns="0" rIns="0" bIns="0" anchor="t">
             <a:spAutoFit/>
           </a:bodyPr>
           <a:lstStyle/>
@@ -8521,6 +13418,7 @@
           <a:lstStyle/>
           <a:p>
             <a:pPr algn="ctr"/>
+            <a:endParaRPr/>
           </a:p>
         </p:txBody>
       </p:sp>
@@ -8541,7 +13439,7 @@
           <a:noFill/>
         </p:spPr>
         <p:txBody>
-          <a:bodyPr wrap="square" anchor="t" lIns="0" rIns="0" tIns="0" bIns="0">
+          <a:bodyPr wrap="square" lIns="0" tIns="0" rIns="0" bIns="0" anchor="t">
             <a:spAutoFit/>
           </a:bodyPr>
           <a:lstStyle/>
@@ -8600,6 +13498,7 @@
           <a:lstStyle/>
           <a:p>
             <a:pPr algn="ctr"/>
+            <a:endParaRPr/>
           </a:p>
         </p:txBody>
       </p:sp>
@@ -8646,6 +13545,7 @@
           <a:lstStyle/>
           <a:p>
             <a:pPr algn="ctr"/>
+            <a:endParaRPr/>
           </a:p>
         </p:txBody>
       </p:sp>
@@ -8666,7 +13566,7 @@
           <a:noFill/>
         </p:spPr>
         <p:txBody>
-          <a:bodyPr wrap="square" anchor="t" lIns="0" rIns="0" tIns="0" bIns="0">
+          <a:bodyPr wrap="square" lIns="0" tIns="0" rIns="0" bIns="0" anchor="t">
             <a:spAutoFit/>
           </a:bodyPr>
           <a:lstStyle/>
@@ -8725,6 +13625,7 @@
           <a:lstStyle/>
           <a:p>
             <a:pPr algn="ctr"/>
+            <a:endParaRPr/>
           </a:p>
         </p:txBody>
       </p:sp>
@@ -8736,7 +13637,7 @@
         </p:nvSpPr>
         <p:spPr>
           <a:xfrm>
-            <a:off x="8412480" y="4617720"/>
+            <a:off x="8275320" y="4608576"/>
             <a:ext cx="1280160" cy="274320"/>
           </a:xfrm>
           <a:prstGeom prst="rect">
@@ -8745,14 +13646,14 @@
           <a:noFill/>
         </p:spPr>
         <p:txBody>
-          <a:bodyPr wrap="square" anchor="t" lIns="0" rIns="0" tIns="0" bIns="0">
+          <a:bodyPr wrap="square" lIns="0" tIns="0" rIns="0" bIns="0" anchor="t">
             <a:spAutoFit/>
           </a:bodyPr>
           <a:lstStyle/>
           <a:p>
             <a:pPr algn="ctr"/>
             <a:r>
-              <a:rPr sz="1100" b="1" i="0">
+              <a:rPr sz="1100" b="1" i="0" dirty="0">
                 <a:solidFill>
                   <a:srgbClr val="0A2540"/>
                 </a:solidFill>
@@ -8780,7 +13681,7 @@
           <a:noFill/>
         </p:spPr>
         <p:txBody>
-          <a:bodyPr wrap="square" anchor="t" lIns="0" rIns="0" tIns="0" bIns="0">
+          <a:bodyPr wrap="square" lIns="0" tIns="0" rIns="0" bIns="0" anchor="t">
             <a:spAutoFit/>
           </a:bodyPr>
           <a:lstStyle/>
@@ -8815,7 +13716,7 @@
           <a:noFill/>
         </p:spPr>
         <p:txBody>
-          <a:bodyPr wrap="square" anchor="t" lIns="0" rIns="0" tIns="0" bIns="0">
+          <a:bodyPr wrap="square" lIns="0" tIns="0" rIns="0" bIns="0" anchor="t">
             <a:spAutoFit/>
           </a:bodyPr>
           <a:lstStyle/>
@@ -8850,7 +13751,7 @@
           <a:noFill/>
         </p:spPr>
         <p:txBody>
-          <a:bodyPr wrap="square" anchor="t" lIns="0" rIns="0" tIns="0" bIns="0">
+          <a:bodyPr wrap="square" lIns="0" tIns="0" rIns="0" bIns="0" anchor="t">
             <a:spAutoFit/>
           </a:bodyPr>
           <a:lstStyle/>
@@ -8885,7 +13786,7 @@
           <a:noFill/>
         </p:spPr>
         <p:txBody>
-          <a:bodyPr wrap="square" anchor="t" lIns="0" rIns="0" tIns="0" bIns="0">
+          <a:bodyPr wrap="square" lIns="0" tIns="0" rIns="0" bIns="0" anchor="t">
             <a:spAutoFit/>
           </a:bodyPr>
           <a:lstStyle/>
@@ -8920,7 +13821,7 @@
           <a:noFill/>
         </p:spPr>
         <p:txBody>
-          <a:bodyPr wrap="square" anchor="t" lIns="0" rIns="0" tIns="0" bIns="0">
+          <a:bodyPr wrap="square" lIns="0" tIns="0" rIns="0" bIns="0" anchor="t">
             <a:spAutoFit/>
           </a:bodyPr>
           <a:lstStyle/>
@@ -8955,7 +13856,7 @@
           <a:noFill/>
         </p:spPr>
         <p:txBody>
-          <a:bodyPr wrap="square" anchor="t" lIns="0" rIns="0" tIns="0" bIns="0">
+          <a:bodyPr wrap="square" lIns="0" tIns="0" rIns="0" bIns="0" anchor="t">
             <a:spAutoFit/>
           </a:bodyPr>
           <a:lstStyle/>
@@ -8982,7 +13883,7 @@
 </file>
 
 <file path=ppt/slides/slide7.xml><?xml version="1.0" encoding="utf-8"?>
-<p:sld xmlns:a="http://schemas.openxmlformats.org/drawingml/2006/main" xmlns:p="http://schemas.openxmlformats.org/presentationml/2006/main" xmlns:r="http://schemas.openxmlformats.org/officeDocument/2006/relationships">
+<p:sld xmlns:a="http://schemas.openxmlformats.org/drawingml/2006/main" xmlns:r="http://schemas.openxmlformats.org/officeDocument/2006/relationships" xmlns:p="http://schemas.openxmlformats.org/presentationml/2006/main">
   <p:cSld>
     <p:spTree>
       <p:nvGrpSpPr>
@@ -8990,7 +13891,14 @@
         <p:cNvGrpSpPr/>
         <p:nvPr/>
       </p:nvGrpSpPr>
-      <p:grpSpPr/>
+      <p:grpSpPr>
+        <a:xfrm>
+          <a:off x="0" y="0"/>
+          <a:ext cx="0" cy="0"/>
+          <a:chOff x="0" y="0"/>
+          <a:chExt cx="0" cy="0"/>
+        </a:xfrm>
+      </p:grpSpPr>
       <p:sp>
         <p:nvSpPr>
           <p:cNvPr id="2" name="Rectangle 1"/>
@@ -9032,6 +13940,7 @@
           <a:lstStyle/>
           <a:p>
             <a:pPr algn="ctr"/>
+            <a:endParaRPr/>
           </a:p>
         </p:txBody>
       </p:sp>
@@ -9052,7 +13961,7 @@
           <a:noFill/>
         </p:spPr>
         <p:txBody>
-          <a:bodyPr wrap="square" anchor="t" lIns="0" rIns="0" tIns="0" bIns="0">
+          <a:bodyPr wrap="square" lIns="0" tIns="0" rIns="0" bIns="0" anchor="t">
             <a:spAutoFit/>
           </a:bodyPr>
           <a:lstStyle/>
@@ -9087,7 +13996,7 @@
           <a:noFill/>
         </p:spPr>
         <p:txBody>
-          <a:bodyPr wrap="square" anchor="t" lIns="0" rIns="0" tIns="0" bIns="0">
+          <a:bodyPr wrap="square" lIns="0" tIns="0" rIns="0" bIns="0" anchor="t">
             <a:spAutoFit/>
           </a:bodyPr>
           <a:lstStyle/>
@@ -9114,15 +14023,16 @@
           <p:nvPr/>
         </p:nvPicPr>
         <p:blipFill>
-          <a:blip r:embed="rId2"/>
+          <a:blip r:embed="rId3"/>
+          <a:srcRect b="12747"/>
           <a:stretch>
             <a:fillRect/>
           </a:stretch>
         </p:blipFill>
         <p:spPr>
           <a:xfrm>
-            <a:off x="1015235" y="1737360"/>
-            <a:ext cx="5010410" cy="4572000"/>
+            <a:off x="487680" y="1435608"/>
+            <a:ext cx="5958840" cy="4744340"/>
           </a:xfrm>
           <a:prstGeom prst="rect">
             <a:avLst/>
@@ -9146,7 +14056,7 @@
           <a:noFill/>
         </p:spPr>
         <p:txBody>
-          <a:bodyPr wrap="square" anchor="t" lIns="0" rIns="0" tIns="0" bIns="0">
+          <a:bodyPr wrap="square" lIns="0" tIns="0" rIns="0" bIns="0" anchor="t">
             <a:spAutoFit/>
           </a:bodyPr>
           <a:lstStyle/>
@@ -9409,7 +14319,7 @@
           <a:noFill/>
         </p:spPr>
         <p:txBody>
-          <a:bodyPr wrap="square" anchor="t" lIns="0" rIns="0" tIns="0" bIns="0">
+          <a:bodyPr wrap="square" lIns="0" tIns="0" rIns="0" bIns="0" anchor="t">
             <a:spAutoFit/>
           </a:bodyPr>
           <a:lstStyle/>
@@ -9444,7 +14354,7 @@
           <a:noFill/>
         </p:spPr>
         <p:txBody>
-          <a:bodyPr wrap="square" anchor="t" lIns="0" rIns="0" tIns="0" bIns="0">
+          <a:bodyPr wrap="square" lIns="0" tIns="0" rIns="0" bIns="0" anchor="t">
             <a:spAutoFit/>
           </a:bodyPr>
           <a:lstStyle/>
@@ -9471,7 +14381,7 @@
 </file>
 
 <file path=ppt/slides/slide8.xml><?xml version="1.0" encoding="utf-8"?>
-<p:sld xmlns:a="http://schemas.openxmlformats.org/drawingml/2006/main" xmlns:p="http://schemas.openxmlformats.org/presentationml/2006/main" xmlns:r="http://schemas.openxmlformats.org/officeDocument/2006/relationships">
+<p:sld xmlns:a="http://schemas.openxmlformats.org/drawingml/2006/main" xmlns:r="http://schemas.openxmlformats.org/officeDocument/2006/relationships" xmlns:p="http://schemas.openxmlformats.org/presentationml/2006/main">
   <p:cSld>
     <p:spTree>
       <p:nvGrpSpPr>
@@ -9479,7 +14389,14 @@
         <p:cNvGrpSpPr/>
         <p:nvPr/>
       </p:nvGrpSpPr>
-      <p:grpSpPr/>
+      <p:grpSpPr>
+        <a:xfrm>
+          <a:off x="0" y="0"/>
+          <a:ext cx="0" cy="0"/>
+          <a:chOff x="0" y="0"/>
+          <a:chExt cx="0" cy="0"/>
+        </a:xfrm>
+      </p:grpSpPr>
       <p:sp>
         <p:nvSpPr>
           <p:cNvPr id="2" name="Rectangle 1"/>
@@ -9521,6 +14438,7 @@
           <a:lstStyle/>
           <a:p>
             <a:pPr algn="ctr"/>
+            <a:endParaRPr/>
           </a:p>
         </p:txBody>
       </p:sp>
@@ -9541,7 +14459,7 @@
           <a:noFill/>
         </p:spPr>
         <p:txBody>
-          <a:bodyPr wrap="square" anchor="t" lIns="0" rIns="0" tIns="0" bIns="0">
+          <a:bodyPr wrap="square" lIns="0" tIns="0" rIns="0" bIns="0" anchor="t">
             <a:spAutoFit/>
           </a:bodyPr>
           <a:lstStyle/>
@@ -9576,7 +14494,7 @@
           <a:noFill/>
         </p:spPr>
         <p:txBody>
-          <a:bodyPr wrap="square" anchor="t" lIns="0" rIns="0" tIns="0" bIns="0">
+          <a:bodyPr wrap="square" lIns="0" tIns="0" rIns="0" bIns="0" anchor="t">
             <a:spAutoFit/>
           </a:bodyPr>
           <a:lstStyle/>
@@ -9603,15 +14521,16 @@
           <p:nvPr/>
         </p:nvPicPr>
         <p:blipFill>
-          <a:blip r:embed="rId2"/>
+          <a:blip r:embed="rId3"/>
+          <a:srcRect l="2209" r="9342" b="17790"/>
           <a:stretch>
             <a:fillRect/>
           </a:stretch>
         </p:blipFill>
         <p:spPr>
           <a:xfrm>
-            <a:off x="548640" y="2180369"/>
-            <a:ext cx="5303520" cy="3685982"/>
+            <a:off x="-1" y="2148840"/>
+            <a:ext cx="6065521" cy="3918218"/>
           </a:xfrm>
           <a:prstGeom prst="rect">
             <a:avLst/>
@@ -9635,7 +14554,7 @@
           <a:noFill/>
         </p:spPr>
         <p:txBody>
-          <a:bodyPr wrap="square" anchor="t" lIns="0" rIns="0" tIns="0" bIns="0">
+          <a:bodyPr wrap="square" lIns="0" tIns="0" rIns="0" bIns="0" anchor="t">
             <a:spAutoFit/>
           </a:bodyPr>
           <a:lstStyle/>
@@ -9670,7 +14589,7 @@
           <a:noFill/>
         </p:spPr>
         <p:txBody>
-          <a:bodyPr wrap="square" anchor="t" lIns="0" rIns="0" tIns="0" bIns="0">
+          <a:bodyPr wrap="square" lIns="0" tIns="0" rIns="0" bIns="0" anchor="t">
             <a:spAutoFit/>
           </a:bodyPr>
           <a:lstStyle/>
@@ -9729,6 +14648,7 @@
           <a:lstStyle/>
           <a:p>
             <a:pPr algn="ctr"/>
+            <a:endParaRPr/>
           </a:p>
         </p:txBody>
       </p:sp>
@@ -9749,7 +14669,7 @@
           <a:noFill/>
         </p:spPr>
         <p:txBody>
-          <a:bodyPr wrap="square" lIns="0" rIns="0" tIns="0" bIns="0">
+          <a:bodyPr wrap="square" lIns="0" tIns="0" rIns="0" bIns="0">
             <a:spAutoFit/>
           </a:bodyPr>
           <a:lstStyle/>
@@ -9948,7 +14868,7 @@
           <a:noFill/>
         </p:spPr>
         <p:txBody>
-          <a:bodyPr wrap="square" anchor="t" lIns="0" rIns="0" tIns="0" bIns="0">
+          <a:bodyPr wrap="square" lIns="0" tIns="0" rIns="0" bIns="0" anchor="t">
             <a:spAutoFit/>
           </a:bodyPr>
           <a:lstStyle/>
@@ -9983,7 +14903,7 @@
           <a:noFill/>
         </p:spPr>
         <p:txBody>
-          <a:bodyPr wrap="square" anchor="t" lIns="0" rIns="0" tIns="0" bIns="0">
+          <a:bodyPr wrap="square" lIns="0" tIns="0" rIns="0" bIns="0" anchor="t">
             <a:spAutoFit/>
           </a:bodyPr>
           <a:lstStyle/>
@@ -10018,7 +14938,7 @@
           <a:noFill/>
         </p:spPr>
         <p:txBody>
-          <a:bodyPr wrap="square" anchor="t" lIns="0" rIns="0" tIns="0" bIns="0">
+          <a:bodyPr wrap="square" lIns="0" tIns="0" rIns="0" bIns="0" anchor="t">
             <a:spAutoFit/>
           </a:bodyPr>
           <a:lstStyle/>
@@ -10045,7 +14965,7 @@
 </file>
 
 <file path=ppt/slides/slide9.xml><?xml version="1.0" encoding="utf-8"?>
-<p:sld xmlns:a="http://schemas.openxmlformats.org/drawingml/2006/main" xmlns:p="http://schemas.openxmlformats.org/presentationml/2006/main" xmlns:r="http://schemas.openxmlformats.org/officeDocument/2006/relationships">
+<p:sld xmlns:a="http://schemas.openxmlformats.org/drawingml/2006/main" xmlns:r="http://schemas.openxmlformats.org/officeDocument/2006/relationships" xmlns:p="http://schemas.openxmlformats.org/presentationml/2006/main">
   <p:cSld>
     <p:spTree>
       <p:nvGrpSpPr>
@@ -10053,7 +14973,14 @@
         <p:cNvGrpSpPr/>
         <p:nvPr/>
       </p:nvGrpSpPr>
-      <p:grpSpPr/>
+      <p:grpSpPr>
+        <a:xfrm>
+          <a:off x="0" y="0"/>
+          <a:ext cx="0" cy="0"/>
+          <a:chOff x="0" y="0"/>
+          <a:chExt cx="0" cy="0"/>
+        </a:xfrm>
+      </p:grpSpPr>
       <p:sp>
         <p:nvSpPr>
           <p:cNvPr id="2" name="Rectangle 1"/>
@@ -10095,6 +15022,7 @@
           <a:lstStyle/>
           <a:p>
             <a:pPr algn="ctr"/>
+            <a:endParaRPr/>
           </a:p>
         </p:txBody>
       </p:sp>
@@ -10115,7 +15043,7 @@
           <a:noFill/>
         </p:spPr>
         <p:txBody>
-          <a:bodyPr wrap="square" anchor="t" lIns="0" rIns="0" tIns="0" bIns="0">
+          <a:bodyPr wrap="square" lIns="0" tIns="0" rIns="0" bIns="0" anchor="t">
             <a:spAutoFit/>
           </a:bodyPr>
           <a:lstStyle/>
@@ -10150,7 +15078,7 @@
           <a:noFill/>
         </p:spPr>
         <p:txBody>
-          <a:bodyPr wrap="square" anchor="t" lIns="0" rIns="0" tIns="0" bIns="0">
+          <a:bodyPr wrap="square" lIns="0" tIns="0" rIns="0" bIns="0" anchor="t">
             <a:spAutoFit/>
           </a:bodyPr>
           <a:lstStyle/>
@@ -10177,15 +15105,16 @@
           <p:nvPr/>
         </p:nvPicPr>
         <p:blipFill>
-          <a:blip r:embed="rId2"/>
+          <a:blip r:embed="rId3"/>
+          <a:srcRect b="8453"/>
           <a:stretch>
             <a:fillRect/>
           </a:stretch>
         </p:blipFill>
         <p:spPr>
           <a:xfrm>
-            <a:off x="1486975" y="1737360"/>
-            <a:ext cx="5621408" cy="4754880"/>
+            <a:off x="1005425" y="1664018"/>
+            <a:ext cx="5971100" cy="4623708"/>
           </a:xfrm>
           <a:prstGeom prst="rect">
             <a:avLst/>
@@ -10209,7 +15138,7 @@
           <a:noFill/>
         </p:spPr>
         <p:txBody>
-          <a:bodyPr wrap="square" anchor="t" lIns="0" rIns="0" tIns="0" bIns="0">
+          <a:bodyPr wrap="square" lIns="0" tIns="0" rIns="0" bIns="0" anchor="t">
             <a:spAutoFit/>
           </a:bodyPr>
           <a:lstStyle/>
@@ -10220,7 +15149,7 @@
               </a:lnSpc>
             </a:pPr>
             <a:r>
-              <a:rPr sz="1600" b="1" i="0">
+              <a:rPr sz="1600" b="1" i="0" dirty="0">
                 <a:solidFill>
                   <a:srgbClr val="0A2540"/>
                 </a:solidFill>
@@ -10236,7 +15165,7 @@
               </a:lnSpc>
             </a:pPr>
             <a:r>
-              <a:rPr sz="1200" b="0" i="0">
+              <a:rPr sz="1200" b="0" i="0" dirty="0">
                 <a:solidFill>
                   <a:srgbClr val="4A5568"/>
                 </a:solidFill>
@@ -10252,7 +15181,7 @@
               </a:lnSpc>
             </a:pPr>
             <a:r>
-              <a:rPr sz="1100" b="0" i="1">
+              <a:rPr sz="1100" b="0" i="1" dirty="0">
                 <a:solidFill>
                   <a:srgbClr val="64748B"/>
                 </a:solidFill>
@@ -10268,7 +15197,7 @@
               </a:lnSpc>
             </a:pPr>
             <a:r>
-              <a:rPr sz="1000" b="0" i="0">
+              <a:rPr sz="1000" b="0" i="0" dirty="0">
                 <a:solidFill>
                   <a:srgbClr val="0A2540"/>
                 </a:solidFill>
@@ -10284,7 +15213,7 @@
               </a:lnSpc>
             </a:pPr>
             <a:r>
-              <a:rPr sz="1600" b="1" i="0">
+              <a:rPr sz="1600" b="1" i="0" dirty="0">
                 <a:solidFill>
                   <a:srgbClr val="0A2540"/>
                 </a:solidFill>
@@ -10300,7 +15229,7 @@
               </a:lnSpc>
             </a:pPr>
             <a:r>
-              <a:rPr sz="1200" b="0" i="0">
+              <a:rPr sz="1200" b="0" i="0" dirty="0">
                 <a:solidFill>
                   <a:srgbClr val="4A5568"/>
                 </a:solidFill>
@@ -10316,7 +15245,7 @@
               </a:lnSpc>
             </a:pPr>
             <a:r>
-              <a:rPr sz="1000" b="0" i="0">
+              <a:rPr sz="1000" b="0" i="0" dirty="0">
                 <a:solidFill>
                   <a:srgbClr val="0A2540"/>
                 </a:solidFill>
@@ -10332,13 +15261,31 @@
               </a:lnSpc>
             </a:pPr>
             <a:r>
-              <a:rPr sz="1600" b="1" i="0">
+              <a:rPr sz="1600" b="1" i="0" dirty="0">
                 <a:solidFill>
                   <a:srgbClr val="FF6B35"/>
                 </a:solidFill>
                 <a:latin typeface="Consolas"/>
               </a:rPr>
-              <a:t>3. asyncio.gather(…)</a:t>
+              <a:t>3. </a:t>
+            </a:r>
+            <a:r>
+              <a:rPr sz="1600" b="1" i="0" dirty="0" err="1">
+                <a:solidFill>
+                  <a:srgbClr val="FF6B35"/>
+                </a:solidFill>
+                <a:latin typeface="Consolas"/>
+              </a:rPr>
+              <a:t>asyncio.gather</a:t>
+            </a:r>
+            <a:r>
+              <a:rPr sz="1600" b="1" i="0" dirty="0">
+                <a:solidFill>
+                  <a:srgbClr val="FF6B35"/>
+                </a:solidFill>
+                <a:latin typeface="Consolas"/>
+              </a:rPr>
+              <a:t>(…)</a:t>
             </a:r>
           </a:p>
           <a:p>
@@ -10348,7 +15295,7 @@
               </a:lnSpc>
             </a:pPr>
             <a:r>
-              <a:rPr sz="1200" b="0" i="0">
+              <a:rPr sz="1200" b="0" i="0" dirty="0">
                 <a:solidFill>
                   <a:srgbClr val="4A5568"/>
                 </a:solidFill>
@@ -10364,7 +15311,7 @@
               </a:lnSpc>
             </a:pPr>
             <a:r>
-              <a:rPr sz="1200" b="0" i="0">
+              <a:rPr sz="1200" b="0" i="0" dirty="0">
                 <a:solidFill>
                   <a:srgbClr val="4A5568"/>
                 </a:solidFill>
@@ -10380,7 +15327,7 @@
               </a:lnSpc>
             </a:pPr>
             <a:r>
-              <a:rPr sz="1200" b="0" i="0">
+              <a:rPr sz="1200" b="0" i="0" dirty="0">
                 <a:solidFill>
                   <a:srgbClr val="4A5568"/>
                 </a:solidFill>
@@ -10396,7 +15343,7 @@
               </a:lnSpc>
             </a:pPr>
             <a:r>
-              <a:rPr sz="1200" b="0" i="0">
+              <a:rPr sz="1200" b="0" i="0" dirty="0">
                 <a:solidFill>
                   <a:srgbClr val="4A5568"/>
                 </a:solidFill>
@@ -10412,7 +15359,7 @@
               </a:lnSpc>
             </a:pPr>
             <a:r>
-              <a:rPr sz="1000" b="0" i="0">
+              <a:rPr sz="1000" b="0" i="0" dirty="0">
                 <a:solidFill>
                   <a:srgbClr val="0A2540"/>
                 </a:solidFill>
@@ -10428,7 +15375,7 @@
               </a:lnSpc>
             </a:pPr>
             <a:r>
-              <a:rPr sz="1600" b="1" i="0">
+              <a:rPr sz="1600" b="1" i="0" dirty="0">
                 <a:solidFill>
                   <a:srgbClr val="0A2540"/>
                 </a:solidFill>
@@ -10444,7 +15391,7 @@
               </a:lnSpc>
             </a:pPr>
             <a:r>
-              <a:rPr sz="1200" b="0" i="0">
+              <a:rPr sz="1200" b="0" i="0" dirty="0">
                 <a:solidFill>
                   <a:srgbClr val="4A5568"/>
                 </a:solidFill>
@@ -10460,7 +15407,7 @@
               </a:lnSpc>
             </a:pPr>
             <a:r>
-              <a:rPr sz="1000" b="0" i="0">
+              <a:rPr sz="1000" b="0" i="0" dirty="0">
                 <a:solidFill>
                   <a:srgbClr val="0A2540"/>
                 </a:solidFill>
@@ -10476,7 +15423,7 @@
               </a:lnSpc>
             </a:pPr>
             <a:r>
-              <a:rPr sz="1400" b="1" i="0">
+              <a:rPr sz="1400" b="1" i="0" dirty="0">
                 <a:solidFill>
                   <a:srgbClr val="0A2540"/>
                 </a:solidFill>
@@ -10504,7 +15451,7 @@
           <a:noFill/>
         </p:spPr>
         <p:txBody>
-          <a:bodyPr wrap="square" anchor="t" lIns="0" rIns="0" tIns="0" bIns="0">
+          <a:bodyPr wrap="square" lIns="0" tIns="0" rIns="0" bIns="0" anchor="t">
             <a:spAutoFit/>
           </a:bodyPr>
           <a:lstStyle/>
@@ -10539,7 +15486,7 @@
           <a:noFill/>
         </p:spPr>
         <p:txBody>
-          <a:bodyPr wrap="square" anchor="t" lIns="0" rIns="0" tIns="0" bIns="0">
+          <a:bodyPr wrap="square" lIns="0" tIns="0" rIns="0" bIns="0" anchor="t">
             <a:spAutoFit/>
           </a:bodyPr>
           <a:lstStyle/>
@@ -10883,4 +15830,319 @@
   </a:objectDefaults>
   <a:extraClrSchemeLst/>
 </a:theme>
+</file>
+
+<file path=ppt/theme/theme2.xml><?xml version="1.0" encoding="utf-8"?>
+<a:theme xmlns:a="http://schemas.openxmlformats.org/drawingml/2006/main" name="Office Theme">
+  <a:themeElements>
+    <a:clrScheme name="Office">
+      <a:dk1>
+        <a:sysClr val="windowText" lastClr="000000"/>
+      </a:dk1>
+      <a:lt1>
+        <a:sysClr val="window" lastClr="FFFFFF"/>
+      </a:lt1>
+      <a:dk2>
+        <a:srgbClr val="0E2841"/>
+      </a:dk2>
+      <a:lt2>
+        <a:srgbClr val="E8E8E8"/>
+      </a:lt2>
+      <a:accent1>
+        <a:srgbClr val="156082"/>
+      </a:accent1>
+      <a:accent2>
+        <a:srgbClr val="E97132"/>
+      </a:accent2>
+      <a:accent3>
+        <a:srgbClr val="196B24"/>
+      </a:accent3>
+      <a:accent4>
+        <a:srgbClr val="0F9ED5"/>
+      </a:accent4>
+      <a:accent5>
+        <a:srgbClr val="A02B93"/>
+      </a:accent5>
+      <a:accent6>
+        <a:srgbClr val="4EA72E"/>
+      </a:accent6>
+      <a:hlink>
+        <a:srgbClr val="467886"/>
+      </a:hlink>
+      <a:folHlink>
+        <a:srgbClr val="96607D"/>
+      </a:folHlink>
+    </a:clrScheme>
+    <a:fontScheme name="Office">
+      <a:majorFont>
+        <a:latin typeface="Aptos Display" panose="02110004020202020204"/>
+        <a:ea typeface=""/>
+        <a:cs typeface=""/>
+        <a:font script="Jpan" typeface="游ゴシック Light"/>
+        <a:font script="Hang" typeface="맑은 고딕"/>
+        <a:font script="Hans" typeface="等线 Light"/>
+        <a:font script="Hant" typeface="新細明體"/>
+        <a:font script="Arab" typeface="Times New Roman"/>
+        <a:font script="Hebr" typeface="Times New Roman"/>
+        <a:font script="Thai" typeface="Angsana New"/>
+        <a:font script="Ethi" typeface="Nyala"/>
+        <a:font script="Beng" typeface="Vrinda"/>
+        <a:font script="Gujr" typeface="Shruti"/>
+        <a:font script="Khmr" typeface="MoolBoran"/>
+        <a:font script="Knda" typeface="Tunga"/>
+        <a:font script="Guru" typeface="Raavi"/>
+        <a:font script="Cans" typeface="Euphemia"/>
+        <a:font script="Cher" typeface="Plantagenet Cherokee"/>
+        <a:font script="Yiii" typeface="Microsoft Yi Baiti"/>
+        <a:font script="Tibt" typeface="Microsoft Himalaya"/>
+        <a:font script="Thaa" typeface="MV Boli"/>
+        <a:font script="Deva" typeface="Mangal"/>
+        <a:font script="Telu" typeface="Gautami"/>
+        <a:font script="Taml" typeface="Latha"/>
+        <a:font script="Syrc" typeface="Estrangelo Edessa"/>
+        <a:font script="Orya" typeface="Kalinga"/>
+        <a:font script="Mlym" typeface="Kartika"/>
+        <a:font script="Laoo" typeface="DokChampa"/>
+        <a:font script="Sinh" typeface="Iskoola Pota"/>
+        <a:font script="Mong" typeface="Mongolian Baiti"/>
+        <a:font script="Viet" typeface="Times New Roman"/>
+        <a:font script="Uigh" typeface="Microsoft Uighur"/>
+        <a:font script="Geor" typeface="Sylfaen"/>
+        <a:font script="Armn" typeface="Arial"/>
+        <a:font script="Bugi" typeface="Leelawadee UI"/>
+        <a:font script="Bopo" typeface="Microsoft JhengHei"/>
+        <a:font script="Java" typeface="Javanese Text"/>
+        <a:font script="Lisu" typeface="Segoe UI"/>
+        <a:font script="Mymr" typeface="Myanmar Text"/>
+        <a:font script="Nkoo" typeface="Ebrima"/>
+        <a:font script="Olck" typeface="Nirmala UI"/>
+        <a:font script="Osma" typeface="Ebrima"/>
+        <a:font script="Phag" typeface="Phagspa"/>
+        <a:font script="Syrn" typeface="Estrangelo Edessa"/>
+        <a:font script="Syrj" typeface="Estrangelo Edessa"/>
+        <a:font script="Syre" typeface="Estrangelo Edessa"/>
+        <a:font script="Sora" typeface="Nirmala UI"/>
+        <a:font script="Tale" typeface="Microsoft Tai Le"/>
+        <a:font script="Talu" typeface="Microsoft New Tai Lue"/>
+        <a:font script="Tfng" typeface="Ebrima"/>
+      </a:majorFont>
+      <a:minorFont>
+        <a:latin typeface="Aptos" panose="02110004020202020204"/>
+        <a:ea typeface=""/>
+        <a:cs typeface=""/>
+        <a:font script="Jpan" typeface="游ゴシック"/>
+        <a:font script="Hang" typeface="맑은 고딕"/>
+        <a:font script="Hans" typeface="等线"/>
+        <a:font script="Hant" typeface="新細明體"/>
+        <a:font script="Arab" typeface="Arial"/>
+        <a:font script="Hebr" typeface="Arial"/>
+        <a:font script="Thai" typeface="Cordia New"/>
+        <a:font script="Ethi" typeface="Nyala"/>
+        <a:font script="Beng" typeface="Vrinda"/>
+        <a:font script="Gujr" typeface="Shruti"/>
+        <a:font script="Khmr" typeface="DaunPenh"/>
+        <a:font script="Knda" typeface="Tunga"/>
+        <a:font script="Guru" typeface="Raavi"/>
+        <a:font script="Cans" typeface="Euphemia"/>
+        <a:font script="Cher" typeface="Plantagenet Cherokee"/>
+        <a:font script="Yiii" typeface="Microsoft Yi Baiti"/>
+        <a:font script="Tibt" typeface="Microsoft Himalaya"/>
+        <a:font script="Thaa" typeface="MV Boli"/>
+        <a:font script="Deva" typeface="Mangal"/>
+        <a:font script="Telu" typeface="Gautami"/>
+        <a:font script="Taml" typeface="Latha"/>
+        <a:font script="Syrc" typeface="Estrangelo Edessa"/>
+        <a:font script="Orya" typeface="Kalinga"/>
+        <a:font script="Mlym" typeface="Kartika"/>
+        <a:font script="Laoo" typeface="DokChampa"/>
+        <a:font script="Sinh" typeface="Iskoola Pota"/>
+        <a:font script="Mong" typeface="Mongolian Baiti"/>
+        <a:font script="Viet" typeface="Arial"/>
+        <a:font script="Uigh" typeface="Microsoft Uighur"/>
+        <a:font script="Geor" typeface="Sylfaen"/>
+        <a:font script="Armn" typeface="Arial"/>
+        <a:font script="Bugi" typeface="Leelawadee UI"/>
+        <a:font script="Bopo" typeface="Microsoft JhengHei"/>
+        <a:font script="Java" typeface="Javanese Text"/>
+        <a:font script="Lisu" typeface="Segoe UI"/>
+        <a:font script="Mymr" typeface="Myanmar Text"/>
+        <a:font script="Nkoo" typeface="Ebrima"/>
+        <a:font script="Olck" typeface="Nirmala UI"/>
+        <a:font script="Osma" typeface="Ebrima"/>
+        <a:font script="Phag" typeface="Phagspa"/>
+        <a:font script="Syrn" typeface="Estrangelo Edessa"/>
+        <a:font script="Syrj" typeface="Estrangelo Edessa"/>
+        <a:font script="Syre" typeface="Estrangelo Edessa"/>
+        <a:font script="Sora" typeface="Nirmala UI"/>
+        <a:font script="Tale" typeface="Microsoft Tai Le"/>
+        <a:font script="Talu" typeface="Microsoft New Tai Lue"/>
+        <a:font script="Tfng" typeface="Ebrima"/>
+      </a:minorFont>
+    </a:fontScheme>
+    <a:fmtScheme name="Office">
+      <a:fillStyleLst>
+        <a:solidFill>
+          <a:schemeClr val="phClr"/>
+        </a:solidFill>
+        <a:gradFill rotWithShape="1">
+          <a:gsLst>
+            <a:gs pos="0">
+              <a:schemeClr val="phClr">
+                <a:lumMod val="110000"/>
+                <a:satMod val="105000"/>
+                <a:tint val="67000"/>
+              </a:schemeClr>
+            </a:gs>
+            <a:gs pos="50000">
+              <a:schemeClr val="phClr">
+                <a:lumMod val="105000"/>
+                <a:satMod val="103000"/>
+                <a:tint val="73000"/>
+              </a:schemeClr>
+            </a:gs>
+            <a:gs pos="100000">
+              <a:schemeClr val="phClr">
+                <a:lumMod val="105000"/>
+                <a:satMod val="109000"/>
+                <a:tint val="81000"/>
+              </a:schemeClr>
+            </a:gs>
+          </a:gsLst>
+          <a:lin ang="5400000" scaled="0"/>
+        </a:gradFill>
+        <a:gradFill rotWithShape="1">
+          <a:gsLst>
+            <a:gs pos="0">
+              <a:schemeClr val="phClr">
+                <a:satMod val="103000"/>
+                <a:lumMod val="102000"/>
+                <a:tint val="94000"/>
+              </a:schemeClr>
+            </a:gs>
+            <a:gs pos="50000">
+              <a:schemeClr val="phClr">
+                <a:satMod val="110000"/>
+                <a:lumMod val="100000"/>
+                <a:shade val="100000"/>
+              </a:schemeClr>
+            </a:gs>
+            <a:gs pos="100000">
+              <a:schemeClr val="phClr">
+                <a:lumMod val="99000"/>
+                <a:satMod val="120000"/>
+                <a:shade val="78000"/>
+              </a:schemeClr>
+            </a:gs>
+          </a:gsLst>
+          <a:lin ang="5400000" scaled="0"/>
+        </a:gradFill>
+      </a:fillStyleLst>
+      <a:lnStyleLst>
+        <a:ln w="12700" cap="flat" cmpd="sng" algn="ctr">
+          <a:solidFill>
+            <a:schemeClr val="phClr"/>
+          </a:solidFill>
+          <a:prstDash val="solid"/>
+          <a:miter lim="800000"/>
+        </a:ln>
+        <a:ln w="19050" cap="flat" cmpd="sng" algn="ctr">
+          <a:solidFill>
+            <a:schemeClr val="phClr"/>
+          </a:solidFill>
+          <a:prstDash val="solid"/>
+          <a:miter lim="800000"/>
+        </a:ln>
+        <a:ln w="25400" cap="flat" cmpd="sng" algn="ctr">
+          <a:solidFill>
+            <a:schemeClr val="phClr"/>
+          </a:solidFill>
+          <a:prstDash val="solid"/>
+          <a:miter lim="800000"/>
+        </a:ln>
+      </a:lnStyleLst>
+      <a:effectStyleLst>
+        <a:effectStyle>
+          <a:effectLst/>
+        </a:effectStyle>
+        <a:effectStyle>
+          <a:effectLst/>
+        </a:effectStyle>
+        <a:effectStyle>
+          <a:effectLst>
+            <a:outerShdw blurRad="57150" dist="19050" dir="5400000" algn="ctr" rotWithShape="0">
+              <a:srgbClr val="000000">
+                <a:alpha val="63000"/>
+              </a:srgbClr>
+            </a:outerShdw>
+          </a:effectLst>
+        </a:effectStyle>
+      </a:effectStyleLst>
+      <a:bgFillStyleLst>
+        <a:solidFill>
+          <a:schemeClr val="phClr"/>
+        </a:solidFill>
+        <a:solidFill>
+          <a:schemeClr val="phClr">
+            <a:tint val="95000"/>
+            <a:satMod val="170000"/>
+          </a:schemeClr>
+        </a:solidFill>
+        <a:gradFill rotWithShape="1">
+          <a:gsLst>
+            <a:gs pos="0">
+              <a:schemeClr val="phClr">
+                <a:tint val="93000"/>
+                <a:satMod val="150000"/>
+                <a:shade val="98000"/>
+                <a:lumMod val="102000"/>
+              </a:schemeClr>
+            </a:gs>
+            <a:gs pos="50000">
+              <a:schemeClr val="phClr">
+                <a:tint val="98000"/>
+                <a:satMod val="130000"/>
+                <a:shade val="90000"/>
+                <a:lumMod val="103000"/>
+              </a:schemeClr>
+            </a:gs>
+            <a:gs pos="100000">
+              <a:schemeClr val="phClr">
+                <a:shade val="63000"/>
+                <a:satMod val="120000"/>
+              </a:schemeClr>
+            </a:gs>
+          </a:gsLst>
+          <a:lin ang="5400000" scaled="0"/>
+        </a:gradFill>
+      </a:bgFillStyleLst>
+    </a:fmtScheme>
+  </a:themeElements>
+  <a:objectDefaults>
+    <a:lnDef>
+      <a:spPr/>
+      <a:bodyPr/>
+      <a:lstStyle/>
+      <a:style>
+        <a:lnRef idx="2">
+          <a:schemeClr val="accent1"/>
+        </a:lnRef>
+        <a:fillRef idx="0">
+          <a:schemeClr val="accent1"/>
+        </a:fillRef>
+        <a:effectRef idx="1">
+          <a:schemeClr val="accent1"/>
+        </a:effectRef>
+        <a:fontRef idx="minor">
+          <a:schemeClr val="tx1"/>
+        </a:fontRef>
+      </a:style>
+    </a:lnDef>
+  </a:objectDefaults>
+  <a:extraClrSchemeLst/>
+  <a:extLst>
+    <a:ext uri="{05A4C25C-085E-4340-85A3-A5531E510DB2}">
+      <thm15:themeFamily xmlns:thm15="http://schemas.microsoft.com/office/thememl/2012/main" name="Office Theme" id="{2E142A2C-CD16-42D6-873A-C26D2A0506FA}" vid="{1BDDFF52-6CD6-40A5-AB3C-68EB2F1E4D0A}"/>
+    </a:ext>
+  </a:extLst>
+</a:theme>
 </file>